--- a/docs/iceberg-zero-copy-poc-story.pptx
+++ b/docs/iceberg-zero-copy-poc-story.pptx
@@ -25,9 +25,14 @@
     <p:sldId id="273" r:id="rId19"/>
     <p:sldId id="274" r:id="rId20"/>
     <p:sldId id="275" r:id="rId21"/>
+    <p:sldId id="276" r:id="rId22"/>
+    <p:sldId id="277" r:id="rId23"/>
+    <p:sldId id="278" r:id="rId24"/>
+    <p:sldId id="279" r:id="rId25"/>
+    <p:sldId id="280" r:id="rId26"/>
   </p:sldIdLst>
   <p:notesMasterIdLst>
-    <p:notesMasterId r:id="rId22"/>
+    <p:notesMasterId r:id="rId27"/>
   </p:notesMasterIdLst>
   <p:sldSz cx="12192000" cy="6858000"/>
   <p:notesSz cx="6858000" cy="12192000"/>
@@ -1601,6 +1606,446 @@
             <a:fld id="{F7021451-1387-4CA6-816F-3879F97B5CBC}" type="slidenum">
               <a:rPr lang="en-US"/>
               <a:t>20</a:t>
+            </a:fld>
+            <a:endParaRPr lang="en-US"/>
+          </a:p>
+        </p:txBody>
+      </p:sp>
+    </p:spTree>
+    <p:extLst>
+      <p:ext uri="{BB962C8B-B14F-4D97-AF65-F5344CB8AC3E}">
+        <p14:creationId xmlns:p14="http://schemas.microsoft.com/office/powerpoint/2010/main" val="1024086991"/>
+      </p:ext>
+    </p:extLst>
+  </p:cSld>
+  <p:clrMapOvr>
+    <a:masterClrMapping/>
+  </p:clrMapOvr>
+</p:notes>
+</file>
+
+<file path=ppt/notesSlides/notesSlide21.xml><?xml version="1.0" encoding="utf-8"?>
+<p:notes xmlns:a="http://schemas.openxmlformats.org/drawingml/2006/main" xmlns:r="http://schemas.openxmlformats.org/officeDocument/2006/relationships" xmlns:p="http://schemas.openxmlformats.org/presentationml/2006/main">
+  <p:cSld>
+    <p:spTree>
+      <p:nvGrpSpPr>
+        <p:cNvPr id="1" name=""/>
+        <p:cNvGrpSpPr/>
+        <p:nvPr/>
+      </p:nvGrpSpPr>
+      <p:grpSpPr>
+        <a:xfrm>
+          <a:off x="0" y="0"/>
+          <a:ext cx="0" cy="0"/>
+          <a:chOff x="0" y="0"/>
+          <a:chExt cx="0" cy="0"/>
+        </a:xfrm>
+      </p:grpSpPr>
+      <p:sp>
+        <p:nvSpPr>
+          <p:cNvPr id="2" name="Slide Image Placeholder 1"/>
+          <p:cNvSpPr>
+            <a:spLocks noGrp="1" noRot="1" noChangeAspect="1"/>
+          </p:cNvSpPr>
+          <p:nvPr>
+            <p:ph type="sldImg"/>
+          </p:nvPr>
+        </p:nvSpPr>
+        <p:spPr/>
+      </p:sp>
+      <p:sp>
+        <p:nvSpPr>
+          <p:cNvPr id="3" name="Notes Placeholder 2"/>
+          <p:cNvSpPr>
+            <a:spLocks noGrp="1"/>
+          </p:cNvSpPr>
+          <p:nvPr>
+            <p:ph type="body" idx="1"/>
+          </p:nvPr>
+        </p:nvSpPr>
+        <p:spPr/>
+        <p:txBody>
+          <a:bodyPr/>
+          <a:lstStyle/>
+          <a:p>
+            <a:r>
+              <a:rPr lang="en-US" dirty="0"/>
+              <a:t>Runbook A: zero-copy federation.</a:t>
+            </a:r>
+            <a:endParaRPr lang="en-US" dirty="0"/>
+          </a:p>
+        </p:txBody>
+      </p:sp>
+      <p:sp>
+        <p:nvSpPr>
+          <p:cNvPr id="4" name="Slide Number Placeholder 3"/>
+          <p:cNvSpPr>
+            <a:spLocks noGrp="1"/>
+          </p:cNvSpPr>
+          <p:nvPr>
+            <p:ph type="sldNum" sz="quarter" idx="10"/>
+          </p:nvPr>
+        </p:nvSpPr>
+        <p:spPr/>
+        <p:txBody>
+          <a:bodyPr/>
+          <a:lstStyle/>
+          <a:p>
+            <a:fld id="{F7021451-1387-4CA6-816F-3879F97B5CBC}" type="slidenum">
+              <a:rPr lang="en-US"/>
+              <a:t>21</a:t>
+            </a:fld>
+            <a:endParaRPr lang="en-US"/>
+          </a:p>
+        </p:txBody>
+      </p:sp>
+    </p:spTree>
+    <p:extLst>
+      <p:ext uri="{BB962C8B-B14F-4D97-AF65-F5344CB8AC3E}">
+        <p14:creationId xmlns:p14="http://schemas.microsoft.com/office/powerpoint/2010/main" val="1024086991"/>
+      </p:ext>
+    </p:extLst>
+  </p:cSld>
+  <p:clrMapOvr>
+    <a:masterClrMapping/>
+  </p:clrMapOvr>
+</p:notes>
+</file>
+
+<file path=ppt/notesSlides/notesSlide22.xml><?xml version="1.0" encoding="utf-8"?>
+<p:notes xmlns:a="http://schemas.openxmlformats.org/drawingml/2006/main" xmlns:r="http://schemas.openxmlformats.org/officeDocument/2006/relationships" xmlns:p="http://schemas.openxmlformats.org/presentationml/2006/main">
+  <p:cSld>
+    <p:spTree>
+      <p:nvGrpSpPr>
+        <p:cNvPr id="1" name=""/>
+        <p:cNvGrpSpPr/>
+        <p:nvPr/>
+      </p:nvGrpSpPr>
+      <p:grpSpPr>
+        <a:xfrm>
+          <a:off x="0" y="0"/>
+          <a:ext cx="0" cy="0"/>
+          <a:chOff x="0" y="0"/>
+          <a:chExt cx="0" cy="0"/>
+        </a:xfrm>
+      </p:grpSpPr>
+      <p:sp>
+        <p:nvSpPr>
+          <p:cNvPr id="2" name="Slide Image Placeholder 1"/>
+          <p:cNvSpPr>
+            <a:spLocks noGrp="1" noRot="1" noChangeAspect="1"/>
+          </p:cNvSpPr>
+          <p:nvPr>
+            <p:ph type="sldImg"/>
+          </p:nvPr>
+        </p:nvSpPr>
+        <p:spPr/>
+      </p:sp>
+      <p:sp>
+        <p:nvSpPr>
+          <p:cNvPr id="3" name="Notes Placeholder 2"/>
+          <p:cNvSpPr>
+            <a:spLocks noGrp="1"/>
+          </p:cNvSpPr>
+          <p:nvPr>
+            <p:ph type="body" idx="1"/>
+          </p:nvPr>
+        </p:nvSpPr>
+        <p:spPr/>
+        <p:txBody>
+          <a:bodyPr/>
+          <a:lstStyle/>
+          <a:p>
+            <a:r>
+              <a:rPr lang="en-US" dirty="0"/>
+              <a:t>Runbook B: physical replica.</a:t>
+            </a:r>
+            <a:endParaRPr lang="en-US" dirty="0"/>
+          </a:p>
+        </p:txBody>
+      </p:sp>
+      <p:sp>
+        <p:nvSpPr>
+          <p:cNvPr id="4" name="Slide Number Placeholder 3"/>
+          <p:cNvSpPr>
+            <a:spLocks noGrp="1"/>
+          </p:cNvSpPr>
+          <p:nvPr>
+            <p:ph type="sldNum" sz="quarter" idx="10"/>
+          </p:nvPr>
+        </p:nvSpPr>
+        <p:spPr/>
+        <p:txBody>
+          <a:bodyPr/>
+          <a:lstStyle/>
+          <a:p>
+            <a:fld id="{F7021451-1387-4CA6-816F-3879F97B5CBC}" type="slidenum">
+              <a:rPr lang="en-US"/>
+              <a:t>22</a:t>
+            </a:fld>
+            <a:endParaRPr lang="en-US"/>
+          </a:p>
+        </p:txBody>
+      </p:sp>
+    </p:spTree>
+    <p:extLst>
+      <p:ext uri="{BB962C8B-B14F-4D97-AF65-F5344CB8AC3E}">
+        <p14:creationId xmlns:p14="http://schemas.microsoft.com/office/powerpoint/2010/main" val="1024086991"/>
+      </p:ext>
+    </p:extLst>
+  </p:cSld>
+  <p:clrMapOvr>
+    <a:masterClrMapping/>
+  </p:clrMapOvr>
+</p:notes>
+</file>
+
+<file path=ppt/notesSlides/notesSlide23.xml><?xml version="1.0" encoding="utf-8"?>
+<p:notes xmlns:a="http://schemas.openxmlformats.org/drawingml/2006/main" xmlns:r="http://schemas.openxmlformats.org/officeDocument/2006/relationships" xmlns:p="http://schemas.openxmlformats.org/presentationml/2006/main">
+  <p:cSld>
+    <p:spTree>
+      <p:nvGrpSpPr>
+        <p:cNvPr id="1" name=""/>
+        <p:cNvGrpSpPr/>
+        <p:nvPr/>
+      </p:nvGrpSpPr>
+      <p:grpSpPr>
+        <a:xfrm>
+          <a:off x="0" y="0"/>
+          <a:ext cx="0" cy="0"/>
+          <a:chOff x="0" y="0"/>
+          <a:chExt cx="0" cy="0"/>
+        </a:xfrm>
+      </p:grpSpPr>
+      <p:sp>
+        <p:nvSpPr>
+          <p:cNvPr id="2" name="Slide Image Placeholder 1"/>
+          <p:cNvSpPr>
+            <a:spLocks noGrp="1" noRot="1" noChangeAspect="1"/>
+          </p:cNvSpPr>
+          <p:nvPr>
+            <p:ph type="sldImg"/>
+          </p:nvPr>
+        </p:nvSpPr>
+        <p:spPr/>
+      </p:sp>
+      <p:sp>
+        <p:nvSpPr>
+          <p:cNvPr id="3" name="Notes Placeholder 2"/>
+          <p:cNvSpPr>
+            <a:spLocks noGrp="1"/>
+          </p:cNvSpPr>
+          <p:nvPr>
+            <p:ph type="body" idx="1"/>
+          </p:nvPr>
+        </p:nvSpPr>
+        <p:spPr/>
+        <p:txBody>
+          <a:bodyPr/>
+          <a:lstStyle/>
+          <a:p>
+            <a:r>
+              <a:rPr lang="en-US" dirty="0"/>
+              <a:t>Runbook C1: direct-write from a Spark-class engine.</a:t>
+            </a:r>
+            <a:endParaRPr lang="en-US" dirty="0"/>
+          </a:p>
+        </p:txBody>
+      </p:sp>
+      <p:sp>
+        <p:nvSpPr>
+          <p:cNvPr id="4" name="Slide Number Placeholder 3"/>
+          <p:cNvSpPr>
+            <a:spLocks noGrp="1"/>
+          </p:cNvSpPr>
+          <p:nvPr>
+            <p:ph type="sldNum" sz="quarter" idx="10"/>
+          </p:nvPr>
+        </p:nvSpPr>
+        <p:spPr/>
+        <p:txBody>
+          <a:bodyPr/>
+          <a:lstStyle/>
+          <a:p>
+            <a:fld id="{F7021451-1387-4CA6-816F-3879F97B5CBC}" type="slidenum">
+              <a:rPr lang="en-US"/>
+              <a:t>23</a:t>
+            </a:fld>
+            <a:endParaRPr lang="en-US"/>
+          </a:p>
+        </p:txBody>
+      </p:sp>
+    </p:spTree>
+    <p:extLst>
+      <p:ext uri="{BB962C8B-B14F-4D97-AF65-F5344CB8AC3E}">
+        <p14:creationId xmlns:p14="http://schemas.microsoft.com/office/powerpoint/2010/main" val="1024086991"/>
+      </p:ext>
+    </p:extLst>
+  </p:cSld>
+  <p:clrMapOvr>
+    <a:masterClrMapping/>
+  </p:clrMapOvr>
+</p:notes>
+</file>
+
+<file path=ppt/notesSlides/notesSlide24.xml><?xml version="1.0" encoding="utf-8"?>
+<p:notes xmlns:a="http://schemas.openxmlformats.org/drawingml/2006/main" xmlns:r="http://schemas.openxmlformats.org/officeDocument/2006/relationships" xmlns:p="http://schemas.openxmlformats.org/presentationml/2006/main">
+  <p:cSld>
+    <p:spTree>
+      <p:nvGrpSpPr>
+        <p:cNvPr id="1" name=""/>
+        <p:cNvGrpSpPr/>
+        <p:nvPr/>
+      </p:nvGrpSpPr>
+      <p:grpSpPr>
+        <a:xfrm>
+          <a:off x="0" y="0"/>
+          <a:ext cx="0" cy="0"/>
+          <a:chOff x="0" y="0"/>
+          <a:chExt cx="0" cy="0"/>
+        </a:xfrm>
+      </p:grpSpPr>
+      <p:sp>
+        <p:nvSpPr>
+          <p:cNvPr id="2" name="Slide Image Placeholder 1"/>
+          <p:cNvSpPr>
+            <a:spLocks noGrp="1" noRot="1" noChangeAspect="1"/>
+          </p:cNvSpPr>
+          <p:nvPr>
+            <p:ph type="sldImg"/>
+          </p:nvPr>
+        </p:nvSpPr>
+        <p:spPr/>
+      </p:sp>
+      <p:sp>
+        <p:nvSpPr>
+          <p:cNvPr id="3" name="Notes Placeholder 2"/>
+          <p:cNvSpPr>
+            <a:spLocks noGrp="1"/>
+          </p:cNvSpPr>
+          <p:nvPr>
+            <p:ph type="body" idx="1"/>
+          </p:nvPr>
+        </p:nvSpPr>
+        <p:spPr/>
+        <p:txBody>
+          <a:bodyPr/>
+          <a:lstStyle/>
+          <a:p>
+            <a:r>
+              <a:rPr lang="en-US" dirty="0"/>
+              <a:t>Runbook C2: the landing-zone split, required for cross-language streaming/batch frameworks.</a:t>
+            </a:r>
+            <a:endParaRPr lang="en-US" dirty="0"/>
+          </a:p>
+        </p:txBody>
+      </p:sp>
+      <p:sp>
+        <p:nvSpPr>
+          <p:cNvPr id="4" name="Slide Number Placeholder 3"/>
+          <p:cNvSpPr>
+            <a:spLocks noGrp="1"/>
+          </p:cNvSpPr>
+          <p:nvPr>
+            <p:ph type="sldNum" sz="quarter" idx="10"/>
+          </p:nvPr>
+        </p:nvSpPr>
+        <p:spPr/>
+        <p:txBody>
+          <a:bodyPr/>
+          <a:lstStyle/>
+          <a:p>
+            <a:fld id="{F7021451-1387-4CA6-816F-3879F97B5CBC}" type="slidenum">
+              <a:rPr lang="en-US"/>
+              <a:t>24</a:t>
+            </a:fld>
+            <a:endParaRPr lang="en-US"/>
+          </a:p>
+        </p:txBody>
+      </p:sp>
+    </p:spTree>
+    <p:extLst>
+      <p:ext uri="{BB962C8B-B14F-4D97-AF65-F5344CB8AC3E}">
+        <p14:creationId xmlns:p14="http://schemas.microsoft.com/office/powerpoint/2010/main" val="1024086991"/>
+      </p:ext>
+    </p:extLst>
+  </p:cSld>
+  <p:clrMapOvr>
+    <a:masterClrMapping/>
+  </p:clrMapOvr>
+</p:notes>
+</file>
+
+<file path=ppt/notesSlides/notesSlide25.xml><?xml version="1.0" encoding="utf-8"?>
+<p:notes xmlns:a="http://schemas.openxmlformats.org/drawingml/2006/main" xmlns:r="http://schemas.openxmlformats.org/officeDocument/2006/relationships" xmlns:p="http://schemas.openxmlformats.org/presentationml/2006/main">
+  <p:cSld>
+    <p:spTree>
+      <p:nvGrpSpPr>
+        <p:cNvPr id="1" name=""/>
+        <p:cNvGrpSpPr/>
+        <p:nvPr/>
+      </p:nvGrpSpPr>
+      <p:grpSpPr>
+        <a:xfrm>
+          <a:off x="0" y="0"/>
+          <a:ext cx="0" cy="0"/>
+          <a:chOff x="0" y="0"/>
+          <a:chExt cx="0" cy="0"/>
+        </a:xfrm>
+      </p:grpSpPr>
+      <p:sp>
+        <p:nvSpPr>
+          <p:cNvPr id="2" name="Slide Image Placeholder 1"/>
+          <p:cNvSpPr>
+            <a:spLocks noGrp="1" noRot="1" noChangeAspect="1"/>
+          </p:cNvSpPr>
+          <p:nvPr>
+            <p:ph type="sldImg"/>
+          </p:nvPr>
+        </p:nvSpPr>
+        <p:spPr/>
+      </p:sp>
+      <p:sp>
+        <p:nvSpPr>
+          <p:cNvPr id="3" name="Notes Placeholder 2"/>
+          <p:cNvSpPr>
+            <a:spLocks noGrp="1"/>
+          </p:cNvSpPr>
+          <p:nvPr>
+            <p:ph type="body" idx="1"/>
+          </p:nvPr>
+        </p:nvSpPr>
+        <p:spPr/>
+        <p:txBody>
+          <a:bodyPr/>
+          <a:lstStyle/>
+          <a:p>
+            <a:r>
+              <a:rPr lang="en-US" dirty="0"/>
+              <a:t/>
+            </a:r>
+            <a:endParaRPr lang="en-US" dirty="0"/>
+          </a:p>
+        </p:txBody>
+      </p:sp>
+      <p:sp>
+        <p:nvSpPr>
+          <p:cNvPr id="4" name="Slide Number Placeholder 3"/>
+          <p:cNvSpPr>
+            <a:spLocks noGrp="1"/>
+          </p:cNvSpPr>
+          <p:nvPr>
+            <p:ph type="sldNum" sz="quarter" idx="10"/>
+          </p:nvPr>
+        </p:nvSpPr>
+        <p:spPr/>
+        <p:txBody>
+          <a:bodyPr/>
+          <a:lstStyle/>
+          <a:p>
+            <a:fld id="{F7021451-1387-4CA6-816F-3879F97B5CBC}" type="slidenum">
+              <a:rPr lang="en-US"/>
+              <a:t>25</a:t>
             </a:fld>
             <a:endParaRPr lang="en-US"/>
           </a:p>
@@ -4958,7 +5403,7 @@
                 <a:ea typeface="Cambria" pitchFamily="34" charset="-122"/>
                 <a:cs typeface="Cambria" pitchFamily="34" charset="-120"/>
               </a:rPr>
-              <a:t>Findings — Direct-Write via Landing Zone</a:t>
+              <a:t>Findings — Direct-Write to the Target Cloud</a:t>
             </a:r>
             <a:endParaRPr lang="en-US" sz="2800" dirty="0"/>
           </a:p>
@@ -4997,7 +5442,7 @@
                 <a:ea typeface="Calibri" pitchFamily="34" charset="-122"/>
                 <a:cs typeface="Calibri" pitchFamily="34" charset="-120"/>
               </a:rPr>
-              <a:t>The credential wall, and the split that gets around it</a:t>
+              <a:t>One credential fix unlocked one engine and fully diagnosed the other</a:t>
             </a:r>
             <a:endParaRPr lang="en-US" sz="1400" dirty="0"/>
           </a:p>
@@ -5050,12 +5495,12 @@
         </p:nvSpPr>
         <p:spPr>
           <a:xfrm>
-            <a:off x="548640" y="1280160"/>
-            <a:ext cx="11109960" cy="1828800"/>
+            <a:off x="548640" y="1188720"/>
+            <a:ext cx="11109960" cy="1417320"/>
           </a:xfrm>
           <a:prstGeom prst="roundRect">
             <a:avLst>
-              <a:gd name="adj" fmla="val 2500"/>
+              <a:gd name="adj" fmla="val 3226"/>
             </a:avLst>
           </a:prstGeom>
           <a:solidFill>
@@ -5077,8 +5522,8 @@
         </p:nvSpPr>
         <p:spPr>
           <a:xfrm>
-            <a:off x="822960" y="1417320"/>
-            <a:ext cx="10561320" cy="320040"/>
+            <a:off x="822960" y="1298448"/>
+            <a:ext cx="10561320" cy="274320"/>
           </a:xfrm>
           <a:prstGeom prst="rect">
             <a:avLst/>
@@ -5094,7 +5539,7 @@
               <a:buNone/>
             </a:pPr>
             <a:r>
-              <a:rPr lang="en-US" sz="1400" b="1" dirty="0">
+              <a:rPr lang="en-US" sz="1300" b="1" dirty="0">
                 <a:solidFill>
                   <a:srgbClr val="0B3D3D"/>
                 </a:solidFill>
@@ -5102,9 +5547,9 @@
                 <a:ea typeface="Calibri" pitchFamily="34" charset="-122"/>
                 <a:cs typeface="Calibri" pitchFamily="34" charset="-120"/>
               </a:rPr>
-              <a:t>The core discovery</a:t>
-            </a:r>
-            <a:endParaRPr lang="en-US" sz="1400" dirty="0"/>
+              <a:t>The credential fix (applies to both engines)</a:t>
+            </a:r>
+            <a:endParaRPr lang="en-US" sz="1300" dirty="0"/>
           </a:p>
         </p:txBody>
       </p:sp>
@@ -5116,8 +5561,8 @@
         </p:nvSpPr>
         <p:spPr>
           <a:xfrm>
-            <a:off x="822960" y="1783080"/>
-            <a:ext cx="10561320" cy="1234440"/>
+            <a:off x="822960" y="1591056"/>
+            <a:ext cx="10561320" cy="960120"/>
           </a:xfrm>
           <a:prstGeom prst="rect">
             <a:avLst/>
@@ -5133,7 +5578,7 @@
               <a:buNone/>
             </a:pPr>
             <a:r>
-              <a:rPr lang="en-US" sz="1200" dirty="0">
+              <a:rPr lang="en-US" sz="1150" dirty="0">
                 <a:solidFill>
                   <a:srgbClr val="1A2E2E"/>
                 </a:solidFill>
@@ -5141,38 +5586,9 @@
                 <a:ea typeface="Calibri" pitchFamily="34" charset="-122"/>
                 <a:cs typeface="Calibri" pitchFamily="34" charset="-120"/>
               </a:rPr>
-              <a:t>Writing an Iceberg table directly into a target-cloud managed catalog from source-cloud compute failed: the catalog client requires a native-identity credential object, and a simple access key does not satisfy that interface — confirmed by testing, not assumed.
-</a:t>
-            </a:r>
-            <a:pPr indent="0" marL="0">
-              <a:buNone/>
-            </a:pPr>
-            <a:r>
-              <a:rPr lang="en-US" sz="1200" b="1" dirty="0">
-                <a:solidFill>
-                  <a:srgbClr val="1A2E2E"/>
-                </a:solidFill>
-                <a:latin typeface="Calibri" pitchFamily="34" charset="0"/>
-                <a:ea typeface="Calibri" pitchFamily="34" charset="-122"/>
-                <a:cs typeface="Calibri" pitchFamily="34" charset="-120"/>
-              </a:rPr>
-              <a:t>The fix is architectural, not a workaround: split the write into two steps at the seam where the credential requirement changes. </a:t>
-            </a:r>
-            <a:pPr indent="0" marL="0">
-              <a:buNone/>
-            </a:pPr>
-            <a:r>
-              <a:rPr lang="en-US" sz="1200" dirty="0">
-                <a:solidFill>
-                  <a:srgbClr val="1A2E2E"/>
-                </a:solidFill>
-                <a:latin typeface="Calibri" pitchFamily="34" charset="0"/>
-                <a:ea typeface="Calibri" pitchFamily="34" charset="-122"/>
-                <a:cs typeface="Calibri" pitchFamily="34" charset="-120"/>
-              </a:rPr>
-              <a:t>Source-cloud compute writes plain files (a simple key works fine for a filesystem write). Target-cloud native compute — running under its own identity — promotes those files into a registered table. Neither side ever needs a credential it structurally can't use.</a:t>
-            </a:r>
-            <a:endParaRPr lang="en-US" sz="1200" dirty="0"/>
+              <a:t>The target-cloud catalog client builds its credential object by reflection. The obvious "pass a static key" class doesn't expose the constructor shape reflection needs, so it fails outright. The fix: don't specify that class at all — let the client fall back to its own default credential-discovery chain, and supply the real key/secret the way that chain expects them to arrive.</a:t>
+            </a:r>
+            <a:endParaRPr lang="en-US" sz="1150" dirty="0"/>
           </a:p>
         </p:txBody>
       </p:sp>
@@ -5184,12 +5600,12 @@
         </p:nvSpPr>
         <p:spPr>
           <a:xfrm>
-            <a:off x="548640" y="3291840"/>
-            <a:ext cx="3520440" cy="1188720"/>
+            <a:off x="548640" y="2743200"/>
+            <a:ext cx="5394960" cy="3520440"/>
           </a:xfrm>
           <a:prstGeom prst="roundRect">
             <a:avLst>
-              <a:gd name="adj" fmla="val 3846"/>
+              <a:gd name="adj" fmla="val 1299"/>
             </a:avLst>
           </a:prstGeom>
           <a:solidFill>
@@ -5211,8 +5627,8 @@
         </p:nvSpPr>
         <p:spPr>
           <a:xfrm>
-            <a:off x="777240" y="3383280"/>
-            <a:ext cx="3108960" cy="502920"/>
+            <a:off x="777240" y="2880360"/>
+            <a:ext cx="4937760" cy="274320"/>
           </a:xfrm>
           <a:prstGeom prst="rect">
             <a:avLst/>
@@ -5224,21 +5640,21 @@
           <a:bodyPr wrap="square" lIns="0" tIns="0" rIns="0" bIns="0" rtlCol="0" anchor="ctr"/>
           <a:lstStyle/>
           <a:p>
-            <a:pPr algn="l" indent="0" marL="0">
-              <a:buNone/>
-            </a:pPr>
-            <a:r>
-              <a:rPr lang="en-US" sz="2400" b="1" dirty="0">
+            <a:pPr indent="0" marL="0">
+              <a:buNone/>
+            </a:pPr>
+            <a:r>
+              <a:rPr lang="en-US" sz="1200" b="1" spc="100" kern="0" dirty="0">
                 <a:solidFill>
                   <a:srgbClr val="0B3D3D"/>
                 </a:solidFill>
-                <a:latin typeface="Cambria" pitchFamily="34" charset="0"/>
-                <a:ea typeface="Cambria" pitchFamily="34" charset="-122"/>
-                <a:cs typeface="Cambria" pitchFamily="34" charset="-120"/>
-              </a:rPr>
-              <a:t>77 sec</a:t>
-            </a:r>
-            <a:endParaRPr lang="en-US" sz="2400" dirty="0"/>
+                <a:latin typeface="Calibri" pitchFamily="34" charset="0"/>
+                <a:ea typeface="Calibri" pitchFamily="34" charset="-122"/>
+                <a:cs typeface="Calibri" pitchFamily="34" charset="-120"/>
+              </a:rPr>
+              <a:t>CONFIRMED WORKING</a:t>
+            </a:r>
+            <a:endParaRPr lang="en-US" sz="1200" dirty="0"/>
           </a:p>
         </p:txBody>
       </p:sp>
@@ -5250,8 +5666,8 @@
         </p:nvSpPr>
         <p:spPr>
           <a:xfrm>
-            <a:off x="777240" y="3886200"/>
-            <a:ext cx="3108960" cy="502920"/>
+            <a:off x="777240" y="3182112"/>
+            <a:ext cx="4937760" cy="320040"/>
           </a:xfrm>
           <a:prstGeom prst="rect">
             <a:avLst/>
@@ -5263,11 +5679,11 @@
           <a:bodyPr wrap="square" lIns="0" tIns="0" rIns="0" bIns="0" rtlCol="0" anchor="ctr"/>
           <a:lstStyle/>
           <a:p>
-            <a:pPr algn="l" indent="0" marL="0">
-              <a:buNone/>
-            </a:pPr>
-            <a:r>
-              <a:rPr lang="en-US" sz="1050" dirty="0">
+            <a:pPr indent="0" marL="0">
+              <a:buNone/>
+            </a:pPr>
+            <a:r>
+              <a:rPr lang="en-US" sz="1250" b="1" dirty="0">
                 <a:solidFill>
                   <a:srgbClr val="0B3D3D"/>
                 </a:solidFill>
@@ -5275,236 +5691,111 @@
                 <a:ea typeface="Calibri" pitchFamily="34" charset="-122"/>
                 <a:cs typeface="Calibri" pitchFamily="34" charset="-120"/>
               </a:rPr>
-              <a:t>native compute job: landing files → registered, queryable Iceberg table</a:t>
-            </a:r>
-            <a:endParaRPr lang="en-US" sz="1050" dirty="0"/>
-          </a:p>
-        </p:txBody>
-      </p:sp>
-      <p:sp>
-        <p:nvSpPr>
-          <p:cNvPr id="11" name="Shape 9"/>
-          <p:cNvSpPr/>
-          <p:nvPr/>
-        </p:nvSpPr>
-        <p:spPr>
-          <a:xfrm>
-            <a:off x="4343400" y="3291840"/>
-            <a:ext cx="3520440" cy="1188720"/>
+              <a:t>General-purpose SQL/Spark engine → direct write</a:t>
+            </a:r>
+            <a:endParaRPr lang="en-US" sz="1250" dirty="0"/>
+          </a:p>
+        </p:txBody>
+      </p:sp>
+      <p:sp>
+        <p:nvSpPr>
+          <p:cNvPr id="11" name="Text 9"/>
+          <p:cNvSpPr/>
+          <p:nvPr/>
+        </p:nvSpPr>
+        <p:spPr>
+          <a:xfrm>
+            <a:off x="777240" y="3657600"/>
+            <a:ext cx="4937760" cy="2468880"/>
+          </a:xfrm>
+          <a:prstGeom prst="rect">
+            <a:avLst/>
+          </a:prstGeom>
+          <a:noFill/>
+          <a:ln/>
+        </p:spPr>
+        <p:txBody>
+          <a:bodyPr wrap="square" lIns="0" tIns="0" rIns="0" bIns="0" rtlCol="0" anchor="t"/>
+          <a:lstStyle/>
+          <a:p>
+            <a:pPr marL="342900" indent="-342900">
+              <a:spcAft>
+                <a:spcPts val="800"/>
+              </a:spcAft>
+              <a:buSzPct val="100000"/>
+              <a:buChar char="•"/>
+            </a:pPr>
+            <a:r>
+              <a:rPr lang="en-US" sz="1100" dirty="0">
+                <a:solidFill>
+                  <a:srgbClr val="0B3D3D"/>
+                </a:solidFill>
+                <a:latin typeface="Calibri" pitchFamily="34" charset="0"/>
+                <a:ea typeface="Calibri" pitchFamily="34" charset="-122"/>
+                <a:cs typeface="Calibri" pitchFamily="34" charset="-120"/>
+              </a:rPr>
+              <a:t>Table created, written, committed, and read back through the target catalog client — one job, zero landing zone</a:t>
+            </a:r>
+            <a:endParaRPr lang="en-US" sz="1100" dirty="0"/>
+          </a:p>
+          <a:p>
+            <a:pPr marL="342900" indent="-342900">
+              <a:spcAft>
+                <a:spcPts val="800"/>
+              </a:spcAft>
+              <a:buSzPct val="100000"/>
+              <a:buChar char="•"/>
+            </a:pPr>
+            <a:r>
+              <a:rPr lang="en-US" sz="1100" dirty="0">
+                <a:solidFill>
+                  <a:srgbClr val="0B3D3D"/>
+                </a:solidFill>
+                <a:latin typeface="Calibri" pitchFamily="34" charset="0"/>
+                <a:ea typeface="Calibri" pitchFamily="34" charset="-122"/>
+                <a:cs typeface="Calibri" pitchFamily="34" charset="-120"/>
+              </a:rPr>
+              <a:t>A second, unrelated blocker appeared once credentials were fixed: this engine has no outbound network path to the target cloud by default and needed one added</a:t>
+            </a:r>
+            <a:endParaRPr lang="en-US" sz="1100" dirty="0"/>
+          </a:p>
+          <a:p>
+            <a:pPr marL="342900" indent="-342900">
+              <a:spcAft>
+                <a:spcPts val="800"/>
+              </a:spcAft>
+              <a:buSzPct val="100000"/>
+              <a:buChar char="•"/>
+            </a:pPr>
+            <a:r>
+              <a:rPr lang="en-US" sz="1100" dirty="0">
+                <a:solidFill>
+                  <a:srgbClr val="0B3D3D"/>
+                </a:solidFill>
+                <a:latin typeface="Calibri" pitchFamily="34" charset="0"/>
+                <a:ea typeface="Calibri" pitchFamily="34" charset="-122"/>
+                <a:cs typeface="Calibri" pitchFamily="34" charset="-120"/>
+              </a:rPr>
+              <a:t>With both fixed: end-to-end proof complete, no further blockers found</a:t>
+            </a:r>
+            <a:endParaRPr lang="en-US" sz="1100" dirty="0"/>
+          </a:p>
+        </p:txBody>
+      </p:sp>
+      <p:sp>
+        <p:nvSpPr>
+          <p:cNvPr id="12" name="Shape 10"/>
+          <p:cNvSpPr/>
+          <p:nvPr/>
+        </p:nvSpPr>
+        <p:spPr>
+          <a:xfrm>
+            <a:off x="6263640" y="2743200"/>
+            <a:ext cx="5394960" cy="3520440"/>
           </a:xfrm>
           <a:prstGeom prst="roundRect">
             <a:avLst>
-              <a:gd name="adj" fmla="val 3846"/>
-            </a:avLst>
-          </a:prstGeom>
-          <a:solidFill>
-            <a:srgbClr val="A8F0EE"/>
-          </a:solidFill>
-          <a:ln w="15875">
-            <a:solidFill>
-              <a:srgbClr val="A8F0EE"/>
-            </a:solidFill>
-            <a:prstDash val="solid"/>
-          </a:ln>
-        </p:spPr>
-      </p:sp>
-      <p:sp>
-        <p:nvSpPr>
-          <p:cNvPr id="12" name="Text 10"/>
-          <p:cNvSpPr/>
-          <p:nvPr/>
-        </p:nvSpPr>
-        <p:spPr>
-          <a:xfrm>
-            <a:off x="4572000" y="3383280"/>
-            <a:ext cx="3108960" cy="502920"/>
-          </a:xfrm>
-          <a:prstGeom prst="rect">
-            <a:avLst/>
-          </a:prstGeom>
-          <a:noFill/>
-          <a:ln/>
-        </p:spPr>
-        <p:txBody>
-          <a:bodyPr wrap="square" lIns="0" tIns="0" rIns="0" bIns="0" rtlCol="0" anchor="ctr"/>
-          <a:lstStyle/>
-          <a:p>
-            <a:pPr algn="l" indent="0" marL="0">
-              <a:buNone/>
-            </a:pPr>
-            <a:r>
-              <a:rPr lang="en-US" sz="2400" b="1" dirty="0">
-                <a:solidFill>
-                  <a:srgbClr val="0B3D3D"/>
-                </a:solidFill>
-                <a:latin typeface="Cambria" pitchFamily="34" charset="0"/>
-                <a:ea typeface="Cambria" pitchFamily="34" charset="-122"/>
-                <a:cs typeface="Cambria" pitchFamily="34" charset="-120"/>
-              </a:rPr>
-              <a:t>100%</a:t>
-            </a:r>
-            <a:endParaRPr lang="en-US" sz="2400" dirty="0"/>
-          </a:p>
-        </p:txBody>
-      </p:sp>
-      <p:sp>
-        <p:nvSpPr>
-          <p:cNvPr id="13" name="Text 11"/>
-          <p:cNvSpPr/>
-          <p:nvPr/>
-        </p:nvSpPr>
-        <p:spPr>
-          <a:xfrm>
-            <a:off x="4572000" y="3886200"/>
-            <a:ext cx="3108960" cy="502920"/>
-          </a:xfrm>
-          <a:prstGeom prst="rect">
-            <a:avLst/>
-          </a:prstGeom>
-          <a:noFill/>
-          <a:ln/>
-        </p:spPr>
-        <p:txBody>
-          <a:bodyPr wrap="square" lIns="0" tIns="0" rIns="0" bIns="0" rtlCol="0" anchor="ctr"/>
-          <a:lstStyle/>
-          <a:p>
-            <a:pPr algn="l" indent="0" marL="0">
-              <a:buNone/>
-            </a:pPr>
-            <a:r>
-              <a:rPr lang="en-US" sz="1050" dirty="0">
-                <a:solidFill>
-                  <a:srgbClr val="0B3D3D"/>
-                </a:solidFill>
-                <a:latin typeface="Calibri" pitchFamily="34" charset="0"/>
-                <a:ea typeface="Calibri" pitchFamily="34" charset="-122"/>
-                <a:cs typeface="Calibri" pitchFamily="34" charset="-120"/>
-              </a:rPr>
-              <a:t>reconciliation — row count and aggregate sum matched the source exactly</a:t>
-            </a:r>
-            <a:endParaRPr lang="en-US" sz="1050" dirty="0"/>
-          </a:p>
-        </p:txBody>
-      </p:sp>
-      <p:sp>
-        <p:nvSpPr>
-          <p:cNvPr id="14" name="Shape 12"/>
-          <p:cNvSpPr/>
-          <p:nvPr/>
-        </p:nvSpPr>
-        <p:spPr>
-          <a:xfrm>
-            <a:off x="8138160" y="3291840"/>
-            <a:ext cx="3520440" cy="1188720"/>
-          </a:xfrm>
-          <a:prstGeom prst="roundRect">
-            <a:avLst>
-              <a:gd name="adj" fmla="val 3846"/>
-            </a:avLst>
-          </a:prstGeom>
-          <a:solidFill>
-            <a:srgbClr val="A8F0EE"/>
-          </a:solidFill>
-          <a:ln w="15875">
-            <a:solidFill>
-              <a:srgbClr val="A8F0EE"/>
-            </a:solidFill>
-            <a:prstDash val="solid"/>
-          </a:ln>
-        </p:spPr>
-      </p:sp>
-      <p:sp>
-        <p:nvSpPr>
-          <p:cNvPr id="15" name="Text 13"/>
-          <p:cNvSpPr/>
-          <p:nvPr/>
-        </p:nvSpPr>
-        <p:spPr>
-          <a:xfrm>
-            <a:off x="8366760" y="3383280"/>
-            <a:ext cx="3108960" cy="502920"/>
-          </a:xfrm>
-          <a:prstGeom prst="rect">
-            <a:avLst/>
-          </a:prstGeom>
-          <a:noFill/>
-          <a:ln/>
-        </p:spPr>
-        <p:txBody>
-          <a:bodyPr wrap="square" lIns="0" tIns="0" rIns="0" bIns="0" rtlCol="0" anchor="ctr"/>
-          <a:lstStyle/>
-          <a:p>
-            <a:pPr algn="l" indent="0" marL="0">
-              <a:buNone/>
-            </a:pPr>
-            <a:r>
-              <a:rPr lang="en-US" sz="2400" b="1" dirty="0">
-                <a:solidFill>
-                  <a:srgbClr val="0B3D3D"/>
-                </a:solidFill>
-                <a:latin typeface="Cambria" pitchFamily="34" charset="0"/>
-                <a:ea typeface="Cambria" pitchFamily="34" charset="-122"/>
-                <a:cs typeface="Cambria" pitchFamily="34" charset="-120"/>
-              </a:rPr>
-              <a:t>0</a:t>
-            </a:r>
-            <a:endParaRPr lang="en-US" sz="2400" dirty="0"/>
-          </a:p>
-        </p:txBody>
-      </p:sp>
-      <p:sp>
-        <p:nvSpPr>
-          <p:cNvPr id="16" name="Text 14"/>
-          <p:cNvSpPr/>
-          <p:nvPr/>
-        </p:nvSpPr>
-        <p:spPr>
-          <a:xfrm>
-            <a:off x="8366760" y="3886200"/>
-            <a:ext cx="3108960" cy="502920"/>
-          </a:xfrm>
-          <a:prstGeom prst="rect">
-            <a:avLst/>
-          </a:prstGeom>
-          <a:noFill/>
-          <a:ln/>
-        </p:spPr>
-        <p:txBody>
-          <a:bodyPr wrap="square" lIns="0" tIns="0" rIns="0" bIns="0" rtlCol="0" anchor="ctr"/>
-          <a:lstStyle/>
-          <a:p>
-            <a:pPr algn="l" indent="0" marL="0">
-              <a:buNone/>
-            </a:pPr>
-            <a:r>
-              <a:rPr lang="en-US" sz="1050" dirty="0">
-                <a:solidFill>
-                  <a:srgbClr val="0B3D3D"/>
-                </a:solidFill>
-                <a:latin typeface="Calibri" pitchFamily="34" charset="0"/>
-                <a:ea typeface="Calibri" pitchFamily="34" charset="-122"/>
-                <a:cs typeface="Calibri" pitchFamily="34" charset="-120"/>
-              </a:rPr>
-              <a:t>credentials of any kind inside the promotion job — pure native identity</a:t>
-            </a:r>
-            <a:endParaRPr lang="en-US" sz="1050" dirty="0"/>
-          </a:p>
-        </p:txBody>
-      </p:sp>
-      <p:sp>
-        <p:nvSpPr>
-          <p:cNvPr id="17" name="Shape 15"/>
-          <p:cNvSpPr/>
-          <p:nvPr/>
-        </p:nvSpPr>
-        <p:spPr>
-          <a:xfrm>
-            <a:off x="548640" y="4663440"/>
-            <a:ext cx="11109960" cy="1463040"/>
-          </a:xfrm>
-          <a:prstGeom prst="roundRect">
-            <a:avLst>
-              <a:gd name="adj" fmla="val 3125"/>
+              <a:gd name="adj" fmla="val 1299"/>
             </a:avLst>
           </a:prstGeom>
           <a:solidFill>
@@ -5520,14 +5811,14 @@
       </p:sp>
       <p:sp>
         <p:nvSpPr>
-          <p:cNvPr id="18" name="Text 16"/>
-          <p:cNvSpPr/>
-          <p:nvPr/>
-        </p:nvSpPr>
-        <p:spPr>
-          <a:xfrm>
-            <a:off x="822960" y="4800600"/>
-            <a:ext cx="10515600" cy="274320"/>
+          <p:cNvPr id="13" name="Text 11"/>
+          <p:cNvSpPr/>
+          <p:nvPr/>
+        </p:nvSpPr>
+        <p:spPr>
+          <a:xfrm>
+            <a:off x="6492240" y="2880360"/>
+            <a:ext cx="4937760" cy="274320"/>
           </a:xfrm>
           <a:prstGeom prst="rect">
             <a:avLst/>
@@ -5543,7 +5834,7 @@
               <a:buNone/>
             </a:pPr>
             <a:r>
-              <a:rPr lang="en-US" sz="1300" b="1" dirty="0">
+              <a:rPr lang="en-US" sz="1200" b="1" spc="100" kern="0" dirty="0">
                 <a:solidFill>
                   <a:srgbClr val="C1502E"/>
                 </a:solidFill>
@@ -5551,22 +5842,61 @@
                 <a:ea typeface="Calibri" pitchFamily="34" charset="-122"/>
                 <a:cs typeface="Calibri" pitchFamily="34" charset="-120"/>
               </a:rPr>
-              <a:t>Sharp edges</a:t>
-            </a:r>
-            <a:endParaRPr lang="en-US" sz="1300" dirty="0"/>
-          </a:p>
-        </p:txBody>
-      </p:sp>
-      <p:sp>
-        <p:nvSpPr>
-          <p:cNvPr id="19" name="Text 17"/>
-          <p:cNvSpPr/>
-          <p:nvPr/>
-        </p:nvSpPr>
-        <p:spPr>
-          <a:xfrm>
-            <a:off x="822960" y="5074920"/>
-            <a:ext cx="10561320" cy="960120"/>
+              <a:t>CONFIRMED BLOCKED</a:t>
+            </a:r>
+            <a:endParaRPr lang="en-US" sz="1200" dirty="0"/>
+          </a:p>
+        </p:txBody>
+      </p:sp>
+      <p:sp>
+        <p:nvSpPr>
+          <p:cNvPr id="14" name="Text 12"/>
+          <p:cNvSpPr/>
+          <p:nvPr/>
+        </p:nvSpPr>
+        <p:spPr>
+          <a:xfrm>
+            <a:off x="6492240" y="3182112"/>
+            <a:ext cx="4937760" cy="320040"/>
+          </a:xfrm>
+          <a:prstGeom prst="rect">
+            <a:avLst/>
+          </a:prstGeom>
+          <a:noFill/>
+          <a:ln/>
+        </p:spPr>
+        <p:txBody>
+          <a:bodyPr wrap="square" lIns="0" tIns="0" rIns="0" bIns="0" rtlCol="0" anchor="ctr"/>
+          <a:lstStyle/>
+          <a:p>
+            <a:pPr indent="0" marL="0">
+              <a:buNone/>
+            </a:pPr>
+            <a:r>
+              <a:rPr lang="en-US" sz="1250" b="1" dirty="0">
+                <a:solidFill>
+                  <a:srgbClr val="0B3D3D"/>
+                </a:solidFill>
+                <a:latin typeface="Calibri" pitchFamily="34" charset="0"/>
+                <a:ea typeface="Calibri" pitchFamily="34" charset="-122"/>
+                <a:cs typeface="Calibri" pitchFamily="34" charset="-120"/>
+              </a:rPr>
+              <a:t>Cross-language streaming/batch framework → direct write</a:t>
+            </a:r>
+            <a:endParaRPr lang="en-US" sz="1250" dirty="0"/>
+          </a:p>
+        </p:txBody>
+      </p:sp>
+      <p:sp>
+        <p:nvSpPr>
+          <p:cNvPr id="15" name="Text 13"/>
+          <p:cNvSpPr/>
+          <p:nvPr/>
+        </p:nvSpPr>
+        <p:spPr>
+          <a:xfrm>
+            <a:off x="6492240" y="3657600"/>
+            <a:ext cx="4937760" cy="2468880"/>
           </a:xfrm>
           <a:prstGeom prst="rect">
             <a:avLst/>
@@ -5578,11 +5908,15 @@
           <a:bodyPr wrap="square" lIns="0" tIns="0" rIns="0" bIns="0" rtlCol="0" anchor="t"/>
           <a:lstStyle/>
           <a:p>
-            <a:pPr indent="0" marL="0">
-              <a:buNone/>
-            </a:pPr>
-            <a:r>
-              <a:rPr lang="en-US" sz="1050" dirty="0">
+            <a:pPr marL="342900" indent="-342900">
+              <a:spcAft>
+                <a:spcPts val="800"/>
+              </a:spcAft>
+              <a:buSzPct val="100000"/>
+              <a:buChar char="•"/>
+            </a:pPr>
+            <a:r>
+              <a:rPr lang="en-US" sz="1100" dirty="0">
                 <a:solidFill>
                   <a:srgbClr val="1A2E2E"/>
                 </a:solidFill>
@@ -5590,9 +5924,51 @@
                 <a:ea typeface="Calibri" pitchFamily="34" charset="-122"/>
                 <a:cs typeface="Calibri" pitchFamily="34" charset="-120"/>
               </a:rPr>
-              <a:t>Streaming a windowed write into object storage needed a hand-rolled writer — the pipeline framework's built-in file-writing transform hit two separate defects crossing cloud storage boundaries. Framework dependencies used inside a pipeline's worker processes must be staged there explicitly; a dependency available at pipeline-construction time is not automatically available at execution time. A pipeline reporting "running" is not the same as a pipeline making progress — a data-arrival check caught a silent retry loop that job status alone did not.</a:t>
-            </a:r>
-            <a:endParaRPr lang="en-US" sz="1050" dirty="0"/>
+              <a:t>Credential fix applied identically — the credential error disappeared completely</a:t>
+            </a:r>
+            <a:endParaRPr lang="en-US" sz="1100" dirty="0"/>
+          </a:p>
+          <a:p>
+            <a:pPr marL="342900" indent="-342900">
+              <a:spcAft>
+                <a:spcPts val="800"/>
+              </a:spcAft>
+              <a:buSzPct val="100000"/>
+              <a:buChar char="•"/>
+            </a:pPr>
+            <a:r>
+              <a:rPr lang="en-US" sz="1100" dirty="0">
+                <a:solidFill>
+                  <a:srgbClr val="1A2E2E"/>
+                </a:solidFill>
+                <a:latin typeface="Calibri" pitchFamily="34" charset="0"/>
+                <a:ea typeface="Calibri" pitchFamily="34" charset="-122"/>
+                <a:cs typeface="Calibri" pitchFamily="34" charset="-120"/>
+              </a:rPr>
+              <a:t>A different failure took its place: a dependency-version conflict inside this framework's own bundled target-cloud SDK — two different builds of the same library, incompatible with each other, both present at once</a:t>
+            </a:r>
+            <a:endParaRPr lang="en-US" sz="1100" dirty="0"/>
+          </a:p>
+          <a:p>
+            <a:pPr marL="342900" indent="-342900">
+              <a:spcAft>
+                <a:spcPts val="800"/>
+              </a:spcAft>
+              <a:buSzPct val="100000"/>
+              <a:buChar char="•"/>
+            </a:pPr>
+            <a:r>
+              <a:rPr lang="en-US" sz="1100" dirty="0">
+                <a:solidFill>
+                  <a:srgbClr val="1A2E2E"/>
+                </a:solidFill>
+                <a:latin typeface="Calibri" pitchFamily="34" charset="0"/>
+                <a:ea typeface="Calibri" pitchFamily="34" charset="-122"/>
+                <a:cs typeface="Calibri" pitchFamily="34" charset="-120"/>
+              </a:rPr>
+              <a:t>Not a configuration problem — no pipeline setting fixes a conflict baked into the framework's packaged dependencies</a:t>
+            </a:r>
+            <a:endParaRPr lang="en-US" sz="1100" dirty="0"/>
           </a:p>
         </p:txBody>
       </p:sp>
@@ -5781,7 +6157,7 @@
         <p:spPr>
           <a:xfrm>
             <a:off x="548640" y="1280160"/>
-            <a:ext cx="2743200" cy="502920"/>
+            <a:ext cx="2560320" cy="502920"/>
           </a:xfrm>
           <a:prstGeom prst="rect">
             <a:avLst/>
@@ -5819,8 +6195,8 @@
         </p:nvSpPr>
         <p:spPr>
           <a:xfrm>
-            <a:off x="3291840" y="1280160"/>
-            <a:ext cx="3108960" cy="502920"/>
+            <a:off x="3108960" y="1280160"/>
+            <a:ext cx="2926080" cy="502920"/>
           </a:xfrm>
           <a:prstGeom prst="rect">
             <a:avLst/>
@@ -5858,8 +6234,8 @@
         </p:nvSpPr>
         <p:spPr>
           <a:xfrm>
-            <a:off x="6400800" y="1280160"/>
-            <a:ext cx="3108960" cy="502920"/>
+            <a:off x="6035040" y="1280160"/>
+            <a:ext cx="2926080" cy="502920"/>
           </a:xfrm>
           <a:prstGeom prst="rect">
             <a:avLst/>
@@ -5897,8 +6273,8 @@
         </p:nvSpPr>
         <p:spPr>
           <a:xfrm>
-            <a:off x="9509760" y="1280160"/>
-            <a:ext cx="2651760" cy="502920"/>
+            <a:off x="8961120" y="1280160"/>
+            <a:ext cx="3200400" cy="502920"/>
           </a:xfrm>
           <a:prstGeom prst="rect">
             <a:avLst/>
@@ -5964,7 +6340,7 @@
         <p:spPr>
           <a:xfrm>
             <a:off x="548640" y="1783080"/>
-            <a:ext cx="2743200" cy="621792"/>
+            <a:ext cx="2560320" cy="621792"/>
           </a:xfrm>
           <a:prstGeom prst="rect">
             <a:avLst/>
@@ -6002,8 +6378,8 @@
         </p:nvSpPr>
         <p:spPr>
           <a:xfrm>
-            <a:off x="3291840" y="1783080"/>
-            <a:ext cx="3108960" cy="621792"/>
+            <a:off x="3108960" y="1783080"/>
+            <a:ext cx="2926080" cy="621792"/>
           </a:xfrm>
           <a:prstGeom prst="rect">
             <a:avLst/>
@@ -6041,8 +6417,8 @@
         </p:nvSpPr>
         <p:spPr>
           <a:xfrm>
-            <a:off x="6400800" y="1783080"/>
-            <a:ext cx="3108960" cy="621792"/>
+            <a:off x="6035040" y="1783080"/>
+            <a:ext cx="2926080" cy="621792"/>
           </a:xfrm>
           <a:prstGeom prst="rect">
             <a:avLst/>
@@ -6080,8 +6456,8 @@
         </p:nvSpPr>
         <p:spPr>
           <a:xfrm>
-            <a:off x="9509760" y="1783080"/>
-            <a:ext cx="2651760" cy="621792"/>
+            <a:off x="8961120" y="1783080"/>
+            <a:ext cx="3200400" cy="621792"/>
           </a:xfrm>
           <a:prstGeom prst="rect">
             <a:avLst/>
@@ -6147,7 +6523,7 @@
         <p:spPr>
           <a:xfrm>
             <a:off x="548640" y="2441448"/>
-            <a:ext cx="2743200" cy="621792"/>
+            <a:ext cx="2560320" cy="621792"/>
           </a:xfrm>
           <a:prstGeom prst="rect">
             <a:avLst/>
@@ -6185,8 +6561,8 @@
         </p:nvSpPr>
         <p:spPr>
           <a:xfrm>
-            <a:off x="3291840" y="2441448"/>
-            <a:ext cx="3108960" cy="621792"/>
+            <a:off x="3108960" y="2441448"/>
+            <a:ext cx="2926080" cy="621792"/>
           </a:xfrm>
           <a:prstGeom prst="rect">
             <a:avLst/>
@@ -6224,8 +6600,8 @@
         </p:nvSpPr>
         <p:spPr>
           <a:xfrm>
-            <a:off x="6400800" y="2441448"/>
-            <a:ext cx="3108960" cy="621792"/>
+            <a:off x="6035040" y="2441448"/>
+            <a:ext cx="2926080" cy="621792"/>
           </a:xfrm>
           <a:prstGeom prst="rect">
             <a:avLst/>
@@ -6263,8 +6639,8 @@
         </p:nvSpPr>
         <p:spPr>
           <a:xfrm>
-            <a:off x="9509760" y="2441448"/>
-            <a:ext cx="2651760" cy="621792"/>
+            <a:off x="8961120" y="2441448"/>
+            <a:ext cx="3200400" cy="621792"/>
           </a:xfrm>
           <a:prstGeom prst="rect">
             <a:avLst/>
@@ -6330,7 +6706,7 @@
         <p:spPr>
           <a:xfrm>
             <a:off x="548640" y="3099816"/>
-            <a:ext cx="2743200" cy="621792"/>
+            <a:ext cx="2560320" cy="621792"/>
           </a:xfrm>
           <a:prstGeom prst="rect">
             <a:avLst/>
@@ -6368,8 +6744,8 @@
         </p:nvSpPr>
         <p:spPr>
           <a:xfrm>
-            <a:off x="3291840" y="3099816"/>
-            <a:ext cx="3108960" cy="621792"/>
+            <a:off x="3108960" y="3099816"/>
+            <a:ext cx="2926080" cy="621792"/>
           </a:xfrm>
           <a:prstGeom prst="rect">
             <a:avLst/>
@@ -6407,8 +6783,8 @@
         </p:nvSpPr>
         <p:spPr>
           <a:xfrm>
-            <a:off x="6400800" y="3099816"/>
-            <a:ext cx="3108960" cy="621792"/>
+            <a:off x="6035040" y="3099816"/>
+            <a:ext cx="2926080" cy="621792"/>
           </a:xfrm>
           <a:prstGeom prst="rect">
             <a:avLst/>
@@ -6446,8 +6822,8 @@
         </p:nvSpPr>
         <p:spPr>
           <a:xfrm>
-            <a:off x="9509760" y="3099816"/>
-            <a:ext cx="2651760" cy="621792"/>
+            <a:off x="8961120" y="3099816"/>
+            <a:ext cx="3200400" cy="621792"/>
           </a:xfrm>
           <a:prstGeom prst="rect">
             <a:avLst/>
@@ -6513,7 +6889,7 @@
         <p:spPr>
           <a:xfrm>
             <a:off x="548640" y="3758184"/>
-            <a:ext cx="2743200" cy="621792"/>
+            <a:ext cx="2560320" cy="621792"/>
           </a:xfrm>
           <a:prstGeom prst="rect">
             <a:avLst/>
@@ -6551,8 +6927,8 @@
         </p:nvSpPr>
         <p:spPr>
           <a:xfrm>
-            <a:off x="3291840" y="3758184"/>
-            <a:ext cx="3108960" cy="621792"/>
+            <a:off x="3108960" y="3758184"/>
+            <a:ext cx="2926080" cy="621792"/>
           </a:xfrm>
           <a:prstGeom prst="rect">
             <a:avLst/>
@@ -6590,8 +6966,8 @@
         </p:nvSpPr>
         <p:spPr>
           <a:xfrm>
-            <a:off x="6400800" y="3758184"/>
-            <a:ext cx="3108960" cy="621792"/>
+            <a:off x="6035040" y="3758184"/>
+            <a:ext cx="2926080" cy="621792"/>
           </a:xfrm>
           <a:prstGeom prst="rect">
             <a:avLst/>
@@ -6629,8 +7005,8 @@
         </p:nvSpPr>
         <p:spPr>
           <a:xfrm>
-            <a:off x="9509760" y="3758184"/>
-            <a:ext cx="2651760" cy="621792"/>
+            <a:off x="8961120" y="3758184"/>
+            <a:ext cx="3200400" cy="621792"/>
           </a:xfrm>
           <a:prstGeom prst="rect">
             <a:avLst/>
@@ -6696,7 +7072,7 @@
         <p:spPr>
           <a:xfrm>
             <a:off x="548640" y="4416552"/>
-            <a:ext cx="2743200" cy="621792"/>
+            <a:ext cx="2560320" cy="621792"/>
           </a:xfrm>
           <a:prstGeom prst="rect">
             <a:avLst/>
@@ -6734,8 +7110,8 @@
         </p:nvSpPr>
         <p:spPr>
           <a:xfrm>
-            <a:off x="3291840" y="4416552"/>
-            <a:ext cx="3108960" cy="621792"/>
+            <a:off x="3108960" y="4416552"/>
+            <a:ext cx="2926080" cy="621792"/>
           </a:xfrm>
           <a:prstGeom prst="rect">
             <a:avLst/>
@@ -6773,8 +7149,8 @@
         </p:nvSpPr>
         <p:spPr>
           <a:xfrm>
-            <a:off x="6400800" y="4416552"/>
-            <a:ext cx="3108960" cy="621792"/>
+            <a:off x="6035040" y="4416552"/>
+            <a:ext cx="2926080" cy="621792"/>
           </a:xfrm>
           <a:prstGeom prst="rect">
             <a:avLst/>
@@ -6812,8 +7188,8 @@
         </p:nvSpPr>
         <p:spPr>
           <a:xfrm>
-            <a:off x="9509760" y="4416552"/>
-            <a:ext cx="2651760" cy="621792"/>
+            <a:off x="8961120" y="4416552"/>
+            <a:ext cx="3200400" cy="621792"/>
           </a:xfrm>
           <a:prstGeom prst="rect">
             <a:avLst/>
@@ -6837,7 +7213,7 @@
                 <a:ea typeface="Calibri" pitchFamily="34" charset="-122"/>
                 <a:cs typeface="Calibri" pitchFamily="34" charset="-120"/>
               </a:rPr>
-              <a:t>Promotion job</a:t>
+              <a:t>Zero (SQL/Spark) — or a promotion job (streaming/batch framework)</a:t>
             </a:r>
             <a:endParaRPr lang="en-US" sz="1100" dirty="0"/>
           </a:p>
@@ -6879,7 +7255,7 @@
         <p:spPr>
           <a:xfrm>
             <a:off x="548640" y="5074920"/>
-            <a:ext cx="2743200" cy="621792"/>
+            <a:ext cx="2560320" cy="621792"/>
           </a:xfrm>
           <a:prstGeom prst="rect">
             <a:avLst/>
@@ -6917,8 +7293,8 @@
         </p:nvSpPr>
         <p:spPr>
           <a:xfrm>
-            <a:off x="3291840" y="5074920"/>
-            <a:ext cx="3108960" cy="621792"/>
+            <a:off x="3108960" y="5074920"/>
+            <a:ext cx="2926080" cy="621792"/>
           </a:xfrm>
           <a:prstGeom prst="rect">
             <a:avLst/>
@@ -6956,8 +7332,8 @@
         </p:nvSpPr>
         <p:spPr>
           <a:xfrm>
-            <a:off x="6400800" y="5074920"/>
-            <a:ext cx="3108960" cy="621792"/>
+            <a:off x="6035040" y="5074920"/>
+            <a:ext cx="2926080" cy="621792"/>
           </a:xfrm>
           <a:prstGeom prst="rect">
             <a:avLst/>
@@ -6995,8 +7371,8 @@
         </p:nvSpPr>
         <p:spPr>
           <a:xfrm>
-            <a:off x="9509760" y="5074920"/>
-            <a:ext cx="2651760" cy="621792"/>
+            <a:off x="8961120" y="5074920"/>
+            <a:ext cx="3200400" cy="621792"/>
           </a:xfrm>
           <a:prstGeom prst="rect">
             <a:avLst/>
@@ -9081,6 +9457,3977 @@
     <p:bg>
       <p:bgPr>
         <a:solidFill>
+          <a:srgbClr val="F8DFE3"/>
+        </a:solidFill>
+      </p:bgPr>
+    </p:bg>
+    <p:spTree>
+      <p:nvGrpSpPr>
+        <p:cNvPr id="1" name=""/>
+        <p:cNvGrpSpPr/>
+        <p:nvPr/>
+      </p:nvGrpSpPr>
+      <p:grpSpPr>
+        <a:xfrm>
+          <a:off x="0" y="0"/>
+          <a:ext cx="0" cy="0"/>
+          <a:chOff x="0" y="0"/>
+          <a:chExt cx="0" cy="0"/>
+        </a:xfrm>
+      </p:grpSpPr>
+      <p:sp>
+        <p:nvSpPr>
+          <p:cNvPr id="2" name="Text 0"/>
+          <p:cNvSpPr/>
+          <p:nvPr/>
+        </p:nvSpPr>
+        <p:spPr>
+          <a:xfrm>
+            <a:off x="594360" y="2834640"/>
+            <a:ext cx="10058400" cy="1097280"/>
+          </a:xfrm>
+          <a:prstGeom prst="rect">
+            <a:avLst/>
+          </a:prstGeom>
+          <a:noFill/>
+          <a:ln/>
+        </p:spPr>
+        <p:txBody>
+          <a:bodyPr wrap="square" lIns="0" tIns="0" rIns="0" bIns="0" rtlCol="0" anchor="ctr"/>
+          <a:lstStyle/>
+          <a:p>
+            <a:pPr algn="l" indent="0" marL="0">
+              <a:buNone/>
+            </a:pPr>
+            <a:r>
+              <a:rPr lang="en-US" sz="4400" dirty="0">
+                <a:solidFill>
+                  <a:srgbClr val="0B3D3D"/>
+                </a:solidFill>
+                <a:latin typeface="Cambria" pitchFamily="34" charset="0"/>
+                <a:ea typeface="Cambria" pitchFamily="34" charset="-122"/>
+                <a:cs typeface="Cambria" pitchFamily="34" charset="-120"/>
+              </a:rPr>
+              <a:t>APPENDIX — RUNBOOKS BY METHOD</a:t>
+            </a:r>
+            <a:endParaRPr lang="en-US" sz="4400" dirty="0"/>
+          </a:p>
+        </p:txBody>
+      </p:sp>
+    </p:spTree>
+  </p:cSld>
+  <p:clrMapOvr>
+    <a:masterClrMapping/>
+  </p:clrMapOvr>
+</p:sld>
+</file>
+
+<file path=ppt/slides/slide21.xml><?xml version="1.0" encoding="utf-8"?>
+<p:sld xmlns:a="http://schemas.openxmlformats.org/drawingml/2006/main" xmlns:r="http://schemas.openxmlformats.org/officeDocument/2006/relationships" xmlns:p="http://schemas.openxmlformats.org/presentationml/2006/main">
+  <p:cSld name="Slide 21">
+    <p:bg>
+      <p:bgPr>
+        <a:solidFill>
+          <a:srgbClr val="F4F4F3"/>
+        </a:solidFill>
+      </p:bgPr>
+    </p:bg>
+    <p:spTree>
+      <p:nvGrpSpPr>
+        <p:cNvPr id="1" name=""/>
+        <p:cNvGrpSpPr/>
+        <p:nvPr/>
+      </p:nvGrpSpPr>
+      <p:grpSpPr>
+        <a:xfrm>
+          <a:off x="0" y="0"/>
+          <a:ext cx="0" cy="0"/>
+          <a:chOff x="0" y="0"/>
+          <a:chExt cx="0" cy="0"/>
+        </a:xfrm>
+      </p:grpSpPr>
+      <p:sp>
+        <p:nvSpPr>
+          <p:cNvPr id="2" name="Text 0"/>
+          <p:cNvSpPr/>
+          <p:nvPr/>
+        </p:nvSpPr>
+        <p:spPr>
+          <a:xfrm>
+            <a:off x="548640" y="274320"/>
+            <a:ext cx="10515600" cy="502920"/>
+          </a:xfrm>
+          <a:prstGeom prst="rect">
+            <a:avLst/>
+          </a:prstGeom>
+          <a:noFill/>
+          <a:ln/>
+        </p:spPr>
+        <p:txBody>
+          <a:bodyPr wrap="square" lIns="0" tIns="0" rIns="0" bIns="0" rtlCol="0" anchor="ctr"/>
+          <a:lstStyle/>
+          <a:p>
+            <a:pPr algn="l" indent="0" marL="0">
+              <a:buNone/>
+            </a:pPr>
+            <a:r>
+              <a:rPr lang="en-US" sz="2800" dirty="0">
+                <a:solidFill>
+                  <a:srgbClr val="0F5C56"/>
+                </a:solidFill>
+                <a:latin typeface="Cambria" pitchFamily="34" charset="0"/>
+                <a:ea typeface="Cambria" pitchFamily="34" charset="-122"/>
+                <a:cs typeface="Cambria" pitchFamily="34" charset="-120"/>
+              </a:rPr>
+              <a:t>Runbook A — Zero-Copy Federation</a:t>
+            </a:r>
+            <a:endParaRPr lang="en-US" sz="2800" dirty="0"/>
+          </a:p>
+        </p:txBody>
+      </p:sp>
+      <p:sp>
+        <p:nvSpPr>
+          <p:cNvPr id="3" name="Text 1"/>
+          <p:cNvSpPr/>
+          <p:nvPr/>
+        </p:nvSpPr>
+        <p:spPr>
+          <a:xfrm>
+            <a:off x="566928" y="749808"/>
+            <a:ext cx="10515600" cy="365760"/>
+          </a:xfrm>
+          <a:prstGeom prst="rect">
+            <a:avLst/>
+          </a:prstGeom>
+          <a:noFill/>
+          <a:ln/>
+        </p:spPr>
+        <p:txBody>
+          <a:bodyPr wrap="square" lIns="0" tIns="0" rIns="0" bIns="0" rtlCol="0" anchor="ctr"/>
+          <a:lstStyle/>
+          <a:p>
+            <a:pPr algn="l" indent="0" marL="0">
+              <a:buNone/>
+            </a:pPr>
+            <a:r>
+              <a:rPr lang="en-US" sz="1400" i="1" dirty="0">
+                <a:solidFill>
+                  <a:srgbClr val="1A2E2E"/>
+                </a:solidFill>
+                <a:latin typeface="Calibri" pitchFamily="34" charset="0"/>
+                <a:ea typeface="Calibri" pitchFamily="34" charset="-122"/>
+                <a:cs typeface="Calibri" pitchFamily="34" charset="-120"/>
+              </a:rPr>
+              <a:t>Source-cloud catalog, read live from the consumer engine</a:t>
+            </a:r>
+            <a:endParaRPr lang="en-US" sz="1400" dirty="0"/>
+          </a:p>
+        </p:txBody>
+      </p:sp>
+      <p:sp>
+        <p:nvSpPr>
+          <p:cNvPr id="4" name="Text 2"/>
+          <p:cNvSpPr/>
+          <p:nvPr/>
+        </p:nvSpPr>
+        <p:spPr>
+          <a:xfrm>
+            <a:off x="0" y="6583680"/>
+            <a:ext cx="12188952" cy="274320"/>
+          </a:xfrm>
+          <a:prstGeom prst="rect">
+            <a:avLst/>
+          </a:prstGeom>
+          <a:noFill/>
+          <a:ln/>
+        </p:spPr>
+        <p:txBody>
+          <a:bodyPr wrap="square" lIns="0" tIns="0" rIns="0" bIns="0" rtlCol="0" anchor="ctr"/>
+          <a:lstStyle/>
+          <a:p>
+            <a:pPr algn="ctr" indent="0" marL="0">
+              <a:buNone/>
+            </a:pPr>
+            <a:r>
+              <a:rPr lang="en-US" sz="900" dirty="0">
+                <a:solidFill>
+                  <a:srgbClr val="5B6B6B"/>
+                </a:solidFill>
+                <a:latin typeface="Calibri" pitchFamily="34" charset="0"/>
+                <a:ea typeface="Calibri" pitchFamily="34" charset="-122"/>
+                <a:cs typeface="Calibri" pitchFamily="34" charset="-120"/>
+              </a:rPr>
+              <a:t>Internal Use</a:t>
+            </a:r>
+            <a:endParaRPr lang="en-US" sz="900" dirty="0"/>
+          </a:p>
+        </p:txBody>
+      </p:sp>
+      <p:sp>
+        <p:nvSpPr>
+          <p:cNvPr id="5" name="Shape 3"/>
+          <p:cNvSpPr/>
+          <p:nvPr/>
+        </p:nvSpPr>
+        <p:spPr>
+          <a:xfrm>
+            <a:off x="594360" y="1271016"/>
+            <a:ext cx="384048" cy="384048"/>
+          </a:xfrm>
+          <a:prstGeom prst="ellipse">
+            <a:avLst/>
+          </a:prstGeom>
+          <a:solidFill>
+            <a:srgbClr val="0F5C56"/>
+          </a:solidFill>
+          <a:ln w="12700">
+            <a:solidFill>
+              <a:srgbClr val="0F5C56"/>
+            </a:solidFill>
+            <a:prstDash val="solid"/>
+          </a:ln>
+        </p:spPr>
+      </p:sp>
+      <p:sp>
+        <p:nvSpPr>
+          <p:cNvPr id="6" name="Text 4"/>
+          <p:cNvSpPr/>
+          <p:nvPr/>
+        </p:nvSpPr>
+        <p:spPr>
+          <a:xfrm>
+            <a:off x="594360" y="1271016"/>
+            <a:ext cx="384048" cy="384048"/>
+          </a:xfrm>
+          <a:prstGeom prst="rect">
+            <a:avLst/>
+          </a:prstGeom>
+          <a:noFill/>
+          <a:ln/>
+        </p:spPr>
+        <p:txBody>
+          <a:bodyPr wrap="square" lIns="0" tIns="0" rIns="0" bIns="0" rtlCol="0" anchor="ctr"/>
+          <a:lstStyle/>
+          <a:p>
+            <a:pPr algn="ctr" indent="0" marL="0">
+              <a:buNone/>
+            </a:pPr>
+            <a:r>
+              <a:rPr lang="en-US" sz="1300" b="1" dirty="0">
+                <a:solidFill>
+                  <a:srgbClr val="FFFFFF"/>
+                </a:solidFill>
+                <a:latin typeface="Cambria" pitchFamily="34" charset="0"/>
+                <a:ea typeface="Cambria" pitchFamily="34" charset="-122"/>
+                <a:cs typeface="Cambria" pitchFamily="34" charset="-120"/>
+              </a:rPr>
+              <a:t>1</a:t>
+            </a:r>
+            <a:endParaRPr lang="en-US" sz="1300" dirty="0"/>
+          </a:p>
+        </p:txBody>
+      </p:sp>
+      <p:sp>
+        <p:nvSpPr>
+          <p:cNvPr id="7" name="Text 5"/>
+          <p:cNvSpPr/>
+          <p:nvPr/>
+        </p:nvSpPr>
+        <p:spPr>
+          <a:xfrm>
+            <a:off x="1143000" y="1216152"/>
+            <a:ext cx="6126480" cy="658368"/>
+          </a:xfrm>
+          <a:prstGeom prst="rect">
+            <a:avLst/>
+          </a:prstGeom>
+          <a:noFill/>
+          <a:ln/>
+        </p:spPr>
+        <p:txBody>
+          <a:bodyPr wrap="square" lIns="0" tIns="0" rIns="0" bIns="0" rtlCol="0" anchor="t"/>
+          <a:lstStyle/>
+          <a:p>
+            <a:pPr indent="0" marL="0">
+              <a:buNone/>
+            </a:pPr>
+            <a:r>
+              <a:rPr lang="en-US" sz="1100" b="1" dirty="0">
+                <a:solidFill>
+                  <a:srgbClr val="0B3D3D"/>
+                </a:solidFill>
+                <a:latin typeface="Calibri" pitchFamily="34" charset="0"/>
+                <a:ea typeface="Calibri" pitchFamily="34" charset="-122"/>
+                <a:cs typeface="Calibri" pitchFamily="34" charset="-120"/>
+              </a:rPr>
+              <a:t>Catalog + storage   </a:t>
+            </a:r>
+            <a:pPr indent="0" marL="0">
+              <a:buNone/>
+            </a:pPr>
+            <a:r>
+              <a:rPr lang="en-US" sz="1100" dirty="0">
+                <a:solidFill>
+                  <a:srgbClr val="1A2E2E"/>
+                </a:solidFill>
+                <a:latin typeface="Calibri" pitchFamily="34" charset="0"/>
+                <a:ea typeface="Calibri" pitchFamily="34" charset="-122"/>
+                <a:cs typeface="Calibri" pitchFamily="34" charset="-120"/>
+              </a:rPr>
+              <a:t>Stand up a managed REST catalog over cloud-storage-resident Iceberg tables; grant the catalog's own runtime identity read/write access to the bucket.</a:t>
+            </a:r>
+            <a:endParaRPr lang="en-US" sz="1100" dirty="0"/>
+          </a:p>
+        </p:txBody>
+      </p:sp>
+      <p:sp>
+        <p:nvSpPr>
+          <p:cNvPr id="8" name="Shape 6"/>
+          <p:cNvSpPr/>
+          <p:nvPr/>
+        </p:nvSpPr>
+        <p:spPr>
+          <a:xfrm>
+            <a:off x="594360" y="1965960"/>
+            <a:ext cx="384048" cy="384048"/>
+          </a:xfrm>
+          <a:prstGeom prst="ellipse">
+            <a:avLst/>
+          </a:prstGeom>
+          <a:solidFill>
+            <a:srgbClr val="0F5C56"/>
+          </a:solidFill>
+          <a:ln w="12700">
+            <a:solidFill>
+              <a:srgbClr val="0F5C56"/>
+            </a:solidFill>
+            <a:prstDash val="solid"/>
+          </a:ln>
+        </p:spPr>
+      </p:sp>
+      <p:sp>
+        <p:nvSpPr>
+          <p:cNvPr id="9" name="Text 7"/>
+          <p:cNvSpPr/>
+          <p:nvPr/>
+        </p:nvSpPr>
+        <p:spPr>
+          <a:xfrm>
+            <a:off x="594360" y="1965960"/>
+            <a:ext cx="384048" cy="384048"/>
+          </a:xfrm>
+          <a:prstGeom prst="rect">
+            <a:avLst/>
+          </a:prstGeom>
+          <a:noFill/>
+          <a:ln/>
+        </p:spPr>
+        <p:txBody>
+          <a:bodyPr wrap="square" lIns="0" tIns="0" rIns="0" bIns="0" rtlCol="0" anchor="ctr"/>
+          <a:lstStyle/>
+          <a:p>
+            <a:pPr algn="ctr" indent="0" marL="0">
+              <a:buNone/>
+            </a:pPr>
+            <a:r>
+              <a:rPr lang="en-US" sz="1300" b="1" dirty="0">
+                <a:solidFill>
+                  <a:srgbClr val="FFFFFF"/>
+                </a:solidFill>
+                <a:latin typeface="Cambria" pitchFamily="34" charset="0"/>
+                <a:ea typeface="Cambria" pitchFamily="34" charset="-122"/>
+                <a:cs typeface="Cambria" pitchFamily="34" charset="-120"/>
+              </a:rPr>
+              <a:t>2</a:t>
+            </a:r>
+            <a:endParaRPr lang="en-US" sz="1300" dirty="0"/>
+          </a:p>
+        </p:txBody>
+      </p:sp>
+      <p:sp>
+        <p:nvSpPr>
+          <p:cNvPr id="10" name="Text 8"/>
+          <p:cNvSpPr/>
+          <p:nvPr/>
+        </p:nvSpPr>
+        <p:spPr>
+          <a:xfrm>
+            <a:off x="1143000" y="1911096"/>
+            <a:ext cx="6126480" cy="658368"/>
+          </a:xfrm>
+          <a:prstGeom prst="rect">
+            <a:avLst/>
+          </a:prstGeom>
+          <a:noFill/>
+          <a:ln/>
+        </p:spPr>
+        <p:txBody>
+          <a:bodyPr wrap="square" lIns="0" tIns="0" rIns="0" bIns="0" rtlCol="0" anchor="t"/>
+          <a:lstStyle/>
+          <a:p>
+            <a:pPr indent="0" marL="0">
+              <a:buNone/>
+            </a:pPr>
+            <a:r>
+              <a:rPr lang="en-US" sz="1100" b="1" dirty="0">
+                <a:solidFill>
+                  <a:srgbClr val="0B3D3D"/>
+                </a:solidFill>
+                <a:latin typeface="Calibri" pitchFamily="34" charset="0"/>
+                <a:ea typeface="Calibri" pitchFamily="34" charset="-122"/>
+                <a:cs typeface="Calibri" pitchFamily="34" charset="-120"/>
+              </a:rPr>
+              <a:t>Seed a table   </a:t>
+            </a:r>
+            <a:pPr indent="0" marL="0">
+              <a:buNone/>
+            </a:pPr>
+            <a:r>
+              <a:rPr lang="en-US" sz="1100" dirty="0">
+                <a:solidFill>
+                  <a:srgbClr val="1A2E2E"/>
+                </a:solidFill>
+                <a:latin typeface="Calibri" pitchFamily="34" charset="0"/>
+                <a:ea typeface="Calibri" pitchFamily="34" charset="-122"/>
+                <a:cs typeface="Calibri" pitchFamily="34" charset="-120"/>
+              </a:rPr>
+              <a:t>Create a namespace and table through the catalog using any Iceberg-capable write engine (Spark is the common choice).</a:t>
+            </a:r>
+            <a:endParaRPr lang="en-US" sz="1100" dirty="0"/>
+          </a:p>
+        </p:txBody>
+      </p:sp>
+      <p:sp>
+        <p:nvSpPr>
+          <p:cNvPr id="11" name="Shape 9"/>
+          <p:cNvSpPr/>
+          <p:nvPr/>
+        </p:nvSpPr>
+        <p:spPr>
+          <a:xfrm>
+            <a:off x="594360" y="2660904"/>
+            <a:ext cx="384048" cy="384048"/>
+          </a:xfrm>
+          <a:prstGeom prst="ellipse">
+            <a:avLst/>
+          </a:prstGeom>
+          <a:solidFill>
+            <a:srgbClr val="0F5C56"/>
+          </a:solidFill>
+          <a:ln w="12700">
+            <a:solidFill>
+              <a:srgbClr val="0F5C56"/>
+            </a:solidFill>
+            <a:prstDash val="solid"/>
+          </a:ln>
+        </p:spPr>
+      </p:sp>
+      <p:sp>
+        <p:nvSpPr>
+          <p:cNvPr id="12" name="Text 10"/>
+          <p:cNvSpPr/>
+          <p:nvPr/>
+        </p:nvSpPr>
+        <p:spPr>
+          <a:xfrm>
+            <a:off x="594360" y="2660904"/>
+            <a:ext cx="384048" cy="384048"/>
+          </a:xfrm>
+          <a:prstGeom prst="rect">
+            <a:avLst/>
+          </a:prstGeom>
+          <a:noFill/>
+          <a:ln/>
+        </p:spPr>
+        <p:txBody>
+          <a:bodyPr wrap="square" lIns="0" tIns="0" rIns="0" bIns="0" rtlCol="0" anchor="ctr"/>
+          <a:lstStyle/>
+          <a:p>
+            <a:pPr algn="ctr" indent="0" marL="0">
+              <a:buNone/>
+            </a:pPr>
+            <a:r>
+              <a:rPr lang="en-US" sz="1300" b="1" dirty="0">
+                <a:solidFill>
+                  <a:srgbClr val="FFFFFF"/>
+                </a:solidFill>
+                <a:latin typeface="Cambria" pitchFamily="34" charset="0"/>
+                <a:ea typeface="Cambria" pitchFamily="34" charset="-122"/>
+                <a:cs typeface="Cambria" pitchFamily="34" charset="-120"/>
+              </a:rPr>
+              <a:t>3</a:t>
+            </a:r>
+            <a:endParaRPr lang="en-US" sz="1300" dirty="0"/>
+          </a:p>
+        </p:txBody>
+      </p:sp>
+      <p:sp>
+        <p:nvSpPr>
+          <p:cNvPr id="13" name="Text 11"/>
+          <p:cNvSpPr/>
+          <p:nvPr/>
+        </p:nvSpPr>
+        <p:spPr>
+          <a:xfrm>
+            <a:off x="1143000" y="2606040"/>
+            <a:ext cx="6126480" cy="658368"/>
+          </a:xfrm>
+          <a:prstGeom prst="rect">
+            <a:avLst/>
+          </a:prstGeom>
+          <a:noFill/>
+          <a:ln/>
+        </p:spPr>
+        <p:txBody>
+          <a:bodyPr wrap="square" lIns="0" tIns="0" rIns="0" bIns="0" rtlCol="0" anchor="t"/>
+          <a:lstStyle/>
+          <a:p>
+            <a:pPr indent="0" marL="0">
+              <a:buNone/>
+            </a:pPr>
+            <a:r>
+              <a:rPr lang="en-US" sz="1100" b="1" dirty="0">
+                <a:solidFill>
+                  <a:srgbClr val="0B3D3D"/>
+                </a:solidFill>
+                <a:latin typeface="Calibri" pitchFamily="34" charset="0"/>
+                <a:ea typeface="Calibri" pitchFamily="34" charset="-122"/>
+                <a:cs typeface="Calibri" pitchFamily="34" charset="-120"/>
+              </a:rPr>
+              <a:t>Federated trust   </a:t>
+            </a:r>
+            <a:pPr indent="0" marL="0">
+              <a:buNone/>
+            </a:pPr>
+            <a:r>
+              <a:rPr lang="en-US" sz="1100" dirty="0">
+                <a:solidFill>
+                  <a:srgbClr val="1A2E2E"/>
+                </a:solidFill>
+                <a:latin typeface="Calibri" pitchFamily="34" charset="0"/>
+                <a:ea typeface="Calibri" pitchFamily="34" charset="-122"/>
+                <a:cs typeface="Calibri" pitchFamily="34" charset="-120"/>
+              </a:rPr>
+              <a:t>Exchange an issuer URL from the consumer engine for a workload-identity pool + provider on the source cloud; grant that principal read-only catalog access.</a:t>
+            </a:r>
+            <a:endParaRPr lang="en-US" sz="1100" dirty="0"/>
+          </a:p>
+        </p:txBody>
+      </p:sp>
+      <p:sp>
+        <p:nvSpPr>
+          <p:cNvPr id="14" name="Shape 12"/>
+          <p:cNvSpPr/>
+          <p:nvPr/>
+        </p:nvSpPr>
+        <p:spPr>
+          <a:xfrm>
+            <a:off x="594360" y="3355848"/>
+            <a:ext cx="384048" cy="384048"/>
+          </a:xfrm>
+          <a:prstGeom prst="ellipse">
+            <a:avLst/>
+          </a:prstGeom>
+          <a:solidFill>
+            <a:srgbClr val="0F5C56"/>
+          </a:solidFill>
+          <a:ln w="12700">
+            <a:solidFill>
+              <a:srgbClr val="0F5C56"/>
+            </a:solidFill>
+            <a:prstDash val="solid"/>
+          </a:ln>
+        </p:spPr>
+      </p:sp>
+      <p:sp>
+        <p:nvSpPr>
+          <p:cNvPr id="15" name="Text 13"/>
+          <p:cNvSpPr/>
+          <p:nvPr/>
+        </p:nvSpPr>
+        <p:spPr>
+          <a:xfrm>
+            <a:off x="594360" y="3355848"/>
+            <a:ext cx="384048" cy="384048"/>
+          </a:xfrm>
+          <a:prstGeom prst="rect">
+            <a:avLst/>
+          </a:prstGeom>
+          <a:noFill/>
+          <a:ln/>
+        </p:spPr>
+        <p:txBody>
+          <a:bodyPr wrap="square" lIns="0" tIns="0" rIns="0" bIns="0" rtlCol="0" anchor="ctr"/>
+          <a:lstStyle/>
+          <a:p>
+            <a:pPr algn="ctr" indent="0" marL="0">
+              <a:buNone/>
+            </a:pPr>
+            <a:r>
+              <a:rPr lang="en-US" sz="1300" b="1" dirty="0">
+                <a:solidFill>
+                  <a:srgbClr val="FFFFFF"/>
+                </a:solidFill>
+                <a:latin typeface="Cambria" pitchFamily="34" charset="0"/>
+                <a:ea typeface="Cambria" pitchFamily="34" charset="-122"/>
+                <a:cs typeface="Cambria" pitchFamily="34" charset="-120"/>
+              </a:rPr>
+              <a:t>4</a:t>
+            </a:r>
+            <a:endParaRPr lang="en-US" sz="1300" dirty="0"/>
+          </a:p>
+        </p:txBody>
+      </p:sp>
+      <p:sp>
+        <p:nvSpPr>
+          <p:cNvPr id="16" name="Text 14"/>
+          <p:cNvSpPr/>
+          <p:nvPr/>
+        </p:nvSpPr>
+        <p:spPr>
+          <a:xfrm>
+            <a:off x="1143000" y="3300984"/>
+            <a:ext cx="6126480" cy="658368"/>
+          </a:xfrm>
+          <a:prstGeom prst="rect">
+            <a:avLst/>
+          </a:prstGeom>
+          <a:noFill/>
+          <a:ln/>
+        </p:spPr>
+        <p:txBody>
+          <a:bodyPr wrap="square" lIns="0" tIns="0" rIns="0" bIns="0" rtlCol="0" anchor="t"/>
+          <a:lstStyle/>
+          <a:p>
+            <a:pPr indent="0" marL="0">
+              <a:buNone/>
+            </a:pPr>
+            <a:r>
+              <a:rPr lang="en-US" sz="1100" b="1" dirty="0">
+                <a:solidFill>
+                  <a:srgbClr val="0B3D3D"/>
+                </a:solidFill>
+                <a:latin typeface="Calibri" pitchFamily="34" charset="0"/>
+                <a:ea typeface="Calibri" pitchFamily="34" charset="-122"/>
+                <a:cs typeface="Calibri" pitchFamily="34" charset="-120"/>
+              </a:rPr>
+              <a:t>Catalog-linked database   </a:t>
+            </a:r>
+            <a:pPr indent="0" marL="0">
+              <a:buNone/>
+            </a:pPr>
+            <a:r>
+              <a:rPr lang="en-US" sz="1100" dirty="0">
+                <a:solidFill>
+                  <a:srgbClr val="1A2E2E"/>
+                </a:solidFill>
+                <a:latin typeface="Calibri" pitchFamily="34" charset="0"/>
+                <a:ea typeface="Calibri" pitchFamily="34" charset="-122"/>
+                <a:cs typeface="Calibri" pitchFamily="34" charset="-120"/>
+              </a:rPr>
+              <a:t>On the consumer engine, create a database backed by the catalog integration; discovery of namespaces/tables is asynchronous.</a:t>
+            </a:r>
+            <a:endParaRPr lang="en-US" sz="1100" dirty="0"/>
+          </a:p>
+        </p:txBody>
+      </p:sp>
+      <p:sp>
+        <p:nvSpPr>
+          <p:cNvPr id="17" name="Shape 15"/>
+          <p:cNvSpPr/>
+          <p:nvPr/>
+        </p:nvSpPr>
+        <p:spPr>
+          <a:xfrm>
+            <a:off x="594360" y="4050792"/>
+            <a:ext cx="384048" cy="384048"/>
+          </a:xfrm>
+          <a:prstGeom prst="ellipse">
+            <a:avLst/>
+          </a:prstGeom>
+          <a:solidFill>
+            <a:srgbClr val="0F5C56"/>
+          </a:solidFill>
+          <a:ln w="12700">
+            <a:solidFill>
+              <a:srgbClr val="0F5C56"/>
+            </a:solidFill>
+            <a:prstDash val="solid"/>
+          </a:ln>
+        </p:spPr>
+      </p:sp>
+      <p:sp>
+        <p:nvSpPr>
+          <p:cNvPr id="18" name="Text 16"/>
+          <p:cNvSpPr/>
+          <p:nvPr/>
+        </p:nvSpPr>
+        <p:spPr>
+          <a:xfrm>
+            <a:off x="594360" y="4050792"/>
+            <a:ext cx="384048" cy="384048"/>
+          </a:xfrm>
+          <a:prstGeom prst="rect">
+            <a:avLst/>
+          </a:prstGeom>
+          <a:noFill/>
+          <a:ln/>
+        </p:spPr>
+        <p:txBody>
+          <a:bodyPr wrap="square" lIns="0" tIns="0" rIns="0" bIns="0" rtlCol="0" anchor="ctr"/>
+          <a:lstStyle/>
+          <a:p>
+            <a:pPr algn="ctr" indent="0" marL="0">
+              <a:buNone/>
+            </a:pPr>
+            <a:r>
+              <a:rPr lang="en-US" sz="1300" b="1" dirty="0">
+                <a:solidFill>
+                  <a:srgbClr val="FFFFFF"/>
+                </a:solidFill>
+                <a:latin typeface="Cambria" pitchFamily="34" charset="0"/>
+                <a:ea typeface="Cambria" pitchFamily="34" charset="-122"/>
+                <a:cs typeface="Cambria" pitchFamily="34" charset="-120"/>
+              </a:rPr>
+              <a:t>5</a:t>
+            </a:r>
+            <a:endParaRPr lang="en-US" sz="1300" dirty="0"/>
+          </a:p>
+        </p:txBody>
+      </p:sp>
+      <p:sp>
+        <p:nvSpPr>
+          <p:cNvPr id="19" name="Text 17"/>
+          <p:cNvSpPr/>
+          <p:nvPr/>
+        </p:nvSpPr>
+        <p:spPr>
+          <a:xfrm>
+            <a:off x="1143000" y="3995928"/>
+            <a:ext cx="6126480" cy="658368"/>
+          </a:xfrm>
+          <a:prstGeom prst="rect">
+            <a:avLst/>
+          </a:prstGeom>
+          <a:noFill/>
+          <a:ln/>
+        </p:spPr>
+        <p:txBody>
+          <a:bodyPr wrap="square" lIns="0" tIns="0" rIns="0" bIns="0" rtlCol="0" anchor="t"/>
+          <a:lstStyle/>
+          <a:p>
+            <a:pPr indent="0" marL="0">
+              <a:buNone/>
+            </a:pPr>
+            <a:r>
+              <a:rPr lang="en-US" sz="1100" b="1" dirty="0">
+                <a:solidFill>
+                  <a:srgbClr val="0B3D3D"/>
+                </a:solidFill>
+                <a:latin typeface="Calibri" pitchFamily="34" charset="0"/>
+                <a:ea typeface="Calibri" pitchFamily="34" charset="-122"/>
+                <a:cs typeface="Calibri" pitchFamily="34" charset="-120"/>
+              </a:rPr>
+              <a:t>Verify + measure   </a:t>
+            </a:r>
+            <a:pPr indent="0" marL="0">
+              <a:buNone/>
+            </a:pPr>
+            <a:r>
+              <a:rPr lang="en-US" sz="1100" dirty="0">
+                <a:solidFill>
+                  <a:srgbClr val="1A2E2E"/>
+                </a:solidFill>
+                <a:latin typeface="Calibri" pitchFamily="34" charset="0"/>
+                <a:ea typeface="Calibri" pitchFamily="34" charset="-122"/>
+                <a:cs typeface="Calibri" pitchFamily="34" charset="-120"/>
+              </a:rPr>
+              <a:t>Query the table live; write a new row on the source side and re-query to confirm freshness with no pipeline in between.</a:t>
+            </a:r>
+            <a:endParaRPr lang="en-US" sz="1100" dirty="0"/>
+          </a:p>
+        </p:txBody>
+      </p:sp>
+      <p:sp>
+        <p:nvSpPr>
+          <p:cNvPr id="20" name="Shape 18"/>
+          <p:cNvSpPr/>
+          <p:nvPr/>
+        </p:nvSpPr>
+        <p:spPr>
+          <a:xfrm>
+            <a:off x="7452360" y="1234440"/>
+            <a:ext cx="4206240" cy="3566160"/>
+          </a:xfrm>
+          <a:prstGeom prst="roundRect">
+            <a:avLst>
+              <a:gd name="adj" fmla="val 1282"/>
+            </a:avLst>
+          </a:prstGeom>
+          <a:solidFill>
+            <a:srgbClr val="F4F4F3"/>
+          </a:solidFill>
+          <a:ln w="15875">
+            <a:solidFill>
+              <a:srgbClr val="D8D8D6"/>
+            </a:solidFill>
+            <a:prstDash val="solid"/>
+          </a:ln>
+        </p:spPr>
+      </p:sp>
+      <p:sp>
+        <p:nvSpPr>
+          <p:cNvPr id="21" name="Text 19"/>
+          <p:cNvSpPr/>
+          <p:nvPr/>
+        </p:nvSpPr>
+        <p:spPr>
+          <a:xfrm>
+            <a:off x="7680960" y="1371600"/>
+            <a:ext cx="3749040" cy="274320"/>
+          </a:xfrm>
+          <a:prstGeom prst="rect">
+            <a:avLst/>
+          </a:prstGeom>
+          <a:noFill/>
+          <a:ln/>
+        </p:spPr>
+        <p:txBody>
+          <a:bodyPr wrap="square" lIns="0" tIns="0" rIns="0" bIns="0" rtlCol="0" anchor="ctr"/>
+          <a:lstStyle/>
+          <a:p>
+            <a:pPr indent="0" marL="0">
+              <a:buNone/>
+            </a:pPr>
+            <a:r>
+              <a:rPr lang="en-US" sz="1250" b="1" dirty="0">
+                <a:solidFill>
+                  <a:srgbClr val="C1502E"/>
+                </a:solidFill>
+                <a:latin typeface="Calibri" pitchFamily="34" charset="0"/>
+                <a:ea typeface="Calibri" pitchFamily="34" charset="-122"/>
+                <a:cs typeface="Calibri" pitchFamily="34" charset="-120"/>
+              </a:rPr>
+              <a:t>Sharp edges</a:t>
+            </a:r>
+            <a:endParaRPr lang="en-US" sz="1250" dirty="0"/>
+          </a:p>
+        </p:txBody>
+      </p:sp>
+      <p:sp>
+        <p:nvSpPr>
+          <p:cNvPr id="22" name="Text 20"/>
+          <p:cNvSpPr/>
+          <p:nvPr/>
+        </p:nvSpPr>
+        <p:spPr>
+          <a:xfrm>
+            <a:off x="7680960" y="1719072"/>
+            <a:ext cx="3749040" cy="2971800"/>
+          </a:xfrm>
+          <a:prstGeom prst="rect">
+            <a:avLst/>
+          </a:prstGeom>
+          <a:noFill/>
+          <a:ln/>
+        </p:spPr>
+        <p:txBody>
+          <a:bodyPr wrap="square" lIns="0" tIns="0" rIns="0" bIns="0" rtlCol="0" anchor="t"/>
+          <a:lstStyle/>
+          <a:p>
+            <a:pPr marL="342900" indent="-342900">
+              <a:spcAft>
+                <a:spcPts val="600"/>
+              </a:spcAft>
+              <a:buSzPct val="100000"/>
+              <a:buChar char="•"/>
+            </a:pPr>
+            <a:r>
+              <a:rPr lang="en-US" sz="950" dirty="0">
+                <a:solidFill>
+                  <a:srgbClr val="1A2E2E"/>
+                </a:solidFill>
+                <a:latin typeface="Calibri" pitchFamily="34" charset="0"/>
+                <a:ea typeface="Calibri" pitchFamily="34" charset="-122"/>
+                <a:cs typeface="Calibri" pitchFamily="34" charset="-120"/>
+              </a:rPr>
+              <a:t>The catalog runtime identity needs an explicit storage grant — not automatic</a:t>
+            </a:r>
+            <a:endParaRPr lang="en-US" sz="950" dirty="0"/>
+          </a:p>
+          <a:p>
+            <a:pPr marL="342900" indent="-342900">
+              <a:spcAft>
+                <a:spcPts val="600"/>
+              </a:spcAft>
+              <a:buSzPct val="100000"/>
+              <a:buChar char="•"/>
+            </a:pPr>
+            <a:r>
+              <a:rPr lang="en-US" sz="950" dirty="0">
+                <a:solidFill>
+                  <a:srgbClr val="1A2E2E"/>
+                </a:solidFill>
+                <a:latin typeface="Calibri" pitchFamily="34" charset="0"/>
+                <a:ea typeface="Calibri" pitchFamily="34" charset="-122"/>
+                <a:cs typeface="Calibri" pitchFamily="34" charset="-120"/>
+              </a:rPr>
+              <a:t>The consumer-side principal needs more than read access to the catalog: it also needs rights to use the source project's billed APIs</a:t>
+            </a:r>
+            <a:endParaRPr lang="en-US" sz="950" dirty="0"/>
+          </a:p>
+          <a:p>
+            <a:pPr marL="342900" indent="-342900">
+              <a:spcAft>
+                <a:spcPts val="600"/>
+              </a:spcAft>
+              <a:buSzPct val="100000"/>
+              <a:buChar char="•"/>
+            </a:pPr>
+            <a:r>
+              <a:rPr lang="en-US" sz="950" dirty="0">
+                <a:solidFill>
+                  <a:srgbClr val="1A2E2E"/>
+                </a:solidFill>
+                <a:latin typeface="Calibri" pitchFamily="34" charset="0"/>
+                <a:ea typeface="Calibri" pitchFamily="34" charset="-122"/>
+                <a:cs typeface="Calibri" pitchFamily="34" charset="-120"/>
+              </a:rPr>
+              <a:t>Recreating the catalog integration mints a NEW trust subject — re-grant after every replace</a:t>
+            </a:r>
+            <a:endParaRPr lang="en-US" sz="950" dirty="0"/>
+          </a:p>
+          <a:p>
+            <a:pPr marL="342900" indent="-342900">
+              <a:spcAft>
+                <a:spcPts val="600"/>
+              </a:spcAft>
+              <a:buSzPct val="100000"/>
+              <a:buChar char="•"/>
+            </a:pPr>
+            <a:r>
+              <a:rPr lang="en-US" sz="950" dirty="0">
+                <a:solidFill>
+                  <a:srgbClr val="1A2E2E"/>
+                </a:solidFill>
+                <a:latin typeface="Calibri" pitchFamily="34" charset="0"/>
+                <a:ea typeface="Calibri" pitchFamily="34" charset="-122"/>
+                <a:cs typeface="Calibri" pitchFamily="34" charset="-120"/>
+              </a:rPr>
+              <a:t>Credential vending must be explicitly enabled in the catalog integration config, or the consumer-side database refuses to create</a:t>
+            </a:r>
+            <a:endParaRPr lang="en-US" sz="950" dirty="0"/>
+          </a:p>
+          <a:p>
+            <a:pPr marL="342900" indent="-342900">
+              <a:spcAft>
+                <a:spcPts val="600"/>
+              </a:spcAft>
+              <a:buSzPct val="100000"/>
+              <a:buChar char="•"/>
+            </a:pPr>
+            <a:r>
+              <a:rPr lang="en-US" sz="950" dirty="0">
+                <a:solidFill>
+                  <a:srgbClr val="1A2E2E"/>
+                </a:solidFill>
+                <a:latin typeface="Calibri" pitchFamily="34" charset="0"/>
+                <a:ea typeface="Calibri" pitchFamily="34" charset="-122"/>
+                <a:cs typeface="Calibri" pitchFamily="34" charset="-120"/>
+              </a:rPr>
+              <a:t>Every catalog request needs a specific delegation header once vending is on</a:t>
+            </a:r>
+            <a:endParaRPr lang="en-US" sz="950" dirty="0"/>
+          </a:p>
+        </p:txBody>
+      </p:sp>
+      <p:sp>
+        <p:nvSpPr>
+          <p:cNvPr id="23" name="Text 21"/>
+          <p:cNvSpPr/>
+          <p:nvPr/>
+        </p:nvSpPr>
+        <p:spPr>
+          <a:xfrm>
+            <a:off x="548640" y="4892040"/>
+            <a:ext cx="11109960" cy="548640"/>
+          </a:xfrm>
+          <a:prstGeom prst="rect">
+            <a:avLst/>
+          </a:prstGeom>
+          <a:noFill/>
+          <a:ln/>
+        </p:spPr>
+        <p:txBody>
+          <a:bodyPr wrap="square" lIns="0" tIns="0" rIns="0" bIns="0" rtlCol="0" anchor="t"/>
+          <a:lstStyle/>
+          <a:p>
+            <a:pPr indent="0" marL="0">
+              <a:buNone/>
+            </a:pPr>
+            <a:r>
+              <a:rPr lang="en-US" sz="1050" i="1" dirty="0">
+                <a:solidFill>
+                  <a:srgbClr val="5B6B6B"/>
+                </a:solidFill>
+                <a:latin typeface="Calibri" pitchFamily="34" charset="0"/>
+                <a:ea typeface="Calibri" pitchFamily="34" charset="-122"/>
+                <a:cs typeface="Calibri" pitchFamily="34" charset="-120"/>
+              </a:rPr>
+              <a:t>Full detail, including every failure hit and its exact fix, kept in the project's as-run log.</a:t>
+            </a:r>
+            <a:endParaRPr lang="en-US" sz="1050" dirty="0"/>
+          </a:p>
+        </p:txBody>
+      </p:sp>
+    </p:spTree>
+  </p:cSld>
+  <p:clrMapOvr>
+    <a:masterClrMapping/>
+  </p:clrMapOvr>
+</p:sld>
+</file>
+
+<file path=ppt/slides/slide22.xml><?xml version="1.0" encoding="utf-8"?>
+<p:sld xmlns:a="http://schemas.openxmlformats.org/drawingml/2006/main" xmlns:r="http://schemas.openxmlformats.org/officeDocument/2006/relationships" xmlns:p="http://schemas.openxmlformats.org/presentationml/2006/main">
+  <p:cSld name="Slide 22">
+    <p:bg>
+      <p:bgPr>
+        <a:solidFill>
+          <a:srgbClr val="F4F4F3"/>
+        </a:solidFill>
+      </p:bgPr>
+    </p:bg>
+    <p:spTree>
+      <p:nvGrpSpPr>
+        <p:cNvPr id="1" name=""/>
+        <p:cNvGrpSpPr/>
+        <p:nvPr/>
+      </p:nvGrpSpPr>
+      <p:grpSpPr>
+        <a:xfrm>
+          <a:off x="0" y="0"/>
+          <a:ext cx="0" cy="0"/>
+          <a:chOff x="0" y="0"/>
+          <a:chExt cx="0" cy="0"/>
+        </a:xfrm>
+      </p:grpSpPr>
+      <p:sp>
+        <p:nvSpPr>
+          <p:cNvPr id="2" name="Text 0"/>
+          <p:cNvSpPr/>
+          <p:nvPr/>
+        </p:nvSpPr>
+        <p:spPr>
+          <a:xfrm>
+            <a:off x="548640" y="274320"/>
+            <a:ext cx="10515600" cy="502920"/>
+          </a:xfrm>
+          <a:prstGeom prst="rect">
+            <a:avLst/>
+          </a:prstGeom>
+          <a:noFill/>
+          <a:ln/>
+        </p:spPr>
+        <p:txBody>
+          <a:bodyPr wrap="square" lIns="0" tIns="0" rIns="0" bIns="0" rtlCol="0" anchor="ctr"/>
+          <a:lstStyle/>
+          <a:p>
+            <a:pPr algn="l" indent="0" marL="0">
+              <a:buNone/>
+            </a:pPr>
+            <a:r>
+              <a:rPr lang="en-US" sz="2800" dirty="0">
+                <a:solidFill>
+                  <a:srgbClr val="0F5C56"/>
+                </a:solidFill>
+                <a:latin typeface="Cambria" pitchFamily="34" charset="0"/>
+                <a:ea typeface="Cambria" pitchFamily="34" charset="-122"/>
+                <a:cs typeface="Cambria" pitchFamily="34" charset="-120"/>
+              </a:rPr>
+              <a:t>Runbook B — Physical Replica</a:t>
+            </a:r>
+            <a:endParaRPr lang="en-US" sz="2800" dirty="0"/>
+          </a:p>
+        </p:txBody>
+      </p:sp>
+      <p:sp>
+        <p:nvSpPr>
+          <p:cNvPr id="3" name="Text 1"/>
+          <p:cNvSpPr/>
+          <p:nvPr/>
+        </p:nvSpPr>
+        <p:spPr>
+          <a:xfrm>
+            <a:off x="566928" y="749808"/>
+            <a:ext cx="10515600" cy="365760"/>
+          </a:xfrm>
+          <a:prstGeom prst="rect">
+            <a:avLst/>
+          </a:prstGeom>
+          <a:noFill/>
+          <a:ln/>
+        </p:spPr>
+        <p:txBody>
+          <a:bodyPr wrap="square" lIns="0" tIns="0" rIns="0" bIns="0" rtlCol="0" anchor="ctr"/>
+          <a:lstStyle/>
+          <a:p>
+            <a:pPr algn="l" indent="0" marL="0">
+              <a:buNone/>
+            </a:pPr>
+            <a:r>
+              <a:rPr lang="en-US" sz="1400" i="1" dirty="0">
+                <a:solidFill>
+                  <a:srgbClr val="1A2E2E"/>
+                </a:solidFill>
+                <a:latin typeface="Calibri" pitchFamily="34" charset="0"/>
+                <a:ea typeface="Calibri" pitchFamily="34" charset="-122"/>
+                <a:cs typeface="Calibri" pitchFamily="34" charset="-120"/>
+              </a:rPr>
+              <a:t>Byte-copy to the target cloud, registered in a second catalog</a:t>
+            </a:r>
+            <a:endParaRPr lang="en-US" sz="1400" dirty="0"/>
+          </a:p>
+        </p:txBody>
+      </p:sp>
+      <p:sp>
+        <p:nvSpPr>
+          <p:cNvPr id="4" name="Text 2"/>
+          <p:cNvSpPr/>
+          <p:nvPr/>
+        </p:nvSpPr>
+        <p:spPr>
+          <a:xfrm>
+            <a:off x="0" y="6583680"/>
+            <a:ext cx="12188952" cy="274320"/>
+          </a:xfrm>
+          <a:prstGeom prst="rect">
+            <a:avLst/>
+          </a:prstGeom>
+          <a:noFill/>
+          <a:ln/>
+        </p:spPr>
+        <p:txBody>
+          <a:bodyPr wrap="square" lIns="0" tIns="0" rIns="0" bIns="0" rtlCol="0" anchor="ctr"/>
+          <a:lstStyle/>
+          <a:p>
+            <a:pPr algn="ctr" indent="0" marL="0">
+              <a:buNone/>
+            </a:pPr>
+            <a:r>
+              <a:rPr lang="en-US" sz="900" dirty="0">
+                <a:solidFill>
+                  <a:srgbClr val="5B6B6B"/>
+                </a:solidFill>
+                <a:latin typeface="Calibri" pitchFamily="34" charset="0"/>
+                <a:ea typeface="Calibri" pitchFamily="34" charset="-122"/>
+                <a:cs typeface="Calibri" pitchFamily="34" charset="-120"/>
+              </a:rPr>
+              <a:t>Internal Use</a:t>
+            </a:r>
+            <a:endParaRPr lang="en-US" sz="900" dirty="0"/>
+          </a:p>
+        </p:txBody>
+      </p:sp>
+      <p:sp>
+        <p:nvSpPr>
+          <p:cNvPr id="5" name="Shape 3"/>
+          <p:cNvSpPr/>
+          <p:nvPr/>
+        </p:nvSpPr>
+        <p:spPr>
+          <a:xfrm>
+            <a:off x="594360" y="1271016"/>
+            <a:ext cx="384048" cy="384048"/>
+          </a:xfrm>
+          <a:prstGeom prst="ellipse">
+            <a:avLst/>
+          </a:prstGeom>
+          <a:solidFill>
+            <a:srgbClr val="0F5C56"/>
+          </a:solidFill>
+          <a:ln w="12700">
+            <a:solidFill>
+              <a:srgbClr val="0F5C56"/>
+            </a:solidFill>
+            <a:prstDash val="solid"/>
+          </a:ln>
+        </p:spPr>
+      </p:sp>
+      <p:sp>
+        <p:nvSpPr>
+          <p:cNvPr id="6" name="Text 4"/>
+          <p:cNvSpPr/>
+          <p:nvPr/>
+        </p:nvSpPr>
+        <p:spPr>
+          <a:xfrm>
+            <a:off x="594360" y="1271016"/>
+            <a:ext cx="384048" cy="384048"/>
+          </a:xfrm>
+          <a:prstGeom prst="rect">
+            <a:avLst/>
+          </a:prstGeom>
+          <a:noFill/>
+          <a:ln/>
+        </p:spPr>
+        <p:txBody>
+          <a:bodyPr wrap="square" lIns="0" tIns="0" rIns="0" bIns="0" rtlCol="0" anchor="ctr"/>
+          <a:lstStyle/>
+          <a:p>
+            <a:pPr algn="ctr" indent="0" marL="0">
+              <a:buNone/>
+            </a:pPr>
+            <a:r>
+              <a:rPr lang="en-US" sz="1300" b="1" dirty="0">
+                <a:solidFill>
+                  <a:srgbClr val="FFFFFF"/>
+                </a:solidFill>
+                <a:latin typeface="Cambria" pitchFamily="34" charset="0"/>
+                <a:ea typeface="Cambria" pitchFamily="34" charset="-122"/>
+                <a:cs typeface="Cambria" pitchFamily="34" charset="-120"/>
+              </a:rPr>
+              <a:t>1</a:t>
+            </a:r>
+            <a:endParaRPr lang="en-US" sz="1300" dirty="0"/>
+          </a:p>
+        </p:txBody>
+      </p:sp>
+      <p:sp>
+        <p:nvSpPr>
+          <p:cNvPr id="7" name="Text 5"/>
+          <p:cNvSpPr/>
+          <p:nvPr/>
+        </p:nvSpPr>
+        <p:spPr>
+          <a:xfrm>
+            <a:off x="1143000" y="1216152"/>
+            <a:ext cx="6126480" cy="658368"/>
+          </a:xfrm>
+          <a:prstGeom prst="rect">
+            <a:avLst/>
+          </a:prstGeom>
+          <a:noFill/>
+          <a:ln/>
+        </p:spPr>
+        <p:txBody>
+          <a:bodyPr wrap="square" lIns="0" tIns="0" rIns="0" bIns="0" rtlCol="0" anchor="t"/>
+          <a:lstStyle/>
+          <a:p>
+            <a:pPr indent="0" marL="0">
+              <a:buNone/>
+            </a:pPr>
+            <a:r>
+              <a:rPr lang="en-US" sz="1100" b="1" dirty="0">
+                <a:solidFill>
+                  <a:srgbClr val="0B3D3D"/>
+                </a:solidFill>
+                <a:latin typeface="Calibri" pitchFamily="34" charset="0"/>
+                <a:ea typeface="Calibri" pitchFamily="34" charset="-122"/>
+                <a:cs typeface="Calibri" pitchFamily="34" charset="-120"/>
+              </a:rPr>
+              <a:t>Target bucket + role   </a:t>
+            </a:r>
+            <a:pPr indent="0" marL="0">
+              <a:buNone/>
+            </a:pPr>
+            <a:r>
+              <a:rPr lang="en-US" sz="1100" dirty="0">
+                <a:solidFill>
+                  <a:srgbClr val="1A2E2E"/>
+                </a:solidFill>
+                <a:latin typeface="Calibri" pitchFamily="34" charset="0"/>
+                <a:ea typeface="Calibri" pitchFamily="34" charset="-122"/>
+                <a:cs typeface="Calibri" pitchFamily="34" charset="-120"/>
+              </a:rPr>
+              <a:t>Create a storage bucket in the target cloud, same region as the consumer engine's account (keeps replica reads intra-region, i.e. free); create a read-only role scoped to that bucket.</a:t>
+            </a:r>
+            <a:endParaRPr lang="en-US" sz="1100" dirty="0"/>
+          </a:p>
+        </p:txBody>
+      </p:sp>
+      <p:sp>
+        <p:nvSpPr>
+          <p:cNvPr id="8" name="Shape 6"/>
+          <p:cNvSpPr/>
+          <p:nvPr/>
+        </p:nvSpPr>
+        <p:spPr>
+          <a:xfrm>
+            <a:off x="594360" y="1965960"/>
+            <a:ext cx="384048" cy="384048"/>
+          </a:xfrm>
+          <a:prstGeom prst="ellipse">
+            <a:avLst/>
+          </a:prstGeom>
+          <a:solidFill>
+            <a:srgbClr val="0F5C56"/>
+          </a:solidFill>
+          <a:ln w="12700">
+            <a:solidFill>
+              <a:srgbClr val="0F5C56"/>
+            </a:solidFill>
+            <a:prstDash val="solid"/>
+          </a:ln>
+        </p:spPr>
+      </p:sp>
+      <p:sp>
+        <p:nvSpPr>
+          <p:cNvPr id="9" name="Text 7"/>
+          <p:cNvSpPr/>
+          <p:nvPr/>
+        </p:nvSpPr>
+        <p:spPr>
+          <a:xfrm>
+            <a:off x="594360" y="1965960"/>
+            <a:ext cx="384048" cy="384048"/>
+          </a:xfrm>
+          <a:prstGeom prst="rect">
+            <a:avLst/>
+          </a:prstGeom>
+          <a:noFill/>
+          <a:ln/>
+        </p:spPr>
+        <p:txBody>
+          <a:bodyPr wrap="square" lIns="0" tIns="0" rIns="0" bIns="0" rtlCol="0" anchor="ctr"/>
+          <a:lstStyle/>
+          <a:p>
+            <a:pPr algn="ctr" indent="0" marL="0">
+              <a:buNone/>
+            </a:pPr>
+            <a:r>
+              <a:rPr lang="en-US" sz="1300" b="1" dirty="0">
+                <a:solidFill>
+                  <a:srgbClr val="FFFFFF"/>
+                </a:solidFill>
+                <a:latin typeface="Cambria" pitchFamily="34" charset="0"/>
+                <a:ea typeface="Cambria" pitchFamily="34" charset="-122"/>
+                <a:cs typeface="Cambria" pitchFamily="34" charset="-120"/>
+              </a:rPr>
+              <a:t>2</a:t>
+            </a:r>
+            <a:endParaRPr lang="en-US" sz="1300" dirty="0"/>
+          </a:p>
+        </p:txBody>
+      </p:sp>
+      <p:sp>
+        <p:nvSpPr>
+          <p:cNvPr id="10" name="Text 8"/>
+          <p:cNvSpPr/>
+          <p:nvPr/>
+        </p:nvSpPr>
+        <p:spPr>
+          <a:xfrm>
+            <a:off x="1143000" y="1911096"/>
+            <a:ext cx="6126480" cy="658368"/>
+          </a:xfrm>
+          <a:prstGeom prst="rect">
+            <a:avLst/>
+          </a:prstGeom>
+          <a:noFill/>
+          <a:ln/>
+        </p:spPr>
+        <p:txBody>
+          <a:bodyPr wrap="square" lIns="0" tIns="0" rIns="0" bIns="0" rtlCol="0" anchor="t"/>
+          <a:lstStyle/>
+          <a:p>
+            <a:pPr indent="0" marL="0">
+              <a:buNone/>
+            </a:pPr>
+            <a:r>
+              <a:rPr lang="en-US" sz="1100" b="1" dirty="0">
+                <a:solidFill>
+                  <a:srgbClr val="0B3D3D"/>
+                </a:solidFill>
+                <a:latin typeface="Calibri" pitchFamily="34" charset="0"/>
+                <a:ea typeface="Calibri" pitchFamily="34" charset="-122"/>
+                <a:cs typeface="Calibri" pitchFamily="34" charset="-120"/>
+              </a:rPr>
+              <a:t>Consumer-side external volume   </a:t>
+            </a:r>
+            <a:pPr indent="0" marL="0">
+              <a:buNone/>
+            </a:pPr>
+            <a:r>
+              <a:rPr lang="en-US" sz="1100" dirty="0">
+                <a:solidFill>
+                  <a:srgbClr val="1A2E2E"/>
+                </a:solidFill>
+                <a:latin typeface="Calibri" pitchFamily="34" charset="0"/>
+                <a:ea typeface="Calibri" pitchFamily="34" charset="-122"/>
+                <a:cs typeface="Calibri" pitchFamily="34" charset="-120"/>
+              </a:rPr>
+              <a:t>Point the consumer engine at the target bucket via an external-volume construct; it generates its own identity and a shared secret for the trust handshake.</a:t>
+            </a:r>
+            <a:endParaRPr lang="en-US" sz="1100" dirty="0"/>
+          </a:p>
+        </p:txBody>
+      </p:sp>
+      <p:sp>
+        <p:nvSpPr>
+          <p:cNvPr id="11" name="Shape 9"/>
+          <p:cNvSpPr/>
+          <p:nvPr/>
+        </p:nvSpPr>
+        <p:spPr>
+          <a:xfrm>
+            <a:off x="594360" y="2660904"/>
+            <a:ext cx="384048" cy="384048"/>
+          </a:xfrm>
+          <a:prstGeom prst="ellipse">
+            <a:avLst/>
+          </a:prstGeom>
+          <a:solidFill>
+            <a:srgbClr val="0F5C56"/>
+          </a:solidFill>
+          <a:ln w="12700">
+            <a:solidFill>
+              <a:srgbClr val="0F5C56"/>
+            </a:solidFill>
+            <a:prstDash val="solid"/>
+          </a:ln>
+        </p:spPr>
+      </p:sp>
+      <p:sp>
+        <p:nvSpPr>
+          <p:cNvPr id="12" name="Text 10"/>
+          <p:cNvSpPr/>
+          <p:nvPr/>
+        </p:nvSpPr>
+        <p:spPr>
+          <a:xfrm>
+            <a:off x="594360" y="2660904"/>
+            <a:ext cx="384048" cy="384048"/>
+          </a:xfrm>
+          <a:prstGeom prst="rect">
+            <a:avLst/>
+          </a:prstGeom>
+          <a:noFill/>
+          <a:ln/>
+        </p:spPr>
+        <p:txBody>
+          <a:bodyPr wrap="square" lIns="0" tIns="0" rIns="0" bIns="0" rtlCol="0" anchor="ctr"/>
+          <a:lstStyle/>
+          <a:p>
+            <a:pPr algn="ctr" indent="0" marL="0">
+              <a:buNone/>
+            </a:pPr>
+            <a:r>
+              <a:rPr lang="en-US" sz="1300" b="1" dirty="0">
+                <a:solidFill>
+                  <a:srgbClr val="FFFFFF"/>
+                </a:solidFill>
+                <a:latin typeface="Cambria" pitchFamily="34" charset="0"/>
+                <a:ea typeface="Cambria" pitchFamily="34" charset="-122"/>
+                <a:cs typeface="Cambria" pitchFamily="34" charset="-120"/>
+              </a:rPr>
+              <a:t>3</a:t>
+            </a:r>
+            <a:endParaRPr lang="en-US" sz="1300" dirty="0"/>
+          </a:p>
+        </p:txBody>
+      </p:sp>
+      <p:sp>
+        <p:nvSpPr>
+          <p:cNvPr id="13" name="Text 11"/>
+          <p:cNvSpPr/>
+          <p:nvPr/>
+        </p:nvSpPr>
+        <p:spPr>
+          <a:xfrm>
+            <a:off x="1143000" y="2606040"/>
+            <a:ext cx="6126480" cy="658368"/>
+          </a:xfrm>
+          <a:prstGeom prst="rect">
+            <a:avLst/>
+          </a:prstGeom>
+          <a:noFill/>
+          <a:ln/>
+        </p:spPr>
+        <p:txBody>
+          <a:bodyPr wrap="square" lIns="0" tIns="0" rIns="0" bIns="0" rtlCol="0" anchor="t"/>
+          <a:lstStyle/>
+          <a:p>
+            <a:pPr indent="0" marL="0">
+              <a:buNone/>
+            </a:pPr>
+            <a:r>
+              <a:rPr lang="en-US" sz="1100" b="1" dirty="0">
+                <a:solidFill>
+                  <a:srgbClr val="0B3D3D"/>
+                </a:solidFill>
+                <a:latin typeface="Calibri" pitchFamily="34" charset="0"/>
+                <a:ea typeface="Calibri" pitchFamily="34" charset="-122"/>
+                <a:cs typeface="Calibri" pitchFamily="34" charset="-120"/>
+              </a:rPr>
+              <a:t>Trust handshake   </a:t>
+            </a:r>
+            <a:pPr indent="0" marL="0">
+              <a:buNone/>
+            </a:pPr>
+            <a:r>
+              <a:rPr lang="en-US" sz="1100" dirty="0">
+                <a:solidFill>
+                  <a:srgbClr val="1A2E2E"/>
+                </a:solidFill>
+                <a:latin typeface="Calibri" pitchFamily="34" charset="0"/>
+                <a:ea typeface="Calibri" pitchFamily="34" charset="-122"/>
+                <a:cs typeface="Calibri" pitchFamily="34" charset="-120"/>
+              </a:rPr>
+              <a:t>Update the target-cloud role's trust policy to allow exactly that consumer identity, with that shared secret, to assume it.</a:t>
+            </a:r>
+            <a:endParaRPr lang="en-US" sz="1100" dirty="0"/>
+          </a:p>
+        </p:txBody>
+      </p:sp>
+      <p:sp>
+        <p:nvSpPr>
+          <p:cNvPr id="14" name="Shape 12"/>
+          <p:cNvSpPr/>
+          <p:nvPr/>
+        </p:nvSpPr>
+        <p:spPr>
+          <a:xfrm>
+            <a:off x="594360" y="3355848"/>
+            <a:ext cx="384048" cy="384048"/>
+          </a:xfrm>
+          <a:prstGeom prst="ellipse">
+            <a:avLst/>
+          </a:prstGeom>
+          <a:solidFill>
+            <a:srgbClr val="0F5C56"/>
+          </a:solidFill>
+          <a:ln w="12700">
+            <a:solidFill>
+              <a:srgbClr val="0F5C56"/>
+            </a:solidFill>
+            <a:prstDash val="solid"/>
+          </a:ln>
+        </p:spPr>
+      </p:sp>
+      <p:sp>
+        <p:nvSpPr>
+          <p:cNvPr id="15" name="Text 13"/>
+          <p:cNvSpPr/>
+          <p:nvPr/>
+        </p:nvSpPr>
+        <p:spPr>
+          <a:xfrm>
+            <a:off x="594360" y="3355848"/>
+            <a:ext cx="384048" cy="384048"/>
+          </a:xfrm>
+          <a:prstGeom prst="rect">
+            <a:avLst/>
+          </a:prstGeom>
+          <a:noFill/>
+          <a:ln/>
+        </p:spPr>
+        <p:txBody>
+          <a:bodyPr wrap="square" lIns="0" tIns="0" rIns="0" bIns="0" rtlCol="0" anchor="ctr"/>
+          <a:lstStyle/>
+          <a:p>
+            <a:pPr algn="ctr" indent="0" marL="0">
+              <a:buNone/>
+            </a:pPr>
+            <a:r>
+              <a:rPr lang="en-US" sz="1300" b="1" dirty="0">
+                <a:solidFill>
+                  <a:srgbClr val="FFFFFF"/>
+                </a:solidFill>
+                <a:latin typeface="Cambria" pitchFamily="34" charset="0"/>
+                <a:ea typeface="Cambria" pitchFamily="34" charset="-122"/>
+                <a:cs typeface="Cambria" pitchFamily="34" charset="-120"/>
+              </a:rPr>
+              <a:t>4</a:t>
+            </a:r>
+            <a:endParaRPr lang="en-US" sz="1300" dirty="0"/>
+          </a:p>
+        </p:txBody>
+      </p:sp>
+      <p:sp>
+        <p:nvSpPr>
+          <p:cNvPr id="16" name="Text 14"/>
+          <p:cNvSpPr/>
+          <p:nvPr/>
+        </p:nvSpPr>
+        <p:spPr>
+          <a:xfrm>
+            <a:off x="1143000" y="3300984"/>
+            <a:ext cx="6126480" cy="658368"/>
+          </a:xfrm>
+          <a:prstGeom prst="rect">
+            <a:avLst/>
+          </a:prstGeom>
+          <a:noFill/>
+          <a:ln/>
+        </p:spPr>
+        <p:txBody>
+          <a:bodyPr wrap="square" lIns="0" tIns="0" rIns="0" bIns="0" rtlCol="0" anchor="t"/>
+          <a:lstStyle/>
+          <a:p>
+            <a:pPr indent="0" marL="0">
+              <a:buNone/>
+            </a:pPr>
+            <a:r>
+              <a:rPr lang="en-US" sz="1100" b="1" dirty="0">
+                <a:solidFill>
+                  <a:srgbClr val="0B3D3D"/>
+                </a:solidFill>
+                <a:latin typeface="Calibri" pitchFamily="34" charset="0"/>
+                <a:ea typeface="Calibri" pitchFamily="34" charset="-122"/>
+                <a:cs typeface="Calibri" pitchFamily="34" charset="-120"/>
+              </a:rPr>
+              <a:t>Rewrite + copy   </a:t>
+            </a:r>
+            <a:pPr indent="0" marL="0">
+              <a:buNone/>
+            </a:pPr>
+            <a:r>
+              <a:rPr lang="en-US" sz="1100" dirty="0">
+                <a:solidFill>
+                  <a:srgbClr val="1A2E2E"/>
+                </a:solidFill>
+                <a:latin typeface="Calibri" pitchFamily="34" charset="0"/>
+                <a:ea typeface="Calibri" pitchFamily="34" charset="-122"/>
+                <a:cs typeface="Calibri" pitchFamily="34" charset="-120"/>
+              </a:rPr>
+              <a:t>Run the source catalog's path-rewrite procedure (rewrites absolute paths in table metadata to the new location) then copy the resulting files to the target bucket.</a:t>
+            </a:r>
+            <a:endParaRPr lang="en-US" sz="1100" dirty="0"/>
+          </a:p>
+        </p:txBody>
+      </p:sp>
+      <p:sp>
+        <p:nvSpPr>
+          <p:cNvPr id="17" name="Shape 15"/>
+          <p:cNvSpPr/>
+          <p:nvPr/>
+        </p:nvSpPr>
+        <p:spPr>
+          <a:xfrm>
+            <a:off x="594360" y="4050792"/>
+            <a:ext cx="384048" cy="384048"/>
+          </a:xfrm>
+          <a:prstGeom prst="ellipse">
+            <a:avLst/>
+          </a:prstGeom>
+          <a:solidFill>
+            <a:srgbClr val="0F5C56"/>
+          </a:solidFill>
+          <a:ln w="12700">
+            <a:solidFill>
+              <a:srgbClr val="0F5C56"/>
+            </a:solidFill>
+            <a:prstDash val="solid"/>
+          </a:ln>
+        </p:spPr>
+      </p:sp>
+      <p:sp>
+        <p:nvSpPr>
+          <p:cNvPr id="18" name="Text 16"/>
+          <p:cNvSpPr/>
+          <p:nvPr/>
+        </p:nvSpPr>
+        <p:spPr>
+          <a:xfrm>
+            <a:off x="594360" y="4050792"/>
+            <a:ext cx="384048" cy="384048"/>
+          </a:xfrm>
+          <a:prstGeom prst="rect">
+            <a:avLst/>
+          </a:prstGeom>
+          <a:noFill/>
+          <a:ln/>
+        </p:spPr>
+        <p:txBody>
+          <a:bodyPr wrap="square" lIns="0" tIns="0" rIns="0" bIns="0" rtlCol="0" anchor="ctr"/>
+          <a:lstStyle/>
+          <a:p>
+            <a:pPr algn="ctr" indent="0" marL="0">
+              <a:buNone/>
+            </a:pPr>
+            <a:r>
+              <a:rPr lang="en-US" sz="1300" b="1" dirty="0">
+                <a:solidFill>
+                  <a:srgbClr val="FFFFFF"/>
+                </a:solidFill>
+                <a:latin typeface="Cambria" pitchFamily="34" charset="0"/>
+                <a:ea typeface="Cambria" pitchFamily="34" charset="-122"/>
+                <a:cs typeface="Cambria" pitchFamily="34" charset="-120"/>
+              </a:rPr>
+              <a:t>5</a:t>
+            </a:r>
+            <a:endParaRPr lang="en-US" sz="1300" dirty="0"/>
+          </a:p>
+        </p:txBody>
+      </p:sp>
+      <p:sp>
+        <p:nvSpPr>
+          <p:cNvPr id="19" name="Text 17"/>
+          <p:cNvSpPr/>
+          <p:nvPr/>
+        </p:nvSpPr>
+        <p:spPr>
+          <a:xfrm>
+            <a:off x="1143000" y="3995928"/>
+            <a:ext cx="6126480" cy="658368"/>
+          </a:xfrm>
+          <a:prstGeom prst="rect">
+            <a:avLst/>
+          </a:prstGeom>
+          <a:noFill/>
+          <a:ln/>
+        </p:spPr>
+        <p:txBody>
+          <a:bodyPr wrap="square" lIns="0" tIns="0" rIns="0" bIns="0" rtlCol="0" anchor="t"/>
+          <a:lstStyle/>
+          <a:p>
+            <a:pPr indent="0" marL="0">
+              <a:buNone/>
+            </a:pPr>
+            <a:r>
+              <a:rPr lang="en-US" sz="1100" b="1" dirty="0">
+                <a:solidFill>
+                  <a:srgbClr val="0B3D3D"/>
+                </a:solidFill>
+                <a:latin typeface="Calibri" pitchFamily="34" charset="0"/>
+                <a:ea typeface="Calibri" pitchFamily="34" charset="-122"/>
+                <a:cs typeface="Calibri" pitchFamily="34" charset="-120"/>
+              </a:rPr>
+              <a:t>Register + verify   </a:t>
+            </a:r>
+            <a:pPr indent="0" marL="0">
+              <a:buNone/>
+            </a:pPr>
+            <a:r>
+              <a:rPr lang="en-US" sz="1100" dirty="0">
+                <a:solidFill>
+                  <a:srgbClr val="1A2E2E"/>
+                </a:solidFill>
+                <a:latin typeface="Calibri" pitchFamily="34" charset="0"/>
+                <a:ea typeface="Calibri" pitchFamily="34" charset="-122"/>
+                <a:cs typeface="Calibri" pitchFamily="34" charset="-120"/>
+              </a:rPr>
+              <a:t>Register the replica under an object-store catalog integration using the rewritten metadata path; compare row counts against the zero-copy source.</a:t>
+            </a:r>
+            <a:endParaRPr lang="en-US" sz="1100" dirty="0"/>
+          </a:p>
+        </p:txBody>
+      </p:sp>
+      <p:sp>
+        <p:nvSpPr>
+          <p:cNvPr id="20" name="Shape 18"/>
+          <p:cNvSpPr/>
+          <p:nvPr/>
+        </p:nvSpPr>
+        <p:spPr>
+          <a:xfrm>
+            <a:off x="594360" y="4745736"/>
+            <a:ext cx="384048" cy="384048"/>
+          </a:xfrm>
+          <a:prstGeom prst="ellipse">
+            <a:avLst/>
+          </a:prstGeom>
+          <a:solidFill>
+            <a:srgbClr val="0F5C56"/>
+          </a:solidFill>
+          <a:ln w="12700">
+            <a:solidFill>
+              <a:srgbClr val="0F5C56"/>
+            </a:solidFill>
+            <a:prstDash val="solid"/>
+          </a:ln>
+        </p:spPr>
+      </p:sp>
+      <p:sp>
+        <p:nvSpPr>
+          <p:cNvPr id="21" name="Text 19"/>
+          <p:cNvSpPr/>
+          <p:nvPr/>
+        </p:nvSpPr>
+        <p:spPr>
+          <a:xfrm>
+            <a:off x="594360" y="4745736"/>
+            <a:ext cx="384048" cy="384048"/>
+          </a:xfrm>
+          <a:prstGeom prst="rect">
+            <a:avLst/>
+          </a:prstGeom>
+          <a:noFill/>
+          <a:ln/>
+        </p:spPr>
+        <p:txBody>
+          <a:bodyPr wrap="square" lIns="0" tIns="0" rIns="0" bIns="0" rtlCol="0" anchor="ctr"/>
+          <a:lstStyle/>
+          <a:p>
+            <a:pPr algn="ctr" indent="0" marL="0">
+              <a:buNone/>
+            </a:pPr>
+            <a:r>
+              <a:rPr lang="en-US" sz="1300" b="1" dirty="0">
+                <a:solidFill>
+                  <a:srgbClr val="FFFFFF"/>
+                </a:solidFill>
+                <a:latin typeface="Cambria" pitchFamily="34" charset="0"/>
+                <a:ea typeface="Cambria" pitchFamily="34" charset="-122"/>
+                <a:cs typeface="Cambria" pitchFamily="34" charset="-120"/>
+              </a:rPr>
+              <a:t>6</a:t>
+            </a:r>
+            <a:endParaRPr lang="en-US" sz="1300" dirty="0"/>
+          </a:p>
+        </p:txBody>
+      </p:sp>
+      <p:sp>
+        <p:nvSpPr>
+          <p:cNvPr id="22" name="Text 20"/>
+          <p:cNvSpPr/>
+          <p:nvPr/>
+        </p:nvSpPr>
+        <p:spPr>
+          <a:xfrm>
+            <a:off x="1143000" y="4690872"/>
+            <a:ext cx="6126480" cy="658368"/>
+          </a:xfrm>
+          <a:prstGeom prst="rect">
+            <a:avLst/>
+          </a:prstGeom>
+          <a:noFill/>
+          <a:ln/>
+        </p:spPr>
+        <p:txBody>
+          <a:bodyPr wrap="square" lIns="0" tIns="0" rIns="0" bIns="0" rtlCol="0" anchor="t"/>
+          <a:lstStyle/>
+          <a:p>
+            <a:pPr indent="0" marL="0">
+              <a:buNone/>
+            </a:pPr>
+            <a:r>
+              <a:rPr lang="en-US" sz="1100" b="1" dirty="0">
+                <a:solidFill>
+                  <a:srgbClr val="0B3D3D"/>
+                </a:solidFill>
+                <a:latin typeface="Calibri" pitchFamily="34" charset="0"/>
+                <a:ea typeface="Calibri" pitchFamily="34" charset="-122"/>
+                <a:cs typeface="Calibri" pitchFamily="34" charset="-120"/>
+              </a:rPr>
+              <a:t>Refresh   </a:t>
+            </a:r>
+            <a:pPr indent="0" marL="0">
+              <a:buNone/>
+            </a:pPr>
+            <a:r>
+              <a:rPr lang="en-US" sz="1100" dirty="0">
+                <a:solidFill>
+                  <a:srgbClr val="1A2E2E"/>
+                </a:solidFill>
+                <a:latin typeface="Calibri" pitchFamily="34" charset="0"/>
+                <a:ea typeface="Calibri" pitchFamily="34" charset="-122"/>
+                <a:cs typeface="Calibri" pitchFamily="34" charset="-120"/>
+              </a:rPr>
+              <a:t>Repeat steps 4–5 on a schedule; each refresh needs the newly rewritten metadata path pointed at explicitly.</a:t>
+            </a:r>
+            <a:endParaRPr lang="en-US" sz="1100" dirty="0"/>
+          </a:p>
+        </p:txBody>
+      </p:sp>
+      <p:sp>
+        <p:nvSpPr>
+          <p:cNvPr id="23" name="Shape 21"/>
+          <p:cNvSpPr/>
+          <p:nvPr/>
+        </p:nvSpPr>
+        <p:spPr>
+          <a:xfrm>
+            <a:off x="7452360" y="1234440"/>
+            <a:ext cx="4206240" cy="4261104"/>
+          </a:xfrm>
+          <a:prstGeom prst="roundRect">
+            <a:avLst>
+              <a:gd name="adj" fmla="val 1087"/>
+            </a:avLst>
+          </a:prstGeom>
+          <a:solidFill>
+            <a:srgbClr val="F4F4F3"/>
+          </a:solidFill>
+          <a:ln w="15875">
+            <a:solidFill>
+              <a:srgbClr val="D8D8D6"/>
+            </a:solidFill>
+            <a:prstDash val="solid"/>
+          </a:ln>
+        </p:spPr>
+      </p:sp>
+      <p:sp>
+        <p:nvSpPr>
+          <p:cNvPr id="24" name="Text 22"/>
+          <p:cNvSpPr/>
+          <p:nvPr/>
+        </p:nvSpPr>
+        <p:spPr>
+          <a:xfrm>
+            <a:off x="7680960" y="1371600"/>
+            <a:ext cx="3749040" cy="274320"/>
+          </a:xfrm>
+          <a:prstGeom prst="rect">
+            <a:avLst/>
+          </a:prstGeom>
+          <a:noFill/>
+          <a:ln/>
+        </p:spPr>
+        <p:txBody>
+          <a:bodyPr wrap="square" lIns="0" tIns="0" rIns="0" bIns="0" rtlCol="0" anchor="ctr"/>
+          <a:lstStyle/>
+          <a:p>
+            <a:pPr indent="0" marL="0">
+              <a:buNone/>
+            </a:pPr>
+            <a:r>
+              <a:rPr lang="en-US" sz="1250" b="1" dirty="0">
+                <a:solidFill>
+                  <a:srgbClr val="C1502E"/>
+                </a:solidFill>
+                <a:latin typeface="Calibri" pitchFamily="34" charset="0"/>
+                <a:ea typeface="Calibri" pitchFamily="34" charset="-122"/>
+                <a:cs typeface="Calibri" pitchFamily="34" charset="-120"/>
+              </a:rPr>
+              <a:t>Sharp edges</a:t>
+            </a:r>
+            <a:endParaRPr lang="en-US" sz="1250" dirty="0"/>
+          </a:p>
+        </p:txBody>
+      </p:sp>
+      <p:sp>
+        <p:nvSpPr>
+          <p:cNvPr id="25" name="Text 23"/>
+          <p:cNvSpPr/>
+          <p:nvPr/>
+        </p:nvSpPr>
+        <p:spPr>
+          <a:xfrm>
+            <a:off x="7680960" y="1719072"/>
+            <a:ext cx="3749040" cy="3666744"/>
+          </a:xfrm>
+          <a:prstGeom prst="rect">
+            <a:avLst/>
+          </a:prstGeom>
+          <a:noFill/>
+          <a:ln/>
+        </p:spPr>
+        <p:txBody>
+          <a:bodyPr wrap="square" lIns="0" tIns="0" rIns="0" bIns="0" rtlCol="0" anchor="t"/>
+          <a:lstStyle/>
+          <a:p>
+            <a:pPr marL="342900" indent="-342900">
+              <a:spcAft>
+                <a:spcPts val="600"/>
+              </a:spcAft>
+              <a:buSzPct val="100000"/>
+              <a:buChar char="•"/>
+            </a:pPr>
+            <a:r>
+              <a:rPr lang="en-US" sz="950" dirty="0">
+                <a:solidFill>
+                  <a:srgbClr val="1A2E2E"/>
+                </a:solidFill>
+                <a:latin typeface="Calibri" pitchFamily="34" charset="0"/>
+                <a:ea typeface="Calibri" pitchFamily="34" charset="-122"/>
+                <a:cs typeface="Calibri" pitchFamily="34" charset="-120"/>
+              </a:rPr>
+              <a:t>A freshly created identity/role starts with zero permissions — attach the policy before anything else runs</a:t>
+            </a:r>
+            <a:endParaRPr lang="en-US" sz="950" dirty="0"/>
+          </a:p>
+          <a:p>
+            <a:pPr marL="342900" indent="-342900">
+              <a:spcAft>
+                <a:spcPts val="600"/>
+              </a:spcAft>
+              <a:buSzPct val="100000"/>
+              <a:buChar char="•"/>
+            </a:pPr>
+            <a:r>
+              <a:rPr lang="en-US" sz="950" dirty="0">
+                <a:solidFill>
+                  <a:srgbClr val="1A2E2E"/>
+                </a:solidFill>
+                <a:latin typeface="Calibri" pitchFamily="34" charset="0"/>
+                <a:ea typeface="Calibri" pitchFamily="34" charset="-122"/>
+                <a:cs typeface="Calibri" pitchFamily="34" charset="-120"/>
+              </a:rPr>
+              <a:t>Table metadata stores absolute paths — never copy the raw files without the rewrite step first</a:t>
+            </a:r>
+            <a:endParaRPr lang="en-US" sz="950" dirty="0"/>
+          </a:p>
+          <a:p>
+            <a:pPr marL="342900" indent="-342900">
+              <a:spcAft>
+                <a:spcPts val="600"/>
+              </a:spcAft>
+              <a:buSzPct val="100000"/>
+              <a:buChar char="•"/>
+            </a:pPr>
+            <a:r>
+              <a:rPr lang="en-US" sz="950" dirty="0">
+                <a:solidFill>
+                  <a:srgbClr val="1A2E2E"/>
+                </a:solidFill>
+                <a:latin typeface="Calibri" pitchFamily="34" charset="0"/>
+                <a:ea typeface="Calibri" pitchFamily="34" charset="-122"/>
+                <a:cs typeface="Calibri" pitchFamily="34" charset="-120"/>
+              </a:rPr>
+              <a:t>The rewrite step only runs on a full compute engine (Spark), not as a lightweight API call</a:t>
+            </a:r>
+            <a:endParaRPr lang="en-US" sz="950" dirty="0"/>
+          </a:p>
+          <a:p>
+            <a:pPr marL="342900" indent="-342900">
+              <a:spcAft>
+                <a:spcPts val="600"/>
+              </a:spcAft>
+              <a:buSzPct val="100000"/>
+              <a:buChar char="•"/>
+            </a:pPr>
+            <a:r>
+              <a:rPr lang="en-US" sz="950" dirty="0">
+                <a:solidFill>
+                  <a:srgbClr val="1A2E2E"/>
+                </a:solidFill>
+                <a:latin typeface="Calibri" pitchFamily="34" charset="0"/>
+                <a:ea typeface="Calibri" pitchFamily="34" charset="-122"/>
+                <a:cs typeface="Calibri" pitchFamily="34" charset="-120"/>
+              </a:rPr>
+              <a:t>Recreating the external volume mints a new shared secret — redo the trust handshake</a:t>
+            </a:r>
+            <a:endParaRPr lang="en-US" sz="950" dirty="0"/>
+          </a:p>
+          <a:p>
+            <a:pPr marL="342900" indent="-342900">
+              <a:spcAft>
+                <a:spcPts val="600"/>
+              </a:spcAft>
+              <a:buSzPct val="100000"/>
+              <a:buChar char="•"/>
+            </a:pPr>
+            <a:r>
+              <a:rPr lang="en-US" sz="950" dirty="0">
+                <a:solidFill>
+                  <a:srgbClr val="1A2E2E"/>
+                </a:solidFill>
+                <a:latin typeface="Calibri" pitchFamily="34" charset="0"/>
+                <a:ea typeface="Calibri" pitchFamily="34" charset="-122"/>
+                <a:cs typeface="Calibri" pitchFamily="34" charset="-120"/>
+              </a:rPr>
+              <a:t>Vended write credentials scope to the table's own path — the rewrite job's staging area must live inside it</a:t>
+            </a:r>
+            <a:endParaRPr lang="en-US" sz="950" dirty="0"/>
+          </a:p>
+        </p:txBody>
+      </p:sp>
+    </p:spTree>
+  </p:cSld>
+  <p:clrMapOvr>
+    <a:masterClrMapping/>
+  </p:clrMapOvr>
+</p:sld>
+</file>
+
+<file path=ppt/slides/slide23.xml><?xml version="1.0" encoding="utf-8"?>
+<p:sld xmlns:a="http://schemas.openxmlformats.org/drawingml/2006/main" xmlns:r="http://schemas.openxmlformats.org/officeDocument/2006/relationships" xmlns:p="http://schemas.openxmlformats.org/presentationml/2006/main">
+  <p:cSld name="Slide 23">
+    <p:bg>
+      <p:bgPr>
+        <a:solidFill>
+          <a:srgbClr val="F4F4F3"/>
+        </a:solidFill>
+      </p:bgPr>
+    </p:bg>
+    <p:spTree>
+      <p:nvGrpSpPr>
+        <p:cNvPr id="1" name=""/>
+        <p:cNvGrpSpPr/>
+        <p:nvPr/>
+      </p:nvGrpSpPr>
+      <p:grpSpPr>
+        <a:xfrm>
+          <a:off x="0" y="0"/>
+          <a:ext cx="0" cy="0"/>
+          <a:chOff x="0" y="0"/>
+          <a:chExt cx="0" cy="0"/>
+        </a:xfrm>
+      </p:grpSpPr>
+      <p:sp>
+        <p:nvSpPr>
+          <p:cNvPr id="2" name="Text 0"/>
+          <p:cNvSpPr/>
+          <p:nvPr/>
+        </p:nvSpPr>
+        <p:spPr>
+          <a:xfrm>
+            <a:off x="548640" y="274320"/>
+            <a:ext cx="10515600" cy="502920"/>
+          </a:xfrm>
+          <a:prstGeom prst="rect">
+            <a:avLst/>
+          </a:prstGeom>
+          <a:noFill/>
+          <a:ln/>
+        </p:spPr>
+        <p:txBody>
+          <a:bodyPr wrap="square" lIns="0" tIns="0" rIns="0" bIns="0" rtlCol="0" anchor="ctr"/>
+          <a:lstStyle/>
+          <a:p>
+            <a:pPr algn="l" indent="0" marL="0">
+              <a:buNone/>
+            </a:pPr>
+            <a:r>
+              <a:rPr lang="en-US" sz="2800" dirty="0">
+                <a:solidFill>
+                  <a:srgbClr val="0F5C56"/>
+                </a:solidFill>
+                <a:latin typeface="Cambria" pitchFamily="34" charset="0"/>
+                <a:ea typeface="Cambria" pitchFamily="34" charset="-122"/>
+                <a:cs typeface="Cambria" pitchFamily="34" charset="-120"/>
+              </a:rPr>
+              <a:t>Runbook C1 — Direct-Write (SQL/Spark engine)</a:t>
+            </a:r>
+            <a:endParaRPr lang="en-US" sz="2800" dirty="0"/>
+          </a:p>
+        </p:txBody>
+      </p:sp>
+      <p:sp>
+        <p:nvSpPr>
+          <p:cNvPr id="3" name="Text 1"/>
+          <p:cNvSpPr/>
+          <p:nvPr/>
+        </p:nvSpPr>
+        <p:spPr>
+          <a:xfrm>
+            <a:off x="566928" y="749808"/>
+            <a:ext cx="10515600" cy="365760"/>
+          </a:xfrm>
+          <a:prstGeom prst="rect">
+            <a:avLst/>
+          </a:prstGeom>
+          <a:noFill/>
+          <a:ln/>
+        </p:spPr>
+        <p:txBody>
+          <a:bodyPr wrap="square" lIns="0" tIns="0" rIns="0" bIns="0" rtlCol="0" anchor="ctr"/>
+          <a:lstStyle/>
+          <a:p>
+            <a:pPr algn="l" indent="0" marL="0">
+              <a:buNone/>
+            </a:pPr>
+            <a:r>
+              <a:rPr lang="en-US" sz="1400" i="1" dirty="0">
+                <a:solidFill>
+                  <a:srgbClr val="1A2E2E"/>
+                </a:solidFill>
+                <a:latin typeface="Calibri" pitchFamily="34" charset="0"/>
+                <a:ea typeface="Calibri" pitchFamily="34" charset="-122"/>
+                <a:cs typeface="Calibri" pitchFamily="34" charset="-120"/>
+              </a:rPr>
+              <a:t>One job, one step: write straight into the target catalog</a:t>
+            </a:r>
+            <a:endParaRPr lang="en-US" sz="1400" dirty="0"/>
+          </a:p>
+        </p:txBody>
+      </p:sp>
+      <p:sp>
+        <p:nvSpPr>
+          <p:cNvPr id="4" name="Text 2"/>
+          <p:cNvSpPr/>
+          <p:nvPr/>
+        </p:nvSpPr>
+        <p:spPr>
+          <a:xfrm>
+            <a:off x="0" y="6583680"/>
+            <a:ext cx="12188952" cy="274320"/>
+          </a:xfrm>
+          <a:prstGeom prst="rect">
+            <a:avLst/>
+          </a:prstGeom>
+          <a:noFill/>
+          <a:ln/>
+        </p:spPr>
+        <p:txBody>
+          <a:bodyPr wrap="square" lIns="0" tIns="0" rIns="0" bIns="0" rtlCol="0" anchor="ctr"/>
+          <a:lstStyle/>
+          <a:p>
+            <a:pPr algn="ctr" indent="0" marL="0">
+              <a:buNone/>
+            </a:pPr>
+            <a:r>
+              <a:rPr lang="en-US" sz="900" dirty="0">
+                <a:solidFill>
+                  <a:srgbClr val="5B6B6B"/>
+                </a:solidFill>
+                <a:latin typeface="Calibri" pitchFamily="34" charset="0"/>
+                <a:ea typeface="Calibri" pitchFamily="34" charset="-122"/>
+                <a:cs typeface="Calibri" pitchFamily="34" charset="-120"/>
+              </a:rPr>
+              <a:t>Internal Use</a:t>
+            </a:r>
+            <a:endParaRPr lang="en-US" sz="900" dirty="0"/>
+          </a:p>
+        </p:txBody>
+      </p:sp>
+      <p:sp>
+        <p:nvSpPr>
+          <p:cNvPr id="5" name="Shape 3"/>
+          <p:cNvSpPr/>
+          <p:nvPr/>
+        </p:nvSpPr>
+        <p:spPr>
+          <a:xfrm>
+            <a:off x="594360" y="1271016"/>
+            <a:ext cx="384048" cy="384048"/>
+          </a:xfrm>
+          <a:prstGeom prst="ellipse">
+            <a:avLst/>
+          </a:prstGeom>
+          <a:solidFill>
+            <a:srgbClr val="0F5C56"/>
+          </a:solidFill>
+          <a:ln w="12700">
+            <a:solidFill>
+              <a:srgbClr val="0F5C56"/>
+            </a:solidFill>
+            <a:prstDash val="solid"/>
+          </a:ln>
+        </p:spPr>
+      </p:sp>
+      <p:sp>
+        <p:nvSpPr>
+          <p:cNvPr id="6" name="Text 4"/>
+          <p:cNvSpPr/>
+          <p:nvPr/>
+        </p:nvSpPr>
+        <p:spPr>
+          <a:xfrm>
+            <a:off x="594360" y="1271016"/>
+            <a:ext cx="384048" cy="384048"/>
+          </a:xfrm>
+          <a:prstGeom prst="rect">
+            <a:avLst/>
+          </a:prstGeom>
+          <a:noFill/>
+          <a:ln/>
+        </p:spPr>
+        <p:txBody>
+          <a:bodyPr wrap="square" lIns="0" tIns="0" rIns="0" bIns="0" rtlCol="0" anchor="ctr"/>
+          <a:lstStyle/>
+          <a:p>
+            <a:pPr algn="ctr" indent="0" marL="0">
+              <a:buNone/>
+            </a:pPr>
+            <a:r>
+              <a:rPr lang="en-US" sz="1300" b="1" dirty="0">
+                <a:solidFill>
+                  <a:srgbClr val="FFFFFF"/>
+                </a:solidFill>
+                <a:latin typeface="Cambria" pitchFamily="34" charset="0"/>
+                <a:ea typeface="Cambria" pitchFamily="34" charset="-122"/>
+                <a:cs typeface="Cambria" pitchFamily="34" charset="-120"/>
+              </a:rPr>
+              <a:t>1</a:t>
+            </a:r>
+            <a:endParaRPr lang="en-US" sz="1300" dirty="0"/>
+          </a:p>
+        </p:txBody>
+      </p:sp>
+      <p:sp>
+        <p:nvSpPr>
+          <p:cNvPr id="7" name="Text 5"/>
+          <p:cNvSpPr/>
+          <p:nvPr/>
+        </p:nvSpPr>
+        <p:spPr>
+          <a:xfrm>
+            <a:off x="1143000" y="1216152"/>
+            <a:ext cx="6126480" cy="658368"/>
+          </a:xfrm>
+          <a:prstGeom prst="rect">
+            <a:avLst/>
+          </a:prstGeom>
+          <a:noFill/>
+          <a:ln/>
+        </p:spPr>
+        <p:txBody>
+          <a:bodyPr wrap="square" lIns="0" tIns="0" rIns="0" bIns="0" rtlCol="0" anchor="t"/>
+          <a:lstStyle/>
+          <a:p>
+            <a:pPr indent="0" marL="0">
+              <a:buNone/>
+            </a:pPr>
+            <a:r>
+              <a:rPr lang="en-US" sz="1100" b="1" dirty="0">
+                <a:solidFill>
+                  <a:srgbClr val="0B3D3D"/>
+                </a:solidFill>
+                <a:latin typeface="Calibri" pitchFamily="34" charset="0"/>
+                <a:ea typeface="Calibri" pitchFamily="34" charset="-122"/>
+                <a:cs typeface="Calibri" pitchFamily="34" charset="-120"/>
+              </a:rPr>
+              <a:t>Target-cloud identity   </a:t>
+            </a:r>
+            <a:pPr indent="0" marL="0">
+              <a:buNone/>
+            </a:pPr>
+            <a:r>
+              <a:rPr lang="en-US" sz="1100" dirty="0">
+                <a:solidFill>
+                  <a:srgbClr val="1A2E2E"/>
+                </a:solidFill>
+                <a:latin typeface="Calibri" pitchFamily="34" charset="0"/>
+                <a:ea typeface="Calibri" pitchFamily="34" charset="-122"/>
+                <a:cs typeface="Calibri" pitchFamily="34" charset="-120"/>
+              </a:rPr>
+              <a:t>Provision a set of target-cloud credentials for the compute engine to use; store them in a secrets manager, never in job parameters.</a:t>
+            </a:r>
+            <a:endParaRPr lang="en-US" sz="1100" dirty="0"/>
+          </a:p>
+        </p:txBody>
+      </p:sp>
+      <p:sp>
+        <p:nvSpPr>
+          <p:cNvPr id="8" name="Shape 6"/>
+          <p:cNvSpPr/>
+          <p:nvPr/>
+        </p:nvSpPr>
+        <p:spPr>
+          <a:xfrm>
+            <a:off x="594360" y="1965960"/>
+            <a:ext cx="384048" cy="384048"/>
+          </a:xfrm>
+          <a:prstGeom prst="ellipse">
+            <a:avLst/>
+          </a:prstGeom>
+          <a:solidFill>
+            <a:srgbClr val="0F5C56"/>
+          </a:solidFill>
+          <a:ln w="12700">
+            <a:solidFill>
+              <a:srgbClr val="0F5C56"/>
+            </a:solidFill>
+            <a:prstDash val="solid"/>
+          </a:ln>
+        </p:spPr>
+      </p:sp>
+      <p:sp>
+        <p:nvSpPr>
+          <p:cNvPr id="9" name="Text 7"/>
+          <p:cNvSpPr/>
+          <p:nvPr/>
+        </p:nvSpPr>
+        <p:spPr>
+          <a:xfrm>
+            <a:off x="594360" y="1965960"/>
+            <a:ext cx="384048" cy="384048"/>
+          </a:xfrm>
+          <a:prstGeom prst="rect">
+            <a:avLst/>
+          </a:prstGeom>
+          <a:noFill/>
+          <a:ln/>
+        </p:spPr>
+        <p:txBody>
+          <a:bodyPr wrap="square" lIns="0" tIns="0" rIns="0" bIns="0" rtlCol="0" anchor="ctr"/>
+          <a:lstStyle/>
+          <a:p>
+            <a:pPr algn="ctr" indent="0" marL="0">
+              <a:buNone/>
+            </a:pPr>
+            <a:r>
+              <a:rPr lang="en-US" sz="1300" b="1" dirty="0">
+                <a:solidFill>
+                  <a:srgbClr val="FFFFFF"/>
+                </a:solidFill>
+                <a:latin typeface="Cambria" pitchFamily="34" charset="0"/>
+                <a:ea typeface="Cambria" pitchFamily="34" charset="-122"/>
+                <a:cs typeface="Cambria" pitchFamily="34" charset="-120"/>
+              </a:rPr>
+              <a:t>2</a:t>
+            </a:r>
+            <a:endParaRPr lang="en-US" sz="1300" dirty="0"/>
+          </a:p>
+        </p:txBody>
+      </p:sp>
+      <p:sp>
+        <p:nvSpPr>
+          <p:cNvPr id="10" name="Text 8"/>
+          <p:cNvSpPr/>
+          <p:nvPr/>
+        </p:nvSpPr>
+        <p:spPr>
+          <a:xfrm>
+            <a:off x="1143000" y="1911096"/>
+            <a:ext cx="6126480" cy="658368"/>
+          </a:xfrm>
+          <a:prstGeom prst="rect">
+            <a:avLst/>
+          </a:prstGeom>
+          <a:noFill/>
+          <a:ln/>
+        </p:spPr>
+        <p:txBody>
+          <a:bodyPr wrap="square" lIns="0" tIns="0" rIns="0" bIns="0" rtlCol="0" anchor="t"/>
+          <a:lstStyle/>
+          <a:p>
+            <a:pPr indent="0" marL="0">
+              <a:buNone/>
+            </a:pPr>
+            <a:r>
+              <a:rPr lang="en-US" sz="1100" b="1" dirty="0">
+                <a:solidFill>
+                  <a:srgbClr val="0B3D3D"/>
+                </a:solidFill>
+                <a:latin typeface="Calibri" pitchFamily="34" charset="0"/>
+                <a:ea typeface="Calibri" pitchFamily="34" charset="-122"/>
+                <a:cs typeface="Calibri" pitchFamily="34" charset="-120"/>
+              </a:rPr>
+              <a:t>Network egress   </a:t>
+            </a:r>
+            <a:pPr indent="0" marL="0">
+              <a:buNone/>
+            </a:pPr>
+            <a:r>
+              <a:rPr lang="en-US" sz="1100" dirty="0">
+                <a:solidFill>
+                  <a:srgbClr val="1A2E2E"/>
+                </a:solidFill>
+                <a:latin typeface="Calibri" pitchFamily="34" charset="0"/>
+                <a:ea typeface="Calibri" pitchFamily="34" charset="-122"/>
+                <a:cs typeface="Calibri" pitchFamily="34" charset="-120"/>
+              </a:rPr>
+              <a:t>Confirm the compute engine's network has an outbound path to the public internet — general-purpose serverless compute often does not by default and needs an explicit gateway added.</a:t>
+            </a:r>
+            <a:endParaRPr lang="en-US" sz="1100" dirty="0"/>
+          </a:p>
+        </p:txBody>
+      </p:sp>
+      <p:sp>
+        <p:nvSpPr>
+          <p:cNvPr id="11" name="Shape 9"/>
+          <p:cNvSpPr/>
+          <p:nvPr/>
+        </p:nvSpPr>
+        <p:spPr>
+          <a:xfrm>
+            <a:off x="594360" y="2660904"/>
+            <a:ext cx="384048" cy="384048"/>
+          </a:xfrm>
+          <a:prstGeom prst="ellipse">
+            <a:avLst/>
+          </a:prstGeom>
+          <a:solidFill>
+            <a:srgbClr val="0F5C56"/>
+          </a:solidFill>
+          <a:ln w="12700">
+            <a:solidFill>
+              <a:srgbClr val="0F5C56"/>
+            </a:solidFill>
+            <a:prstDash val="solid"/>
+          </a:ln>
+        </p:spPr>
+      </p:sp>
+      <p:sp>
+        <p:nvSpPr>
+          <p:cNvPr id="12" name="Text 10"/>
+          <p:cNvSpPr/>
+          <p:nvPr/>
+        </p:nvSpPr>
+        <p:spPr>
+          <a:xfrm>
+            <a:off x="594360" y="2660904"/>
+            <a:ext cx="384048" cy="384048"/>
+          </a:xfrm>
+          <a:prstGeom prst="rect">
+            <a:avLst/>
+          </a:prstGeom>
+          <a:noFill/>
+          <a:ln/>
+        </p:spPr>
+        <p:txBody>
+          <a:bodyPr wrap="square" lIns="0" tIns="0" rIns="0" bIns="0" rtlCol="0" anchor="ctr"/>
+          <a:lstStyle/>
+          <a:p>
+            <a:pPr algn="ctr" indent="0" marL="0">
+              <a:buNone/>
+            </a:pPr>
+            <a:r>
+              <a:rPr lang="en-US" sz="1300" b="1" dirty="0">
+                <a:solidFill>
+                  <a:srgbClr val="FFFFFF"/>
+                </a:solidFill>
+                <a:latin typeface="Cambria" pitchFamily="34" charset="0"/>
+                <a:ea typeface="Cambria" pitchFamily="34" charset="-122"/>
+                <a:cs typeface="Cambria" pitchFamily="34" charset="-120"/>
+              </a:rPr>
+              <a:t>3</a:t>
+            </a:r>
+            <a:endParaRPr lang="en-US" sz="1300" dirty="0"/>
+          </a:p>
+        </p:txBody>
+      </p:sp>
+      <p:sp>
+        <p:nvSpPr>
+          <p:cNvPr id="13" name="Text 11"/>
+          <p:cNvSpPr/>
+          <p:nvPr/>
+        </p:nvSpPr>
+        <p:spPr>
+          <a:xfrm>
+            <a:off x="1143000" y="2606040"/>
+            <a:ext cx="6126480" cy="658368"/>
+          </a:xfrm>
+          <a:prstGeom prst="rect">
+            <a:avLst/>
+          </a:prstGeom>
+          <a:noFill/>
+          <a:ln/>
+        </p:spPr>
+        <p:txBody>
+          <a:bodyPr wrap="square" lIns="0" tIns="0" rIns="0" bIns="0" rtlCol="0" anchor="t"/>
+          <a:lstStyle/>
+          <a:p>
+            <a:pPr indent="0" marL="0">
+              <a:buNone/>
+            </a:pPr>
+            <a:r>
+              <a:rPr lang="en-US" sz="1100" b="1" dirty="0">
+                <a:solidFill>
+                  <a:srgbClr val="0B3D3D"/>
+                </a:solidFill>
+                <a:latin typeface="Calibri" pitchFamily="34" charset="0"/>
+                <a:ea typeface="Calibri" pitchFamily="34" charset="-122"/>
+                <a:cs typeface="Calibri" pitchFamily="34" charset="-120"/>
+              </a:rPr>
+              <a:t>Catalog config   </a:t>
+            </a:r>
+            <a:pPr indent="0" marL="0">
+              <a:buNone/>
+            </a:pPr>
+            <a:r>
+              <a:rPr lang="en-US" sz="1100" dirty="0">
+                <a:solidFill>
+                  <a:srgbClr val="1A2E2E"/>
+                </a:solidFill>
+                <a:latin typeface="Calibri" pitchFamily="34" charset="0"/>
+                <a:ea typeface="Calibri" pitchFamily="34" charset="-122"/>
+                <a:cs typeface="Calibri" pitchFamily="34" charset="-120"/>
+              </a:rPr>
+              <a:t>Point the write job at the target catalog and target-cloud object storage; do NOT set an explicit credential-provider class — let the client default to its own discovery chain.</a:t>
+            </a:r>
+            <a:endParaRPr lang="en-US" sz="1100" dirty="0"/>
+          </a:p>
+        </p:txBody>
+      </p:sp>
+      <p:sp>
+        <p:nvSpPr>
+          <p:cNvPr id="14" name="Shape 12"/>
+          <p:cNvSpPr/>
+          <p:nvPr/>
+        </p:nvSpPr>
+        <p:spPr>
+          <a:xfrm>
+            <a:off x="594360" y="3355848"/>
+            <a:ext cx="384048" cy="384048"/>
+          </a:xfrm>
+          <a:prstGeom prst="ellipse">
+            <a:avLst/>
+          </a:prstGeom>
+          <a:solidFill>
+            <a:srgbClr val="0F5C56"/>
+          </a:solidFill>
+          <a:ln w="12700">
+            <a:solidFill>
+              <a:srgbClr val="0F5C56"/>
+            </a:solidFill>
+            <a:prstDash val="solid"/>
+          </a:ln>
+        </p:spPr>
+      </p:sp>
+      <p:sp>
+        <p:nvSpPr>
+          <p:cNvPr id="15" name="Text 13"/>
+          <p:cNvSpPr/>
+          <p:nvPr/>
+        </p:nvSpPr>
+        <p:spPr>
+          <a:xfrm>
+            <a:off x="594360" y="3355848"/>
+            <a:ext cx="384048" cy="384048"/>
+          </a:xfrm>
+          <a:prstGeom prst="rect">
+            <a:avLst/>
+          </a:prstGeom>
+          <a:noFill/>
+          <a:ln/>
+        </p:spPr>
+        <p:txBody>
+          <a:bodyPr wrap="square" lIns="0" tIns="0" rIns="0" bIns="0" rtlCol="0" anchor="ctr"/>
+          <a:lstStyle/>
+          <a:p>
+            <a:pPr algn="ctr" indent="0" marL="0">
+              <a:buNone/>
+            </a:pPr>
+            <a:r>
+              <a:rPr lang="en-US" sz="1300" b="1" dirty="0">
+                <a:solidFill>
+                  <a:srgbClr val="FFFFFF"/>
+                </a:solidFill>
+                <a:latin typeface="Cambria" pitchFamily="34" charset="0"/>
+                <a:ea typeface="Cambria" pitchFamily="34" charset="-122"/>
+                <a:cs typeface="Cambria" pitchFamily="34" charset="-120"/>
+              </a:rPr>
+              <a:t>4</a:t>
+            </a:r>
+            <a:endParaRPr lang="en-US" sz="1300" dirty="0"/>
+          </a:p>
+        </p:txBody>
+      </p:sp>
+      <p:sp>
+        <p:nvSpPr>
+          <p:cNvPr id="16" name="Text 14"/>
+          <p:cNvSpPr/>
+          <p:nvPr/>
+        </p:nvSpPr>
+        <p:spPr>
+          <a:xfrm>
+            <a:off x="1143000" y="3300984"/>
+            <a:ext cx="6126480" cy="658368"/>
+          </a:xfrm>
+          <a:prstGeom prst="rect">
+            <a:avLst/>
+          </a:prstGeom>
+          <a:noFill/>
+          <a:ln/>
+        </p:spPr>
+        <p:txBody>
+          <a:bodyPr wrap="square" lIns="0" tIns="0" rIns="0" bIns="0" rtlCol="0" anchor="t"/>
+          <a:lstStyle/>
+          <a:p>
+            <a:pPr indent="0" marL="0">
+              <a:buNone/>
+            </a:pPr>
+            <a:r>
+              <a:rPr lang="en-US" sz="1100" b="1" dirty="0">
+                <a:solidFill>
+                  <a:srgbClr val="0B3D3D"/>
+                </a:solidFill>
+                <a:latin typeface="Calibri" pitchFamily="34" charset="0"/>
+                <a:ea typeface="Calibri" pitchFamily="34" charset="-122"/>
+                <a:cs typeface="Calibri" pitchFamily="34" charset="-120"/>
+              </a:rPr>
+              <a:t>Supply real credentials   </a:t>
+            </a:r>
+            <a:pPr indent="0" marL="0">
+              <a:buNone/>
+            </a:pPr>
+            <a:r>
+              <a:rPr lang="en-US" sz="1100" dirty="0">
+                <a:solidFill>
+                  <a:srgbClr val="1A2E2E"/>
+                </a:solidFill>
+                <a:latin typeface="Calibri" pitchFamily="34" charset="0"/>
+                <a:ea typeface="Calibri" pitchFamily="34" charset="-122"/>
+                <a:cs typeface="Calibri" pitchFamily="34" charset="-120"/>
+              </a:rPr>
+              <a:t>Pass the actual key/secret as JVM system properties on the job launch — environment-variable-style options were tested and do not propagate on this compute engine.</a:t>
+            </a:r>
+            <a:endParaRPr lang="en-US" sz="1100" dirty="0"/>
+          </a:p>
+        </p:txBody>
+      </p:sp>
+      <p:sp>
+        <p:nvSpPr>
+          <p:cNvPr id="17" name="Shape 15"/>
+          <p:cNvSpPr/>
+          <p:nvPr/>
+        </p:nvSpPr>
+        <p:spPr>
+          <a:xfrm>
+            <a:off x="594360" y="4050792"/>
+            <a:ext cx="384048" cy="384048"/>
+          </a:xfrm>
+          <a:prstGeom prst="ellipse">
+            <a:avLst/>
+          </a:prstGeom>
+          <a:solidFill>
+            <a:srgbClr val="0F5C56"/>
+          </a:solidFill>
+          <a:ln w="12700">
+            <a:solidFill>
+              <a:srgbClr val="0F5C56"/>
+            </a:solidFill>
+            <a:prstDash val="solid"/>
+          </a:ln>
+        </p:spPr>
+      </p:sp>
+      <p:sp>
+        <p:nvSpPr>
+          <p:cNvPr id="18" name="Text 16"/>
+          <p:cNvSpPr/>
+          <p:nvPr/>
+        </p:nvSpPr>
+        <p:spPr>
+          <a:xfrm>
+            <a:off x="594360" y="4050792"/>
+            <a:ext cx="384048" cy="384048"/>
+          </a:xfrm>
+          <a:prstGeom prst="rect">
+            <a:avLst/>
+          </a:prstGeom>
+          <a:noFill/>
+          <a:ln/>
+        </p:spPr>
+        <p:txBody>
+          <a:bodyPr wrap="square" lIns="0" tIns="0" rIns="0" bIns="0" rtlCol="0" anchor="ctr"/>
+          <a:lstStyle/>
+          <a:p>
+            <a:pPr algn="ctr" indent="0" marL="0">
+              <a:buNone/>
+            </a:pPr>
+            <a:r>
+              <a:rPr lang="en-US" sz="1300" b="1" dirty="0">
+                <a:solidFill>
+                  <a:srgbClr val="FFFFFF"/>
+                </a:solidFill>
+                <a:latin typeface="Cambria" pitchFamily="34" charset="0"/>
+                <a:ea typeface="Cambria" pitchFamily="34" charset="-122"/>
+                <a:cs typeface="Cambria" pitchFamily="34" charset="-120"/>
+              </a:rPr>
+              <a:t>5</a:t>
+            </a:r>
+            <a:endParaRPr lang="en-US" sz="1300" dirty="0"/>
+          </a:p>
+        </p:txBody>
+      </p:sp>
+      <p:sp>
+        <p:nvSpPr>
+          <p:cNvPr id="19" name="Text 17"/>
+          <p:cNvSpPr/>
+          <p:nvPr/>
+        </p:nvSpPr>
+        <p:spPr>
+          <a:xfrm>
+            <a:off x="1143000" y="3995928"/>
+            <a:ext cx="6126480" cy="658368"/>
+          </a:xfrm>
+          <a:prstGeom prst="rect">
+            <a:avLst/>
+          </a:prstGeom>
+          <a:noFill/>
+          <a:ln/>
+        </p:spPr>
+        <p:txBody>
+          <a:bodyPr wrap="square" lIns="0" tIns="0" rIns="0" bIns="0" rtlCol="0" anchor="t"/>
+          <a:lstStyle/>
+          <a:p>
+            <a:pPr indent="0" marL="0">
+              <a:buNone/>
+            </a:pPr>
+            <a:r>
+              <a:rPr lang="en-US" sz="1100" b="1" dirty="0">
+                <a:solidFill>
+                  <a:srgbClr val="0B3D3D"/>
+                </a:solidFill>
+                <a:latin typeface="Calibri" pitchFamily="34" charset="0"/>
+                <a:ea typeface="Calibri" pitchFamily="34" charset="-122"/>
+                <a:cs typeface="Calibri" pitchFamily="34" charset="-120"/>
+              </a:rPr>
+              <a:t>Write + verify   </a:t>
+            </a:r>
+            <a:pPr indent="0" marL="0">
+              <a:buNone/>
+            </a:pPr>
+            <a:r>
+              <a:rPr lang="en-US" sz="1100" dirty="0">
+                <a:solidFill>
+                  <a:srgbClr val="1A2E2E"/>
+                </a:solidFill>
+                <a:latin typeface="Calibri" pitchFamily="34" charset="0"/>
+                <a:ea typeface="Calibri" pitchFamily="34" charset="-122"/>
+                <a:cs typeface="Calibri" pitchFamily="34" charset="-120"/>
+              </a:rPr>
+              <a:t>Create the namespace/table, insert rows, and read them back through the target catalog in the same job — no second step required.</a:t>
+            </a:r>
+            <a:endParaRPr lang="en-US" sz="1100" dirty="0"/>
+          </a:p>
+        </p:txBody>
+      </p:sp>
+      <p:sp>
+        <p:nvSpPr>
+          <p:cNvPr id="20" name="Shape 18"/>
+          <p:cNvSpPr/>
+          <p:nvPr/>
+        </p:nvSpPr>
+        <p:spPr>
+          <a:xfrm>
+            <a:off x="7452360" y="1234440"/>
+            <a:ext cx="4206240" cy="3566160"/>
+          </a:xfrm>
+          <a:prstGeom prst="roundRect">
+            <a:avLst>
+              <a:gd name="adj" fmla="val 1282"/>
+            </a:avLst>
+          </a:prstGeom>
+          <a:solidFill>
+            <a:srgbClr val="F4F4F3"/>
+          </a:solidFill>
+          <a:ln w="15875">
+            <a:solidFill>
+              <a:srgbClr val="D8D8D6"/>
+            </a:solidFill>
+            <a:prstDash val="solid"/>
+          </a:ln>
+        </p:spPr>
+      </p:sp>
+      <p:sp>
+        <p:nvSpPr>
+          <p:cNvPr id="21" name="Text 19"/>
+          <p:cNvSpPr/>
+          <p:nvPr/>
+        </p:nvSpPr>
+        <p:spPr>
+          <a:xfrm>
+            <a:off x="7680960" y="1371600"/>
+            <a:ext cx="3749040" cy="274320"/>
+          </a:xfrm>
+          <a:prstGeom prst="rect">
+            <a:avLst/>
+          </a:prstGeom>
+          <a:noFill/>
+          <a:ln/>
+        </p:spPr>
+        <p:txBody>
+          <a:bodyPr wrap="square" lIns="0" tIns="0" rIns="0" bIns="0" rtlCol="0" anchor="ctr"/>
+          <a:lstStyle/>
+          <a:p>
+            <a:pPr indent="0" marL="0">
+              <a:buNone/>
+            </a:pPr>
+            <a:r>
+              <a:rPr lang="en-US" sz="1250" b="1" dirty="0">
+                <a:solidFill>
+                  <a:srgbClr val="C1502E"/>
+                </a:solidFill>
+                <a:latin typeface="Calibri" pitchFamily="34" charset="0"/>
+                <a:ea typeface="Calibri" pitchFamily="34" charset="-122"/>
+                <a:cs typeface="Calibri" pitchFamily="34" charset="-120"/>
+              </a:rPr>
+              <a:t>Sharp edges</a:t>
+            </a:r>
+            <a:endParaRPr lang="en-US" sz="1250" dirty="0"/>
+          </a:p>
+        </p:txBody>
+      </p:sp>
+      <p:sp>
+        <p:nvSpPr>
+          <p:cNvPr id="22" name="Text 20"/>
+          <p:cNvSpPr/>
+          <p:nvPr/>
+        </p:nvSpPr>
+        <p:spPr>
+          <a:xfrm>
+            <a:off x="7680960" y="1719072"/>
+            <a:ext cx="3749040" cy="2971800"/>
+          </a:xfrm>
+          <a:prstGeom prst="rect">
+            <a:avLst/>
+          </a:prstGeom>
+          <a:noFill/>
+          <a:ln/>
+        </p:spPr>
+        <p:txBody>
+          <a:bodyPr wrap="square" lIns="0" tIns="0" rIns="0" bIns="0" rtlCol="0" anchor="t"/>
+          <a:lstStyle/>
+          <a:p>
+            <a:pPr marL="342900" indent="-342900">
+              <a:spcAft>
+                <a:spcPts val="600"/>
+              </a:spcAft>
+              <a:buSzPct val="100000"/>
+              <a:buChar char="•"/>
+            </a:pPr>
+            <a:r>
+              <a:rPr lang="en-US" sz="950" dirty="0">
+                <a:solidFill>
+                  <a:srgbClr val="1A2E2E"/>
+                </a:solidFill>
+                <a:latin typeface="Calibri" pitchFamily="34" charset="0"/>
+                <a:ea typeface="Calibri" pitchFamily="34" charset="-122"/>
+                <a:cs typeface="Calibri" pitchFamily="34" charset="-120"/>
+              </a:rPr>
+              <a:t>The obvious "static credentials" provider class fails: it doesn't expose the constructor shape the catalog client's reflection-based instantiation needs</a:t>
+            </a:r>
+            <a:endParaRPr lang="en-US" sz="950" dirty="0"/>
+          </a:p>
+          <a:p>
+            <a:pPr marL="342900" indent="-342900">
+              <a:spcAft>
+                <a:spcPts val="600"/>
+              </a:spcAft>
+              <a:buSzPct val="100000"/>
+              <a:buChar char="•"/>
+            </a:pPr>
+            <a:r>
+              <a:rPr lang="en-US" sz="950" dirty="0">
+                <a:solidFill>
+                  <a:srgbClr val="1A2E2E"/>
+                </a:solidFill>
+                <a:latin typeface="Calibri" pitchFamily="34" charset="0"/>
+                <a:ea typeface="Calibri" pitchFamily="34" charset="-122"/>
+                <a:cs typeface="Calibri" pitchFamily="34" charset="-120"/>
+              </a:rPr>
+              <a:t>Environment-variable-style job properties silently do not reach the job's runtime — use system properties instead</a:t>
+            </a:r>
+            <a:endParaRPr lang="en-US" sz="950" dirty="0"/>
+          </a:p>
+          <a:p>
+            <a:pPr marL="342900" indent="-342900">
+              <a:spcAft>
+                <a:spcPts val="600"/>
+              </a:spcAft>
+              <a:buSzPct val="100000"/>
+              <a:buChar char="•"/>
+            </a:pPr>
+            <a:r>
+              <a:rPr lang="en-US" sz="950" dirty="0">
+                <a:solidFill>
+                  <a:srgbClr val="1A2E2E"/>
+                </a:solidFill>
+                <a:latin typeface="Calibri" pitchFamily="34" charset="0"/>
+                <a:ea typeface="Calibri" pitchFamily="34" charset="-122"/>
+                <a:cs typeface="Calibri" pitchFamily="34" charset="-120"/>
+              </a:rPr>
+              <a:t>This compute engine has no internet egress by default; the failure surfaces as a plain connection timeout, easy to mistake for a firewall or DNS issue</a:t>
+            </a:r>
+            <a:endParaRPr lang="en-US" sz="950" dirty="0"/>
+          </a:p>
+          <a:p>
+            <a:pPr marL="342900" indent="-342900">
+              <a:spcAft>
+                <a:spcPts val="600"/>
+              </a:spcAft>
+              <a:buSzPct val="100000"/>
+              <a:buChar char="•"/>
+            </a:pPr>
+            <a:r>
+              <a:rPr lang="en-US" sz="950" dirty="0">
+                <a:solidFill>
+                  <a:srgbClr val="1A2E2E"/>
+                </a:solidFill>
+                <a:latin typeface="Calibri" pitchFamily="34" charset="0"/>
+                <a:ea typeface="Calibri" pitchFamily="34" charset="-122"/>
+                <a:cs typeface="Calibri" pitchFamily="34" charset="-120"/>
+              </a:rPr>
+              <a:t>A NAT/egress gateway is a standing, billed resource — provision it deliberately, not by default</a:t>
+            </a:r>
+            <a:endParaRPr lang="en-US" sz="950" dirty="0"/>
+          </a:p>
+        </p:txBody>
+      </p:sp>
+      <p:sp>
+        <p:nvSpPr>
+          <p:cNvPr id="23" name="Text 21"/>
+          <p:cNvSpPr/>
+          <p:nvPr/>
+        </p:nvSpPr>
+        <p:spPr>
+          <a:xfrm>
+            <a:off x="548640" y="4892040"/>
+            <a:ext cx="11109960" cy="548640"/>
+          </a:xfrm>
+          <a:prstGeom prst="rect">
+            <a:avLst/>
+          </a:prstGeom>
+          <a:noFill/>
+          <a:ln/>
+        </p:spPr>
+        <p:txBody>
+          <a:bodyPr wrap="square" lIns="0" tIns="0" rIns="0" bIns="0" rtlCol="0" anchor="t"/>
+          <a:lstStyle/>
+          <a:p>
+            <a:pPr indent="0" marL="0">
+              <a:buNone/>
+            </a:pPr>
+            <a:r>
+              <a:rPr lang="en-US" sz="1050" i="1" dirty="0">
+                <a:solidFill>
+                  <a:srgbClr val="5B6B6B"/>
+                </a:solidFill>
+                <a:latin typeface="Calibri" pitchFamily="34" charset="0"/>
+                <a:ea typeface="Calibri" pitchFamily="34" charset="-122"/>
+                <a:cs typeface="Calibri" pitchFamily="34" charset="-120"/>
+              </a:rPr>
+              <a:t>Confirmed working end-to-end 2026-07-17: table created, written, committed, and read back with zero landing-zone infrastructure.</a:t>
+            </a:r>
+            <a:endParaRPr lang="en-US" sz="1050" dirty="0"/>
+          </a:p>
+        </p:txBody>
+      </p:sp>
+    </p:spTree>
+  </p:cSld>
+  <p:clrMapOvr>
+    <a:masterClrMapping/>
+  </p:clrMapOvr>
+</p:sld>
+</file>
+
+<file path=ppt/slides/slide24.xml><?xml version="1.0" encoding="utf-8"?>
+<p:sld xmlns:a="http://schemas.openxmlformats.org/drawingml/2006/main" xmlns:r="http://schemas.openxmlformats.org/officeDocument/2006/relationships" xmlns:p="http://schemas.openxmlformats.org/presentationml/2006/main">
+  <p:cSld name="Slide 24">
+    <p:bg>
+      <p:bgPr>
+        <a:solidFill>
+          <a:srgbClr val="F4F4F3"/>
+        </a:solidFill>
+      </p:bgPr>
+    </p:bg>
+    <p:spTree>
+      <p:nvGrpSpPr>
+        <p:cNvPr id="1" name=""/>
+        <p:cNvGrpSpPr/>
+        <p:nvPr/>
+      </p:nvGrpSpPr>
+      <p:grpSpPr>
+        <a:xfrm>
+          <a:off x="0" y="0"/>
+          <a:ext cx="0" cy="0"/>
+          <a:chOff x="0" y="0"/>
+          <a:chExt cx="0" cy="0"/>
+        </a:xfrm>
+      </p:grpSpPr>
+      <p:sp>
+        <p:nvSpPr>
+          <p:cNvPr id="2" name="Text 0"/>
+          <p:cNvSpPr/>
+          <p:nvPr/>
+        </p:nvSpPr>
+        <p:spPr>
+          <a:xfrm>
+            <a:off x="548640" y="274320"/>
+            <a:ext cx="10515600" cy="502920"/>
+          </a:xfrm>
+          <a:prstGeom prst="rect">
+            <a:avLst/>
+          </a:prstGeom>
+          <a:noFill/>
+          <a:ln/>
+        </p:spPr>
+        <p:txBody>
+          <a:bodyPr wrap="square" lIns="0" tIns="0" rIns="0" bIns="0" rtlCol="0" anchor="ctr"/>
+          <a:lstStyle/>
+          <a:p>
+            <a:pPr algn="l" indent="0" marL="0">
+              <a:buNone/>
+            </a:pPr>
+            <a:r>
+              <a:rPr lang="en-US" sz="2800" dirty="0">
+                <a:solidFill>
+                  <a:srgbClr val="0F5C56"/>
+                </a:solidFill>
+                <a:latin typeface="Cambria" pitchFamily="34" charset="0"/>
+                <a:ea typeface="Cambria" pitchFamily="34" charset="-122"/>
+                <a:cs typeface="Cambria" pitchFamily="34" charset="-120"/>
+              </a:rPr>
+              <a:t>Runbook C2 — Direct-Write (streaming/batch framework)</a:t>
+            </a:r>
+            <a:endParaRPr lang="en-US" sz="2800" dirty="0"/>
+          </a:p>
+        </p:txBody>
+      </p:sp>
+      <p:sp>
+        <p:nvSpPr>
+          <p:cNvPr id="3" name="Text 1"/>
+          <p:cNvSpPr/>
+          <p:nvPr/>
+        </p:nvSpPr>
+        <p:spPr>
+          <a:xfrm>
+            <a:off x="566928" y="749808"/>
+            <a:ext cx="10515600" cy="365760"/>
+          </a:xfrm>
+          <a:prstGeom prst="rect">
+            <a:avLst/>
+          </a:prstGeom>
+          <a:noFill/>
+          <a:ln/>
+        </p:spPr>
+        <p:txBody>
+          <a:bodyPr wrap="square" lIns="0" tIns="0" rIns="0" bIns="0" rtlCol="0" anchor="ctr"/>
+          <a:lstStyle/>
+          <a:p>
+            <a:pPr algn="l" indent="0" marL="0">
+              <a:buNone/>
+            </a:pPr>
+            <a:r>
+              <a:rPr lang="en-US" sz="1400" i="1" dirty="0">
+                <a:solidFill>
+                  <a:srgbClr val="1A2E2E"/>
+                </a:solidFill>
+                <a:latin typeface="Calibri" pitchFamily="34" charset="0"/>
+                <a:ea typeface="Calibri" pitchFamily="34" charset="-122"/>
+                <a:cs typeface="Calibri" pitchFamily="34" charset="-120"/>
+              </a:rPr>
+              <a:t>Two steps, split at the credential seam</a:t>
+            </a:r>
+            <a:endParaRPr lang="en-US" sz="1400" dirty="0"/>
+          </a:p>
+        </p:txBody>
+      </p:sp>
+      <p:sp>
+        <p:nvSpPr>
+          <p:cNvPr id="4" name="Text 2"/>
+          <p:cNvSpPr/>
+          <p:nvPr/>
+        </p:nvSpPr>
+        <p:spPr>
+          <a:xfrm>
+            <a:off x="0" y="6583680"/>
+            <a:ext cx="12188952" cy="274320"/>
+          </a:xfrm>
+          <a:prstGeom prst="rect">
+            <a:avLst/>
+          </a:prstGeom>
+          <a:noFill/>
+          <a:ln/>
+        </p:spPr>
+        <p:txBody>
+          <a:bodyPr wrap="square" lIns="0" tIns="0" rIns="0" bIns="0" rtlCol="0" anchor="ctr"/>
+          <a:lstStyle/>
+          <a:p>
+            <a:pPr algn="ctr" indent="0" marL="0">
+              <a:buNone/>
+            </a:pPr>
+            <a:r>
+              <a:rPr lang="en-US" sz="900" dirty="0">
+                <a:solidFill>
+                  <a:srgbClr val="5B6B6B"/>
+                </a:solidFill>
+                <a:latin typeface="Calibri" pitchFamily="34" charset="0"/>
+                <a:ea typeface="Calibri" pitchFamily="34" charset="-122"/>
+                <a:cs typeface="Calibri" pitchFamily="34" charset="-120"/>
+              </a:rPr>
+              <a:t>Internal Use</a:t>
+            </a:r>
+            <a:endParaRPr lang="en-US" sz="900" dirty="0"/>
+          </a:p>
+        </p:txBody>
+      </p:sp>
+      <p:sp>
+        <p:nvSpPr>
+          <p:cNvPr id="5" name="Shape 3"/>
+          <p:cNvSpPr/>
+          <p:nvPr/>
+        </p:nvSpPr>
+        <p:spPr>
+          <a:xfrm>
+            <a:off x="594360" y="1271016"/>
+            <a:ext cx="384048" cy="384048"/>
+          </a:xfrm>
+          <a:prstGeom prst="ellipse">
+            <a:avLst/>
+          </a:prstGeom>
+          <a:solidFill>
+            <a:srgbClr val="0F5C56"/>
+          </a:solidFill>
+          <a:ln w="12700">
+            <a:solidFill>
+              <a:srgbClr val="0F5C56"/>
+            </a:solidFill>
+            <a:prstDash val="solid"/>
+          </a:ln>
+        </p:spPr>
+      </p:sp>
+      <p:sp>
+        <p:nvSpPr>
+          <p:cNvPr id="6" name="Text 4"/>
+          <p:cNvSpPr/>
+          <p:nvPr/>
+        </p:nvSpPr>
+        <p:spPr>
+          <a:xfrm>
+            <a:off x="594360" y="1271016"/>
+            <a:ext cx="384048" cy="384048"/>
+          </a:xfrm>
+          <a:prstGeom prst="rect">
+            <a:avLst/>
+          </a:prstGeom>
+          <a:noFill/>
+          <a:ln/>
+        </p:spPr>
+        <p:txBody>
+          <a:bodyPr wrap="square" lIns="0" tIns="0" rIns="0" bIns="0" rtlCol="0" anchor="ctr"/>
+          <a:lstStyle/>
+          <a:p>
+            <a:pPr algn="ctr" indent="0" marL="0">
+              <a:buNone/>
+            </a:pPr>
+            <a:r>
+              <a:rPr lang="en-US" sz="1300" b="1" dirty="0">
+                <a:solidFill>
+                  <a:srgbClr val="FFFFFF"/>
+                </a:solidFill>
+                <a:latin typeface="Cambria" pitchFamily="34" charset="0"/>
+                <a:ea typeface="Cambria" pitchFamily="34" charset="-122"/>
+                <a:cs typeface="Cambria" pitchFamily="34" charset="-120"/>
+              </a:rPr>
+              <a:t>1</a:t>
+            </a:r>
+            <a:endParaRPr lang="en-US" sz="1300" dirty="0"/>
+          </a:p>
+        </p:txBody>
+      </p:sp>
+      <p:sp>
+        <p:nvSpPr>
+          <p:cNvPr id="7" name="Text 5"/>
+          <p:cNvSpPr/>
+          <p:nvPr/>
+        </p:nvSpPr>
+        <p:spPr>
+          <a:xfrm>
+            <a:off x="1143000" y="1216152"/>
+            <a:ext cx="6126480" cy="658368"/>
+          </a:xfrm>
+          <a:prstGeom prst="rect">
+            <a:avLst/>
+          </a:prstGeom>
+          <a:noFill/>
+          <a:ln/>
+        </p:spPr>
+        <p:txBody>
+          <a:bodyPr wrap="square" lIns="0" tIns="0" rIns="0" bIns="0" rtlCol="0" anchor="t"/>
+          <a:lstStyle/>
+          <a:p>
+            <a:pPr indent="0" marL="0">
+              <a:buNone/>
+            </a:pPr>
+            <a:r>
+              <a:rPr lang="en-US" sz="1100" b="1" dirty="0">
+                <a:solidFill>
+                  <a:srgbClr val="0B3D3D"/>
+                </a:solidFill>
+                <a:latin typeface="Calibri" pitchFamily="34" charset="0"/>
+                <a:ea typeface="Calibri" pitchFamily="34" charset="-122"/>
+                <a:cs typeface="Calibri" pitchFamily="34" charset="-120"/>
+              </a:rPr>
+              <a:t>Landing bucket   </a:t>
+            </a:r>
+            <a:pPr indent="0" marL="0">
+              <a:buNone/>
+            </a:pPr>
+            <a:r>
+              <a:rPr lang="en-US" sz="1100" dirty="0">
+                <a:solidFill>
+                  <a:srgbClr val="1A2E2E"/>
+                </a:solidFill>
+                <a:latin typeface="Calibri" pitchFamily="34" charset="0"/>
+                <a:ea typeface="Calibri" pitchFamily="34" charset="-122"/>
+                <a:cs typeface="Calibri" pitchFamily="34" charset="-120"/>
+              </a:rPr>
+              <a:t>Create a plain storage bucket in the target cloud to receive raw files — no catalog involved at this stage.</a:t>
+            </a:r>
+            <a:endParaRPr lang="en-US" sz="1100" dirty="0"/>
+          </a:p>
+        </p:txBody>
+      </p:sp>
+      <p:sp>
+        <p:nvSpPr>
+          <p:cNvPr id="8" name="Shape 6"/>
+          <p:cNvSpPr/>
+          <p:nvPr/>
+        </p:nvSpPr>
+        <p:spPr>
+          <a:xfrm>
+            <a:off x="594360" y="1965960"/>
+            <a:ext cx="384048" cy="384048"/>
+          </a:xfrm>
+          <a:prstGeom prst="ellipse">
+            <a:avLst/>
+          </a:prstGeom>
+          <a:solidFill>
+            <a:srgbClr val="0F5C56"/>
+          </a:solidFill>
+          <a:ln w="12700">
+            <a:solidFill>
+              <a:srgbClr val="0F5C56"/>
+            </a:solidFill>
+            <a:prstDash val="solid"/>
+          </a:ln>
+        </p:spPr>
+      </p:sp>
+      <p:sp>
+        <p:nvSpPr>
+          <p:cNvPr id="9" name="Text 7"/>
+          <p:cNvSpPr/>
+          <p:nvPr/>
+        </p:nvSpPr>
+        <p:spPr>
+          <a:xfrm>
+            <a:off x="594360" y="1965960"/>
+            <a:ext cx="384048" cy="384048"/>
+          </a:xfrm>
+          <a:prstGeom prst="rect">
+            <a:avLst/>
+          </a:prstGeom>
+          <a:noFill/>
+          <a:ln/>
+        </p:spPr>
+        <p:txBody>
+          <a:bodyPr wrap="square" lIns="0" tIns="0" rIns="0" bIns="0" rtlCol="0" anchor="ctr"/>
+          <a:lstStyle/>
+          <a:p>
+            <a:pPr algn="ctr" indent="0" marL="0">
+              <a:buNone/>
+            </a:pPr>
+            <a:r>
+              <a:rPr lang="en-US" sz="1300" b="1" dirty="0">
+                <a:solidFill>
+                  <a:srgbClr val="FFFFFF"/>
+                </a:solidFill>
+                <a:latin typeface="Cambria" pitchFamily="34" charset="0"/>
+                <a:ea typeface="Cambria" pitchFamily="34" charset="-122"/>
+                <a:cs typeface="Cambria" pitchFamily="34" charset="-120"/>
+              </a:rPr>
+              <a:t>2</a:t>
+            </a:r>
+            <a:endParaRPr lang="en-US" sz="1300" dirty="0"/>
+          </a:p>
+        </p:txBody>
+      </p:sp>
+      <p:sp>
+        <p:nvSpPr>
+          <p:cNvPr id="10" name="Text 8"/>
+          <p:cNvSpPr/>
+          <p:nvPr/>
+        </p:nvSpPr>
+        <p:spPr>
+          <a:xfrm>
+            <a:off x="1143000" y="1911096"/>
+            <a:ext cx="6126480" cy="658368"/>
+          </a:xfrm>
+          <a:prstGeom prst="rect">
+            <a:avLst/>
+          </a:prstGeom>
+          <a:noFill/>
+          <a:ln/>
+        </p:spPr>
+        <p:txBody>
+          <a:bodyPr wrap="square" lIns="0" tIns="0" rIns="0" bIns="0" rtlCol="0" anchor="t"/>
+          <a:lstStyle/>
+          <a:p>
+            <a:pPr indent="0" marL="0">
+              <a:buNone/>
+            </a:pPr>
+            <a:r>
+              <a:rPr lang="en-US" sz="1100" b="1" dirty="0">
+                <a:solidFill>
+                  <a:srgbClr val="0B3D3D"/>
+                </a:solidFill>
+                <a:latin typeface="Calibri" pitchFamily="34" charset="0"/>
+                <a:ea typeface="Calibri" pitchFamily="34" charset="-122"/>
+                <a:cs typeface="Calibri" pitchFamily="34" charset="-120"/>
+              </a:rPr>
+              <a:t>Windowed write   </a:t>
+            </a:r>
+            <a:pPr indent="0" marL="0">
+              <a:buNone/>
+            </a:pPr>
+            <a:r>
+              <a:rPr lang="en-US" sz="1100" dirty="0">
+                <a:solidFill>
+                  <a:srgbClr val="1A2E2E"/>
+                </a:solidFill>
+                <a:latin typeface="Calibri" pitchFamily="34" charset="0"/>
+                <a:ea typeface="Calibri" pitchFamily="34" charset="-122"/>
+                <a:cs typeface="Calibri" pitchFamily="34" charset="-120"/>
+              </a:rPr>
+              <a:t>From the ingestion pipeline, write batches of raw records as plain objects into the landing bucket using simple static credentials — this step never touches a catalog client, so the credential class that fails for direct writes works fine here.</a:t>
+            </a:r>
+            <a:endParaRPr lang="en-US" sz="1100" dirty="0"/>
+          </a:p>
+        </p:txBody>
+      </p:sp>
+      <p:sp>
+        <p:nvSpPr>
+          <p:cNvPr id="11" name="Shape 9"/>
+          <p:cNvSpPr/>
+          <p:nvPr/>
+        </p:nvSpPr>
+        <p:spPr>
+          <a:xfrm>
+            <a:off x="594360" y="2660904"/>
+            <a:ext cx="384048" cy="384048"/>
+          </a:xfrm>
+          <a:prstGeom prst="ellipse">
+            <a:avLst/>
+          </a:prstGeom>
+          <a:solidFill>
+            <a:srgbClr val="0F5C56"/>
+          </a:solidFill>
+          <a:ln w="12700">
+            <a:solidFill>
+              <a:srgbClr val="0F5C56"/>
+            </a:solidFill>
+            <a:prstDash val="solid"/>
+          </a:ln>
+        </p:spPr>
+      </p:sp>
+      <p:sp>
+        <p:nvSpPr>
+          <p:cNvPr id="12" name="Text 10"/>
+          <p:cNvSpPr/>
+          <p:nvPr/>
+        </p:nvSpPr>
+        <p:spPr>
+          <a:xfrm>
+            <a:off x="594360" y="2660904"/>
+            <a:ext cx="384048" cy="384048"/>
+          </a:xfrm>
+          <a:prstGeom prst="rect">
+            <a:avLst/>
+          </a:prstGeom>
+          <a:noFill/>
+          <a:ln/>
+        </p:spPr>
+        <p:txBody>
+          <a:bodyPr wrap="square" lIns="0" tIns="0" rIns="0" bIns="0" rtlCol="0" anchor="ctr"/>
+          <a:lstStyle/>
+          <a:p>
+            <a:pPr algn="ctr" indent="0" marL="0">
+              <a:buNone/>
+            </a:pPr>
+            <a:r>
+              <a:rPr lang="en-US" sz="1300" b="1" dirty="0">
+                <a:solidFill>
+                  <a:srgbClr val="FFFFFF"/>
+                </a:solidFill>
+                <a:latin typeface="Cambria" pitchFamily="34" charset="0"/>
+                <a:ea typeface="Cambria" pitchFamily="34" charset="-122"/>
+                <a:cs typeface="Cambria" pitchFamily="34" charset="-120"/>
+              </a:rPr>
+              <a:t>3</a:t>
+            </a:r>
+            <a:endParaRPr lang="en-US" sz="1300" dirty="0"/>
+          </a:p>
+        </p:txBody>
+      </p:sp>
+      <p:sp>
+        <p:nvSpPr>
+          <p:cNvPr id="13" name="Text 11"/>
+          <p:cNvSpPr/>
+          <p:nvPr/>
+        </p:nvSpPr>
+        <p:spPr>
+          <a:xfrm>
+            <a:off x="1143000" y="2606040"/>
+            <a:ext cx="6126480" cy="658368"/>
+          </a:xfrm>
+          <a:prstGeom prst="rect">
+            <a:avLst/>
+          </a:prstGeom>
+          <a:noFill/>
+          <a:ln/>
+        </p:spPr>
+        <p:txBody>
+          <a:bodyPr wrap="square" lIns="0" tIns="0" rIns="0" bIns="0" rtlCol="0" anchor="t"/>
+          <a:lstStyle/>
+          <a:p>
+            <a:pPr indent="0" marL="0">
+              <a:buNone/>
+            </a:pPr>
+            <a:r>
+              <a:rPr lang="en-US" sz="1100" b="1" dirty="0">
+                <a:solidFill>
+                  <a:srgbClr val="0B3D3D"/>
+                </a:solidFill>
+                <a:latin typeface="Calibri" pitchFamily="34" charset="0"/>
+                <a:ea typeface="Calibri" pitchFamily="34" charset="-122"/>
+                <a:cs typeface="Calibri" pitchFamily="34" charset="-120"/>
+              </a:rPr>
+              <a:t>Promotion identity   </a:t>
+            </a:r>
+            <a:pPr indent="0" marL="0">
+              <a:buNone/>
+            </a:pPr>
+            <a:r>
+              <a:rPr lang="en-US" sz="1100" dirty="0">
+                <a:solidFill>
+                  <a:srgbClr val="1A2E2E"/>
+                </a:solidFill>
+                <a:latin typeface="Calibri" pitchFamily="34" charset="0"/>
+                <a:ea typeface="Calibri" pitchFamily="34" charset="-122"/>
+                <a:cs typeface="Calibri" pitchFamily="34" charset="-120"/>
+              </a:rPr>
+              <a:t>On the target cloud, create a compute job (Spark-based) running under its own native identity — no credentials of any kind embedded in the job.</a:t>
+            </a:r>
+            <a:endParaRPr lang="en-US" sz="1100" dirty="0"/>
+          </a:p>
+        </p:txBody>
+      </p:sp>
+      <p:sp>
+        <p:nvSpPr>
+          <p:cNvPr id="14" name="Shape 12"/>
+          <p:cNvSpPr/>
+          <p:nvPr/>
+        </p:nvSpPr>
+        <p:spPr>
+          <a:xfrm>
+            <a:off x="594360" y="3355848"/>
+            <a:ext cx="384048" cy="384048"/>
+          </a:xfrm>
+          <a:prstGeom prst="ellipse">
+            <a:avLst/>
+          </a:prstGeom>
+          <a:solidFill>
+            <a:srgbClr val="0F5C56"/>
+          </a:solidFill>
+          <a:ln w="12700">
+            <a:solidFill>
+              <a:srgbClr val="0F5C56"/>
+            </a:solidFill>
+            <a:prstDash val="solid"/>
+          </a:ln>
+        </p:spPr>
+      </p:sp>
+      <p:sp>
+        <p:nvSpPr>
+          <p:cNvPr id="15" name="Text 13"/>
+          <p:cNvSpPr/>
+          <p:nvPr/>
+        </p:nvSpPr>
+        <p:spPr>
+          <a:xfrm>
+            <a:off x="594360" y="3355848"/>
+            <a:ext cx="384048" cy="384048"/>
+          </a:xfrm>
+          <a:prstGeom prst="rect">
+            <a:avLst/>
+          </a:prstGeom>
+          <a:noFill/>
+          <a:ln/>
+        </p:spPr>
+        <p:txBody>
+          <a:bodyPr wrap="square" lIns="0" tIns="0" rIns="0" bIns="0" rtlCol="0" anchor="ctr"/>
+          <a:lstStyle/>
+          <a:p>
+            <a:pPr algn="ctr" indent="0" marL="0">
+              <a:buNone/>
+            </a:pPr>
+            <a:r>
+              <a:rPr lang="en-US" sz="1300" b="1" dirty="0">
+                <a:solidFill>
+                  <a:srgbClr val="FFFFFF"/>
+                </a:solidFill>
+                <a:latin typeface="Cambria" pitchFamily="34" charset="0"/>
+                <a:ea typeface="Cambria" pitchFamily="34" charset="-122"/>
+                <a:cs typeface="Cambria" pitchFamily="34" charset="-120"/>
+              </a:rPr>
+              <a:t>4</a:t>
+            </a:r>
+            <a:endParaRPr lang="en-US" sz="1300" dirty="0"/>
+          </a:p>
+        </p:txBody>
+      </p:sp>
+      <p:sp>
+        <p:nvSpPr>
+          <p:cNvPr id="16" name="Text 14"/>
+          <p:cNvSpPr/>
+          <p:nvPr/>
+        </p:nvSpPr>
+        <p:spPr>
+          <a:xfrm>
+            <a:off x="1143000" y="3300984"/>
+            <a:ext cx="6126480" cy="658368"/>
+          </a:xfrm>
+          <a:prstGeom prst="rect">
+            <a:avLst/>
+          </a:prstGeom>
+          <a:noFill/>
+          <a:ln/>
+        </p:spPr>
+        <p:txBody>
+          <a:bodyPr wrap="square" lIns="0" tIns="0" rIns="0" bIns="0" rtlCol="0" anchor="t"/>
+          <a:lstStyle/>
+          <a:p>
+            <a:pPr indent="0" marL="0">
+              <a:buNone/>
+            </a:pPr>
+            <a:r>
+              <a:rPr lang="en-US" sz="1100" b="1" dirty="0">
+                <a:solidFill>
+                  <a:srgbClr val="0B3D3D"/>
+                </a:solidFill>
+                <a:latin typeface="Calibri" pitchFamily="34" charset="0"/>
+                <a:ea typeface="Calibri" pitchFamily="34" charset="-122"/>
+                <a:cs typeface="Calibri" pitchFamily="34" charset="-120"/>
+              </a:rPr>
+              <a:t>Promotion job   </a:t>
+            </a:r>
+            <a:pPr indent="0" marL="0">
+              <a:buNone/>
+            </a:pPr>
+            <a:r>
+              <a:rPr lang="en-US" sz="1100" dirty="0">
+                <a:solidFill>
+                  <a:srgbClr val="1A2E2E"/>
+                </a:solidFill>
+                <a:latin typeface="Calibri" pitchFamily="34" charset="0"/>
+                <a:ea typeface="Calibri" pitchFamily="34" charset="-122"/>
+                <a:cs typeface="Calibri" pitchFamily="34" charset="-120"/>
+              </a:rPr>
+              <a:t>The job reads the landing zone, creates/updates the destination table through the target catalog, and commits — this is the only place a catalog write happens.</a:t>
+            </a:r>
+            <a:endParaRPr lang="en-US" sz="1100" dirty="0"/>
+          </a:p>
+        </p:txBody>
+      </p:sp>
+      <p:sp>
+        <p:nvSpPr>
+          <p:cNvPr id="17" name="Shape 15"/>
+          <p:cNvSpPr/>
+          <p:nvPr/>
+        </p:nvSpPr>
+        <p:spPr>
+          <a:xfrm>
+            <a:off x="594360" y="4050792"/>
+            <a:ext cx="384048" cy="384048"/>
+          </a:xfrm>
+          <a:prstGeom prst="ellipse">
+            <a:avLst/>
+          </a:prstGeom>
+          <a:solidFill>
+            <a:srgbClr val="0F5C56"/>
+          </a:solidFill>
+          <a:ln w="12700">
+            <a:solidFill>
+              <a:srgbClr val="0F5C56"/>
+            </a:solidFill>
+            <a:prstDash val="solid"/>
+          </a:ln>
+        </p:spPr>
+      </p:sp>
+      <p:sp>
+        <p:nvSpPr>
+          <p:cNvPr id="18" name="Text 16"/>
+          <p:cNvSpPr/>
+          <p:nvPr/>
+        </p:nvSpPr>
+        <p:spPr>
+          <a:xfrm>
+            <a:off x="594360" y="4050792"/>
+            <a:ext cx="384048" cy="384048"/>
+          </a:xfrm>
+          <a:prstGeom prst="rect">
+            <a:avLst/>
+          </a:prstGeom>
+          <a:noFill/>
+          <a:ln/>
+        </p:spPr>
+        <p:txBody>
+          <a:bodyPr wrap="square" lIns="0" tIns="0" rIns="0" bIns="0" rtlCol="0" anchor="ctr"/>
+          <a:lstStyle/>
+          <a:p>
+            <a:pPr algn="ctr" indent="0" marL="0">
+              <a:buNone/>
+            </a:pPr>
+            <a:r>
+              <a:rPr lang="en-US" sz="1300" b="1" dirty="0">
+                <a:solidFill>
+                  <a:srgbClr val="FFFFFF"/>
+                </a:solidFill>
+                <a:latin typeface="Cambria" pitchFamily="34" charset="0"/>
+                <a:ea typeface="Cambria" pitchFamily="34" charset="-122"/>
+                <a:cs typeface="Cambria" pitchFamily="34" charset="-120"/>
+              </a:rPr>
+              <a:t>5</a:t>
+            </a:r>
+            <a:endParaRPr lang="en-US" sz="1300" dirty="0"/>
+          </a:p>
+        </p:txBody>
+      </p:sp>
+      <p:sp>
+        <p:nvSpPr>
+          <p:cNvPr id="19" name="Text 17"/>
+          <p:cNvSpPr/>
+          <p:nvPr/>
+        </p:nvSpPr>
+        <p:spPr>
+          <a:xfrm>
+            <a:off x="1143000" y="3995928"/>
+            <a:ext cx="6126480" cy="658368"/>
+          </a:xfrm>
+          <a:prstGeom prst="rect">
+            <a:avLst/>
+          </a:prstGeom>
+          <a:noFill/>
+          <a:ln/>
+        </p:spPr>
+        <p:txBody>
+          <a:bodyPr wrap="square" lIns="0" tIns="0" rIns="0" bIns="0" rtlCol="0" anchor="t"/>
+          <a:lstStyle/>
+          <a:p>
+            <a:pPr indent="0" marL="0">
+              <a:buNone/>
+            </a:pPr>
+            <a:r>
+              <a:rPr lang="en-US" sz="1100" b="1" dirty="0">
+                <a:solidFill>
+                  <a:srgbClr val="0B3D3D"/>
+                </a:solidFill>
+                <a:latin typeface="Calibri" pitchFamily="34" charset="0"/>
+                <a:ea typeface="Calibri" pitchFamily="34" charset="-122"/>
+                <a:cs typeface="Calibri" pitchFamily="34" charset="-120"/>
+              </a:rPr>
+              <a:t>Schedule + verify   </a:t>
+            </a:r>
+            <a:pPr indent="0" marL="0">
+              <a:buNone/>
+            </a:pPr>
+            <a:r>
+              <a:rPr lang="en-US" sz="1100" dirty="0">
+                <a:solidFill>
+                  <a:srgbClr val="1A2E2E"/>
+                </a:solidFill>
+                <a:latin typeface="Calibri" pitchFamily="34" charset="0"/>
+                <a:ea typeface="Calibri" pitchFamily="34" charset="-122"/>
+                <a:cs typeface="Calibri" pitchFamily="34" charset="-120"/>
+              </a:rPr>
+              <a:t>Run the promotion job on a schedule (or trigger it on file arrival); verify row counts and aggregates against the source after each run.</a:t>
+            </a:r>
+            <a:endParaRPr lang="en-US" sz="1100" dirty="0"/>
+          </a:p>
+        </p:txBody>
+      </p:sp>
+      <p:sp>
+        <p:nvSpPr>
+          <p:cNvPr id="20" name="Shape 18"/>
+          <p:cNvSpPr/>
+          <p:nvPr/>
+        </p:nvSpPr>
+        <p:spPr>
+          <a:xfrm>
+            <a:off x="7452360" y="1234440"/>
+            <a:ext cx="4206240" cy="3566160"/>
+          </a:xfrm>
+          <a:prstGeom prst="roundRect">
+            <a:avLst>
+              <a:gd name="adj" fmla="val 1282"/>
+            </a:avLst>
+          </a:prstGeom>
+          <a:solidFill>
+            <a:srgbClr val="F4F4F3"/>
+          </a:solidFill>
+          <a:ln w="15875">
+            <a:solidFill>
+              <a:srgbClr val="D8D8D6"/>
+            </a:solidFill>
+            <a:prstDash val="solid"/>
+          </a:ln>
+        </p:spPr>
+      </p:sp>
+      <p:sp>
+        <p:nvSpPr>
+          <p:cNvPr id="21" name="Text 19"/>
+          <p:cNvSpPr/>
+          <p:nvPr/>
+        </p:nvSpPr>
+        <p:spPr>
+          <a:xfrm>
+            <a:off x="7680960" y="1371600"/>
+            <a:ext cx="3749040" cy="274320"/>
+          </a:xfrm>
+          <a:prstGeom prst="rect">
+            <a:avLst/>
+          </a:prstGeom>
+          <a:noFill/>
+          <a:ln/>
+        </p:spPr>
+        <p:txBody>
+          <a:bodyPr wrap="square" lIns="0" tIns="0" rIns="0" bIns="0" rtlCol="0" anchor="ctr"/>
+          <a:lstStyle/>
+          <a:p>
+            <a:pPr indent="0" marL="0">
+              <a:buNone/>
+            </a:pPr>
+            <a:r>
+              <a:rPr lang="en-US" sz="1250" b="1" dirty="0">
+                <a:solidFill>
+                  <a:srgbClr val="C1502E"/>
+                </a:solidFill>
+                <a:latin typeface="Calibri" pitchFamily="34" charset="0"/>
+                <a:ea typeface="Calibri" pitchFamily="34" charset="-122"/>
+                <a:cs typeface="Calibri" pitchFamily="34" charset="-120"/>
+              </a:rPr>
+              <a:t>Sharp edges</a:t>
+            </a:r>
+            <a:endParaRPr lang="en-US" sz="1250" dirty="0"/>
+          </a:p>
+        </p:txBody>
+      </p:sp>
+      <p:sp>
+        <p:nvSpPr>
+          <p:cNvPr id="22" name="Text 20"/>
+          <p:cNvSpPr/>
+          <p:nvPr/>
+        </p:nvSpPr>
+        <p:spPr>
+          <a:xfrm>
+            <a:off x="7680960" y="1719072"/>
+            <a:ext cx="3749040" cy="2971800"/>
+          </a:xfrm>
+          <a:prstGeom prst="rect">
+            <a:avLst/>
+          </a:prstGeom>
+          <a:noFill/>
+          <a:ln/>
+        </p:spPr>
+        <p:txBody>
+          <a:bodyPr wrap="square" lIns="0" tIns="0" rIns="0" bIns="0" rtlCol="0" anchor="t"/>
+          <a:lstStyle/>
+          <a:p>
+            <a:pPr marL="342900" indent="-342900">
+              <a:spcAft>
+                <a:spcPts val="600"/>
+              </a:spcAft>
+              <a:buSzPct val="100000"/>
+              <a:buChar char="•"/>
+            </a:pPr>
+            <a:r>
+              <a:rPr lang="en-US" sz="950" dirty="0">
+                <a:solidFill>
+                  <a:srgbClr val="1A2E2E"/>
+                </a:solidFill>
+                <a:latin typeface="Calibri" pitchFamily="34" charset="0"/>
+                <a:ea typeface="Calibri" pitchFamily="34" charset="-122"/>
+                <a:cs typeface="Calibri" pitchFamily="34" charset="-120"/>
+              </a:rPr>
+              <a:t>The pipeline framework's own built-in file-writing transform failed twice, independently, crossing cloud storage boundaries — a hand-rolled writer using the plain object-storage client was the reliable fix</a:t>
+            </a:r>
+            <a:endParaRPr lang="en-US" sz="950" dirty="0"/>
+          </a:p>
+          <a:p>
+            <a:pPr marL="342900" indent="-342900">
+              <a:spcAft>
+                <a:spcPts val="600"/>
+              </a:spcAft>
+              <a:buSzPct val="100000"/>
+              <a:buChar char="•"/>
+            </a:pPr>
+            <a:r>
+              <a:rPr lang="en-US" sz="950" dirty="0">
+                <a:solidFill>
+                  <a:srgbClr val="1A2E2E"/>
+                </a:solidFill>
+                <a:latin typeface="Calibri" pitchFamily="34" charset="0"/>
+                <a:ea typeface="Calibri" pitchFamily="34" charset="-122"/>
+                <a:cs typeface="Calibri" pitchFamily="34" charset="-120"/>
+              </a:rPr>
+              <a:t>A dependency available when the pipeline graph is built is not automatically available where the pipeline actually executes — declare runtime dependencies explicitly and separately</a:t>
+            </a:r>
+            <a:endParaRPr lang="en-US" sz="950" dirty="0"/>
+          </a:p>
+          <a:p>
+            <a:pPr marL="342900" indent="-342900">
+              <a:spcAft>
+                <a:spcPts val="600"/>
+              </a:spcAft>
+              <a:buSzPct val="100000"/>
+              <a:buChar char="•"/>
+            </a:pPr>
+            <a:r>
+              <a:rPr lang="en-US" sz="950" dirty="0">
+                <a:solidFill>
+                  <a:srgbClr val="1A2E2E"/>
+                </a:solidFill>
+                <a:latin typeface="Calibri" pitchFamily="34" charset="0"/>
+                <a:ea typeface="Calibri" pitchFamily="34" charset="-122"/>
+                <a:cs typeface="Calibri" pitchFamily="34" charset="-120"/>
+              </a:rPr>
+              <a:t>The pipeline reporting "running" is not proof of progress — silent retry loops log below the severity level a status check typically watches; monitor data arrival directly</a:t>
+            </a:r>
+            <a:endParaRPr lang="en-US" sz="950" dirty="0"/>
+          </a:p>
+          <a:p>
+            <a:pPr marL="342900" indent="-342900">
+              <a:spcAft>
+                <a:spcPts val="600"/>
+              </a:spcAft>
+              <a:buSzPct val="100000"/>
+              <a:buChar char="•"/>
+            </a:pPr>
+            <a:r>
+              <a:rPr lang="en-US" sz="950" dirty="0">
+                <a:solidFill>
+                  <a:srgbClr val="1A2E2E"/>
+                </a:solidFill>
+                <a:latin typeface="Calibri" pitchFamily="34" charset="0"/>
+                <a:ea typeface="Calibri" pitchFamily="34" charset="-122"/>
+                <a:cs typeface="Calibri" pitchFamily="34" charset="-120"/>
+              </a:rPr>
+              <a:t>Direct-write (Runbook C1) was later confirmed to fail for this framework specifically — a dependency-version conflict inside its own bundled target-cloud SDK, not fixable from configuration — so this two-step split is required, not optional, for this engine</a:t>
+            </a:r>
+            <a:endParaRPr lang="en-US" sz="950" dirty="0"/>
+          </a:p>
+        </p:txBody>
+      </p:sp>
+      <p:sp>
+        <p:nvSpPr>
+          <p:cNvPr id="23" name="Text 21"/>
+          <p:cNvSpPr/>
+          <p:nvPr/>
+        </p:nvSpPr>
+        <p:spPr>
+          <a:xfrm>
+            <a:off x="548640" y="4892040"/>
+            <a:ext cx="11109960" cy="548640"/>
+          </a:xfrm>
+          <a:prstGeom prst="rect">
+            <a:avLst/>
+          </a:prstGeom>
+          <a:noFill/>
+          <a:ln/>
+        </p:spPr>
+        <p:txBody>
+          <a:bodyPr wrap="square" lIns="0" tIns="0" rIns="0" bIns="0" rtlCol="0" anchor="t"/>
+          <a:lstStyle/>
+          <a:p>
+            <a:pPr indent="0" marL="0">
+              <a:buNone/>
+            </a:pPr>
+            <a:r>
+              <a:rPr lang="en-US" sz="1050" i="1" dirty="0">
+                <a:solidFill>
+                  <a:srgbClr val="5B6B6B"/>
+                </a:solidFill>
+                <a:latin typeface="Calibri" pitchFamily="34" charset="0"/>
+                <a:ea typeface="Calibri" pitchFamily="34" charset="-122"/>
+                <a:cs typeface="Calibri" pitchFamily="34" charset="-120"/>
+              </a:rPr>
+              <a:t>Confirmed working end-to-end 2026-07-17: landing write ~1 minute, promotion job ~80 seconds, reconciled exactly against source.</a:t>
+            </a:r>
+            <a:endParaRPr lang="en-US" sz="1050" dirty="0"/>
+          </a:p>
+        </p:txBody>
+      </p:sp>
+    </p:spTree>
+  </p:cSld>
+  <p:clrMapOvr>
+    <a:masterClrMapping/>
+  </p:clrMapOvr>
+</p:sld>
+</file>
+
+<file path=ppt/slides/slide25.xml><?xml version="1.0" encoding="utf-8"?>
+<p:sld xmlns:a="http://schemas.openxmlformats.org/drawingml/2006/main" xmlns:r="http://schemas.openxmlformats.org/officeDocument/2006/relationships" xmlns:p="http://schemas.openxmlformats.org/presentationml/2006/main">
+  <p:cSld name="Slide 25">
+    <p:bg>
+      <p:bgPr>
+        <a:solidFill>
           <a:srgbClr val="0A2A2A"/>
         </a:solidFill>
       </p:bgPr>
@@ -12015,7 +16362,7 @@
                 <a:ea typeface="Cambria" pitchFamily="34" charset="-122"/>
                 <a:cs typeface="Cambria" pitchFamily="34" charset="-120"/>
               </a:rPr>
-              <a:t>Pattern C — Direct-Write via Landing Zone</a:t>
+              <a:t>Pattern C — Direct-Write to the Target Cloud</a:t>
             </a:r>
             <a:endParaRPr lang="en-US" sz="2800" dirty="0"/>
           </a:p>
@@ -12054,7 +16401,7 @@
                 <a:ea typeface="Calibri" pitchFamily="34" charset="-122"/>
                 <a:cs typeface="Calibri" pitchFamily="34" charset="-120"/>
               </a:rPr>
-              <a:t>Ingestion writes raw bytes into the target cloud; native compute promotes them to a table</a:t>
+              <a:t>Same goal, two implementations — the ingestion engine decides which one is possible</a:t>
             </a:r>
             <a:endParaRPr lang="en-US" sz="1400" dirty="0"/>
           </a:p>
@@ -12107,12 +16454,12 @@
         </p:nvSpPr>
         <p:spPr>
           <a:xfrm>
-            <a:off x="548640" y="1234440"/>
-            <a:ext cx="11109960" cy="3063240"/>
+            <a:off x="548640" y="1188720"/>
+            <a:ext cx="11109960" cy="1280160"/>
           </a:xfrm>
           <a:prstGeom prst="roundRect">
             <a:avLst>
-              <a:gd name="adj" fmla="val 1493"/>
+              <a:gd name="adj" fmla="val 3571"/>
             </a:avLst>
           </a:prstGeom>
           <a:solidFill>
@@ -12128,18 +16475,57 @@
       </p:sp>
       <p:sp>
         <p:nvSpPr>
-          <p:cNvPr id="6" name="Shape 4"/>
-          <p:cNvSpPr/>
-          <p:nvPr/>
-        </p:nvSpPr>
-        <p:spPr>
-          <a:xfrm>
-            <a:off x="777240" y="2331720"/>
-            <a:ext cx="1965960" cy="777240"/>
+          <p:cNvPr id="6" name="Text 4"/>
+          <p:cNvSpPr/>
+          <p:nvPr/>
+        </p:nvSpPr>
+        <p:spPr>
+          <a:xfrm>
+            <a:off x="777240" y="1280160"/>
+            <a:ext cx="10607040" cy="320040"/>
+          </a:xfrm>
+          <a:prstGeom prst="rect">
+            <a:avLst/>
+          </a:prstGeom>
+          <a:noFill/>
+          <a:ln/>
+        </p:spPr>
+        <p:txBody>
+          <a:bodyPr wrap="square" lIns="0" tIns="0" rIns="0" bIns="0" rtlCol="0" anchor="ctr"/>
+          <a:lstStyle/>
+          <a:p>
+            <a:pPr indent="0" marL="0">
+              <a:buNone/>
+            </a:pPr>
+            <a:r>
+              <a:rPr lang="en-US" sz="1250" b="1" dirty="0">
+                <a:solidFill>
+                  <a:srgbClr val="0B3D3D"/>
+                </a:solidFill>
+                <a:latin typeface="Calibri" pitchFamily="34" charset="0"/>
+                <a:ea typeface="Calibri" pitchFamily="34" charset="-122"/>
+                <a:cs typeface="Calibri" pitchFamily="34" charset="-120"/>
+              </a:rPr>
+              <a:t>If ingestion runs on a general-purpose SQL/Spark engine</a:t>
+            </a:r>
+            <a:endParaRPr lang="en-US" sz="1250" dirty="0"/>
+          </a:p>
+        </p:txBody>
+      </p:sp>
+      <p:sp>
+        <p:nvSpPr>
+          <p:cNvPr id="7" name="Shape 5"/>
+          <p:cNvSpPr/>
+          <p:nvPr/>
+        </p:nvSpPr>
+        <p:spPr>
+          <a:xfrm>
+            <a:off x="777240" y="1691640"/>
+            <a:ext cx="3017520" cy="566928"/>
           </a:xfrm>
           <a:prstGeom prst="roundRect">
             <a:avLst>
-              <a:gd name="adj" fmla="val 5882"/>
+              <a:gd name="adj" fmla="val 8065"/>
             </a:avLst>
           </a:prstGeom>
           <a:solidFill>
@@ -12155,30 +16541,30 @@
       </p:sp>
       <p:sp>
         <p:nvSpPr>
-          <p:cNvPr id="7" name="Text 5"/>
-          <p:cNvSpPr/>
-          <p:nvPr/>
-        </p:nvSpPr>
-        <p:spPr>
-          <a:xfrm>
-            <a:off x="777240" y="2331720"/>
-            <a:ext cx="1965960" cy="777240"/>
-          </a:xfrm>
-          <a:prstGeom prst="rect">
-            <a:avLst/>
-          </a:prstGeom>
-          <a:noFill/>
-          <a:ln/>
-        </p:spPr>
-        <p:txBody>
-          <a:bodyPr wrap="square" lIns="635" tIns="635" rIns="635" bIns="635" rtlCol="0" anchor="ctr"/>
+          <p:cNvPr id="8" name="Text 6"/>
+          <p:cNvSpPr/>
+          <p:nvPr/>
+        </p:nvSpPr>
+        <p:spPr>
+          <a:xfrm>
+            <a:off x="777240" y="1691640"/>
+            <a:ext cx="3017520" cy="566928"/>
+          </a:xfrm>
+          <a:prstGeom prst="rect">
+            <a:avLst/>
+          </a:prstGeom>
+          <a:noFill/>
+          <a:ln/>
+        </p:spPr>
+        <p:txBody>
+          <a:bodyPr wrap="square" lIns="508" tIns="508" rIns="508" bIns="508" rtlCol="0" anchor="ctr"/>
           <a:lstStyle/>
           <a:p>
             <a:pPr algn="ctr" indent="0" marL="0">
               <a:buNone/>
             </a:pPr>
             <a:r>
-              <a:rPr lang="en-US" sz="1050" b="1" dirty="0">
+              <a:rPr lang="en-US" sz="1000" b="1" dirty="0">
                 <a:solidFill>
                   <a:srgbClr val="0B3D3D"/>
                 </a:solidFill>
@@ -12186,16 +16572,16 @@
                 <a:ea typeface="Calibri" pitchFamily="34" charset="-122"/>
                 <a:cs typeface="Calibri" pitchFamily="34" charset="-120"/>
               </a:rPr>
-              <a:t>Ingestion Pipeline</a:t>
-            </a:r>
-            <a:endParaRPr lang="en-US" sz="1050" dirty="0"/>
+              <a:t>Ingestion Engine</a:t>
+            </a:r>
+            <a:endParaRPr lang="en-US" sz="1000" dirty="0"/>
           </a:p>
           <a:p>
             <a:pPr algn="ctr" indent="0" marL="0">
               <a:buNone/>
             </a:pPr>
             <a:r>
-              <a:rPr lang="en-US" sz="1050" b="1" dirty="0">
+              <a:rPr lang="en-US" sz="1000" b="1" dirty="0">
                 <a:solidFill>
                   <a:srgbClr val="0B3D3D"/>
                 </a:solidFill>
@@ -12205,24 +16591,180 @@
               </a:rPr>
               <a:t>(source cloud compute)</a:t>
             </a:r>
-            <a:endParaRPr lang="en-US" sz="1050" dirty="0"/>
-          </a:p>
-        </p:txBody>
-      </p:sp>
-      <p:sp>
-        <p:nvSpPr>
-          <p:cNvPr id="8" name="Shape 6"/>
-          <p:cNvSpPr/>
-          <p:nvPr/>
-        </p:nvSpPr>
-        <p:spPr>
-          <a:xfrm>
-            <a:off x="3063240" y="2331720"/>
-            <a:ext cx="1965960" cy="777240"/>
+            <a:endParaRPr lang="en-US" sz="1000" dirty="0"/>
+          </a:p>
+        </p:txBody>
+      </p:sp>
+      <p:sp>
+        <p:nvSpPr>
+          <p:cNvPr id="9" name="Shape 7"/>
+          <p:cNvSpPr/>
+          <p:nvPr/>
+        </p:nvSpPr>
+        <p:spPr>
+          <a:xfrm>
+            <a:off x="3794760" y="1975104"/>
+            <a:ext cx="640080" cy="0"/>
+          </a:xfrm>
+          <a:prstGeom prst="line">
+            <a:avLst/>
+          </a:prstGeom>
+          <a:noFill/>
+          <a:ln w="25400">
+            <a:solidFill>
+              <a:srgbClr val="0F5C56"/>
+            </a:solidFill>
+            <a:prstDash val="solid"/>
+            <a:tailEnd type="triangle"/>
+          </a:ln>
+        </p:spPr>
+      </p:sp>
+      <p:sp>
+        <p:nvSpPr>
+          <p:cNvPr id="10" name="Shape 8"/>
+          <p:cNvSpPr/>
+          <p:nvPr/>
+        </p:nvSpPr>
+        <p:spPr>
+          <a:xfrm>
+            <a:off x="4434840" y="1691640"/>
+            <a:ext cx="6995160" cy="566928"/>
           </a:xfrm>
           <a:prstGeom prst="roundRect">
             <a:avLst>
-              <a:gd name="adj" fmla="val 5882"/>
+              <a:gd name="adj" fmla="val 8065"/>
+            </a:avLst>
+          </a:prstGeom>
+          <a:solidFill>
+            <a:srgbClr val="A8F0EE"/>
+          </a:solidFill>
+          <a:ln w="15875">
+            <a:solidFill>
+              <a:srgbClr val="A8F0EE"/>
+            </a:solidFill>
+            <a:prstDash val="solid"/>
+          </a:ln>
+        </p:spPr>
+      </p:sp>
+      <p:sp>
+        <p:nvSpPr>
+          <p:cNvPr id="11" name="Text 9"/>
+          <p:cNvSpPr/>
+          <p:nvPr/>
+        </p:nvSpPr>
+        <p:spPr>
+          <a:xfrm>
+            <a:off x="4434840" y="1691640"/>
+            <a:ext cx="6995160" cy="566928"/>
+          </a:xfrm>
+          <a:prstGeom prst="rect">
+            <a:avLst/>
+          </a:prstGeom>
+          <a:noFill/>
+          <a:ln/>
+        </p:spPr>
+        <p:txBody>
+          <a:bodyPr wrap="square" lIns="508" tIns="508" rIns="508" bIns="508" rtlCol="0" anchor="ctr"/>
+          <a:lstStyle/>
+          <a:p>
+            <a:pPr algn="ctr" indent="0" marL="0">
+              <a:buNone/>
+            </a:pPr>
+            <a:r>
+              <a:rPr lang="en-US" sz="1050" b="1" dirty="0">
+                <a:solidFill>
+                  <a:srgbClr val="0B3D3D"/>
+                </a:solidFill>
+                <a:latin typeface="Calibri" pitchFamily="34" charset="0"/>
+                <a:ea typeface="Calibri" pitchFamily="34" charset="-122"/>
+                <a:cs typeface="Calibri" pitchFamily="34" charset="-120"/>
+              </a:rPr>
+              <a:t>Iceberg Table, Registered — ONE STEP  (Athena / Redshift / Spark / Snowflake)</a:t>
+            </a:r>
+            <a:endParaRPr lang="en-US" sz="1050" dirty="0"/>
+          </a:p>
+        </p:txBody>
+      </p:sp>
+      <p:sp>
+        <p:nvSpPr>
+          <p:cNvPr id="12" name="Shape 10"/>
+          <p:cNvSpPr/>
+          <p:nvPr/>
+        </p:nvSpPr>
+        <p:spPr>
+          <a:xfrm>
+            <a:off x="548640" y="2606040"/>
+            <a:ext cx="11109960" cy="1508760"/>
+          </a:xfrm>
+          <a:prstGeom prst="roundRect">
+            <a:avLst>
+              <a:gd name="adj" fmla="val 3030"/>
+            </a:avLst>
+          </a:prstGeom>
+          <a:solidFill>
+            <a:srgbClr val="FFFFFF"/>
+          </a:solidFill>
+          <a:ln w="15875">
+            <a:solidFill>
+              <a:srgbClr val="D8D8D6"/>
+            </a:solidFill>
+            <a:prstDash val="solid"/>
+          </a:ln>
+        </p:spPr>
+      </p:sp>
+      <p:sp>
+        <p:nvSpPr>
+          <p:cNvPr id="13" name="Text 11"/>
+          <p:cNvSpPr/>
+          <p:nvPr/>
+        </p:nvSpPr>
+        <p:spPr>
+          <a:xfrm>
+            <a:off x="777240" y="2697480"/>
+            <a:ext cx="10607040" cy="320040"/>
+          </a:xfrm>
+          <a:prstGeom prst="rect">
+            <a:avLst/>
+          </a:prstGeom>
+          <a:noFill/>
+          <a:ln/>
+        </p:spPr>
+        <p:txBody>
+          <a:bodyPr wrap="square" lIns="0" tIns="0" rIns="0" bIns="0" rtlCol="0" anchor="ctr"/>
+          <a:lstStyle/>
+          <a:p>
+            <a:pPr indent="0" marL="0">
+              <a:buNone/>
+            </a:pPr>
+            <a:r>
+              <a:rPr lang="en-US" sz="1250" b="1" dirty="0">
+                <a:solidFill>
+                  <a:srgbClr val="0B3D3D"/>
+                </a:solidFill>
+                <a:latin typeface="Calibri" pitchFamily="34" charset="0"/>
+                <a:ea typeface="Calibri" pitchFamily="34" charset="-122"/>
+                <a:cs typeface="Calibri" pitchFamily="34" charset="-120"/>
+              </a:rPr>
+              <a:t>If ingestion runs on a cross-language streaming/batch framework</a:t>
+            </a:r>
+            <a:endParaRPr lang="en-US" sz="1250" dirty="0"/>
+          </a:p>
+        </p:txBody>
+      </p:sp>
+      <p:sp>
+        <p:nvSpPr>
+          <p:cNvPr id="14" name="Shape 12"/>
+          <p:cNvSpPr/>
+          <p:nvPr/>
+        </p:nvSpPr>
+        <p:spPr>
+          <a:xfrm>
+            <a:off x="777240" y="3108960"/>
+            <a:ext cx="1920240" cy="566928"/>
+          </a:xfrm>
+          <a:prstGeom prst="roundRect">
+            <a:avLst>
+              <a:gd name="adj" fmla="val 8065"/>
             </a:avLst>
           </a:prstGeom>
           <a:solidFill>
@@ -12238,30 +16780,30 @@
       </p:sp>
       <p:sp>
         <p:nvSpPr>
-          <p:cNvPr id="9" name="Text 7"/>
-          <p:cNvSpPr/>
-          <p:nvPr/>
-        </p:nvSpPr>
-        <p:spPr>
-          <a:xfrm>
-            <a:off x="3063240" y="2331720"/>
-            <a:ext cx="1965960" cy="777240"/>
-          </a:xfrm>
-          <a:prstGeom prst="rect">
-            <a:avLst/>
-          </a:prstGeom>
-          <a:noFill/>
-          <a:ln/>
-        </p:spPr>
-        <p:txBody>
-          <a:bodyPr wrap="square" lIns="635" tIns="635" rIns="635" bIns="635" rtlCol="0" anchor="ctr"/>
+          <p:cNvPr id="15" name="Text 13"/>
+          <p:cNvSpPr/>
+          <p:nvPr/>
+        </p:nvSpPr>
+        <p:spPr>
+          <a:xfrm>
+            <a:off x="777240" y="3108960"/>
+            <a:ext cx="1920240" cy="566928"/>
+          </a:xfrm>
+          <a:prstGeom prst="rect">
+            <a:avLst/>
+          </a:prstGeom>
+          <a:noFill/>
+          <a:ln/>
+        </p:spPr>
+        <p:txBody>
+          <a:bodyPr wrap="square" lIns="508" tIns="508" rIns="508" bIns="508" rtlCol="0" anchor="ctr"/>
           <a:lstStyle/>
           <a:p>
             <a:pPr algn="ctr" indent="0" marL="0">
               <a:buNone/>
             </a:pPr>
             <a:r>
-              <a:rPr lang="en-US" sz="1050" b="1" dirty="0">
+              <a:rPr lang="en-US" sz="1000" b="1" dirty="0">
                 <a:solidFill>
                   <a:srgbClr val="0B3D3D"/>
                 </a:solidFill>
@@ -12269,43 +16811,50 @@
                 <a:ea typeface="Calibri" pitchFamily="34" charset="-122"/>
                 <a:cs typeface="Calibri" pitchFamily="34" charset="-120"/>
               </a:rPr>
-              <a:t>Landing Zone</a:t>
-            </a:r>
-            <a:endParaRPr lang="en-US" sz="1050" dirty="0"/>
-          </a:p>
-          <a:p>
-            <a:pPr algn="ctr" indent="0" marL="0">
-              <a:buNone/>
-            </a:pPr>
-            <a:r>
-              <a:rPr lang="en-US" sz="1050" b="1" dirty="0">
-                <a:solidFill>
-                  <a:srgbClr val="0B3D3D"/>
-                </a:solidFill>
-                <a:latin typeface="Calibri" pitchFamily="34" charset="0"/>
-                <a:ea typeface="Calibri" pitchFamily="34" charset="-122"/>
-                <a:cs typeface="Calibri" pitchFamily="34" charset="-120"/>
-              </a:rPr>
-              <a:t>(raw files, target cloud)</a:t>
-            </a:r>
-            <a:endParaRPr lang="en-US" sz="1050" dirty="0"/>
-          </a:p>
-        </p:txBody>
-      </p:sp>
-      <p:sp>
-        <p:nvSpPr>
-          <p:cNvPr id="10" name="Shape 8"/>
-          <p:cNvSpPr/>
-          <p:nvPr/>
-        </p:nvSpPr>
-        <p:spPr>
-          <a:xfrm>
-            <a:off x="5349240" y="2331720"/>
-            <a:ext cx="1965960" cy="777240"/>
+              <a:t>Ingestion Engine</a:t>
+            </a:r>
+            <a:endParaRPr lang="en-US" sz="1000" dirty="0"/>
+          </a:p>
+        </p:txBody>
+      </p:sp>
+      <p:sp>
+        <p:nvSpPr>
+          <p:cNvPr id="16" name="Shape 14"/>
+          <p:cNvSpPr/>
+          <p:nvPr/>
+        </p:nvSpPr>
+        <p:spPr>
+          <a:xfrm>
+            <a:off x="2697480" y="3392424"/>
+            <a:ext cx="365760" cy="0"/>
+          </a:xfrm>
+          <a:prstGeom prst="line">
+            <a:avLst/>
+          </a:prstGeom>
+          <a:noFill/>
+          <a:ln w="25400">
+            <a:solidFill>
+              <a:srgbClr val="0F5C56"/>
+            </a:solidFill>
+            <a:prstDash val="solid"/>
+            <a:tailEnd type="triangle"/>
+          </a:ln>
+        </p:spPr>
+      </p:sp>
+      <p:sp>
+        <p:nvSpPr>
+          <p:cNvPr id="17" name="Shape 15"/>
+          <p:cNvSpPr/>
+          <p:nvPr/>
+        </p:nvSpPr>
+        <p:spPr>
+          <a:xfrm>
+            <a:off x="3063240" y="3108960"/>
+            <a:ext cx="2103120" cy="566928"/>
           </a:xfrm>
           <a:prstGeom prst="roundRect">
             <a:avLst>
-              <a:gd name="adj" fmla="val 5882"/>
+              <a:gd name="adj" fmla="val 8065"/>
             </a:avLst>
           </a:prstGeom>
           <a:solidFill>
@@ -12321,30 +16870,30 @@
       </p:sp>
       <p:sp>
         <p:nvSpPr>
-          <p:cNvPr id="11" name="Text 9"/>
-          <p:cNvSpPr/>
-          <p:nvPr/>
-        </p:nvSpPr>
-        <p:spPr>
-          <a:xfrm>
-            <a:off x="5349240" y="2331720"/>
-            <a:ext cx="1965960" cy="777240"/>
-          </a:xfrm>
-          <a:prstGeom prst="rect">
-            <a:avLst/>
-          </a:prstGeom>
-          <a:noFill/>
-          <a:ln/>
-        </p:spPr>
-        <p:txBody>
-          <a:bodyPr wrap="square" lIns="635" tIns="635" rIns="635" bIns="635" rtlCol="0" anchor="ctr"/>
+          <p:cNvPr id="18" name="Text 16"/>
+          <p:cNvSpPr/>
+          <p:nvPr/>
+        </p:nvSpPr>
+        <p:spPr>
+          <a:xfrm>
+            <a:off x="3063240" y="3108960"/>
+            <a:ext cx="2103120" cy="566928"/>
+          </a:xfrm>
+          <a:prstGeom prst="rect">
+            <a:avLst/>
+          </a:prstGeom>
+          <a:noFill/>
+          <a:ln/>
+        </p:spPr>
+        <p:txBody>
+          <a:bodyPr wrap="square" lIns="508" tIns="508" rIns="508" bIns="508" rtlCol="0" anchor="ctr"/>
           <a:lstStyle/>
           <a:p>
             <a:pPr algn="ctr" indent="0" marL="0">
               <a:buNone/>
             </a:pPr>
             <a:r>
-              <a:rPr lang="en-US" sz="1050" b="1" dirty="0">
+              <a:rPr lang="en-US" sz="1000" b="1" dirty="0">
                 <a:solidFill>
                   <a:srgbClr val="0B3D3D"/>
                 </a:solidFill>
@@ -12352,16 +16901,16 @@
                 <a:ea typeface="Calibri" pitchFamily="34" charset="-122"/>
                 <a:cs typeface="Calibri" pitchFamily="34" charset="-120"/>
               </a:rPr>
-              <a:t>Native Compute</a:t>
-            </a:r>
-            <a:endParaRPr lang="en-US" sz="1050" dirty="0"/>
+              <a:t>Landing Zone</a:t>
+            </a:r>
+            <a:endParaRPr lang="en-US" sz="1000" dirty="0"/>
           </a:p>
           <a:p>
             <a:pPr algn="ctr" indent="0" marL="0">
               <a:buNone/>
             </a:pPr>
             <a:r>
-              <a:rPr lang="en-US" sz="1050" b="1" dirty="0">
+              <a:rPr lang="en-US" sz="1000" b="1" dirty="0">
                 <a:solidFill>
                   <a:srgbClr val="0B3D3D"/>
                 </a:solidFill>
@@ -12369,26 +16918,157 @@
                 <a:ea typeface="Calibri" pitchFamily="34" charset="-122"/>
                 <a:cs typeface="Calibri" pitchFamily="34" charset="-120"/>
               </a:rPr>
-              <a:t>(catalog registration)</a:t>
-            </a:r>
-            <a:endParaRPr lang="en-US" sz="1050" dirty="0"/>
-          </a:p>
-        </p:txBody>
-      </p:sp>
-      <p:sp>
-        <p:nvSpPr>
-          <p:cNvPr id="12" name="Shape 10"/>
-          <p:cNvSpPr/>
-          <p:nvPr/>
-        </p:nvSpPr>
-        <p:spPr>
-          <a:xfrm>
-            <a:off x="7635240" y="2331720"/>
-            <a:ext cx="3566160" cy="777240"/>
+              <a:t>(raw files)</a:t>
+            </a:r>
+            <a:endParaRPr lang="en-US" sz="1000" dirty="0"/>
+          </a:p>
+        </p:txBody>
+      </p:sp>
+      <p:sp>
+        <p:nvSpPr>
+          <p:cNvPr id="19" name="Shape 17"/>
+          <p:cNvSpPr/>
+          <p:nvPr/>
+        </p:nvSpPr>
+        <p:spPr>
+          <a:xfrm>
+            <a:off x="5166360" y="3392424"/>
+            <a:ext cx="365760" cy="0"/>
+          </a:xfrm>
+          <a:prstGeom prst="line">
+            <a:avLst/>
+          </a:prstGeom>
+          <a:noFill/>
+          <a:ln w="25400">
+            <a:solidFill>
+              <a:srgbClr val="0F5C56"/>
+            </a:solidFill>
+            <a:prstDash val="solid"/>
+            <a:tailEnd type="triangle"/>
+          </a:ln>
+        </p:spPr>
+      </p:sp>
+      <p:sp>
+        <p:nvSpPr>
+          <p:cNvPr id="20" name="Shape 18"/>
+          <p:cNvSpPr/>
+          <p:nvPr/>
+        </p:nvSpPr>
+        <p:spPr>
+          <a:xfrm>
+            <a:off x="5532120" y="3108960"/>
+            <a:ext cx="2194560" cy="566928"/>
           </a:xfrm>
           <a:prstGeom prst="roundRect">
             <a:avLst>
-              <a:gd name="adj" fmla="val 5882"/>
+              <a:gd name="adj" fmla="val 8065"/>
+            </a:avLst>
+          </a:prstGeom>
+          <a:solidFill>
+            <a:srgbClr val="F4F4F3"/>
+          </a:solidFill>
+          <a:ln w="15875">
+            <a:solidFill>
+              <a:srgbClr val="0F5C56"/>
+            </a:solidFill>
+            <a:prstDash val="solid"/>
+          </a:ln>
+        </p:spPr>
+      </p:sp>
+      <p:sp>
+        <p:nvSpPr>
+          <p:cNvPr id="21" name="Text 19"/>
+          <p:cNvSpPr/>
+          <p:nvPr/>
+        </p:nvSpPr>
+        <p:spPr>
+          <a:xfrm>
+            <a:off x="5532120" y="3108960"/>
+            <a:ext cx="2194560" cy="566928"/>
+          </a:xfrm>
+          <a:prstGeom prst="rect">
+            <a:avLst/>
+          </a:prstGeom>
+          <a:noFill/>
+          <a:ln/>
+        </p:spPr>
+        <p:txBody>
+          <a:bodyPr wrap="square" lIns="508" tIns="508" rIns="508" bIns="508" rtlCol="0" anchor="ctr"/>
+          <a:lstStyle/>
+          <a:p>
+            <a:pPr algn="ctr" indent="0" marL="0">
+              <a:buNone/>
+            </a:pPr>
+            <a:r>
+              <a:rPr lang="en-US" sz="1000" b="1" dirty="0">
+                <a:solidFill>
+                  <a:srgbClr val="0B3D3D"/>
+                </a:solidFill>
+                <a:latin typeface="Calibri" pitchFamily="34" charset="0"/>
+                <a:ea typeface="Calibri" pitchFamily="34" charset="-122"/>
+                <a:cs typeface="Calibri" pitchFamily="34" charset="-120"/>
+              </a:rPr>
+              <a:t>Native Compute</a:t>
+            </a:r>
+            <a:endParaRPr lang="en-US" sz="1000" dirty="0"/>
+          </a:p>
+          <a:p>
+            <a:pPr algn="ctr" indent="0" marL="0">
+              <a:buNone/>
+            </a:pPr>
+            <a:r>
+              <a:rPr lang="en-US" sz="1000" b="1" dirty="0">
+                <a:solidFill>
+                  <a:srgbClr val="0B3D3D"/>
+                </a:solidFill>
+                <a:latin typeface="Calibri" pitchFamily="34" charset="0"/>
+                <a:ea typeface="Calibri" pitchFamily="34" charset="-122"/>
+                <a:cs typeface="Calibri" pitchFamily="34" charset="-120"/>
+              </a:rPr>
+              <a:t>(promotion job)</a:t>
+            </a:r>
+            <a:endParaRPr lang="en-US" sz="1000" dirty="0"/>
+          </a:p>
+        </p:txBody>
+      </p:sp>
+      <p:sp>
+        <p:nvSpPr>
+          <p:cNvPr id="22" name="Shape 20"/>
+          <p:cNvSpPr/>
+          <p:nvPr/>
+        </p:nvSpPr>
+        <p:spPr>
+          <a:xfrm>
+            <a:off x="7726680" y="3392424"/>
+            <a:ext cx="365760" cy="0"/>
+          </a:xfrm>
+          <a:prstGeom prst="line">
+            <a:avLst/>
+          </a:prstGeom>
+          <a:noFill/>
+          <a:ln w="25400">
+            <a:solidFill>
+              <a:srgbClr val="0F5C56"/>
+            </a:solidFill>
+            <a:prstDash val="solid"/>
+            <a:tailEnd type="triangle"/>
+          </a:ln>
+        </p:spPr>
+      </p:sp>
+      <p:sp>
+        <p:nvSpPr>
+          <p:cNvPr id="23" name="Shape 21"/>
+          <p:cNvSpPr/>
+          <p:nvPr/>
+        </p:nvSpPr>
+        <p:spPr>
+          <a:xfrm>
+            <a:off x="8092440" y="3108960"/>
+            <a:ext cx="3337560" cy="566928"/>
+          </a:xfrm>
+          <a:prstGeom prst="roundRect">
+            <a:avLst>
+              <a:gd name="adj" fmla="val 8065"/>
             </a:avLst>
           </a:prstGeom>
           <a:solidFill>
@@ -12404,30 +17084,30 @@
       </p:sp>
       <p:sp>
         <p:nvSpPr>
-          <p:cNvPr id="13" name="Text 11"/>
-          <p:cNvSpPr/>
-          <p:nvPr/>
-        </p:nvSpPr>
-        <p:spPr>
-          <a:xfrm>
-            <a:off x="7635240" y="2331720"/>
-            <a:ext cx="3566160" cy="777240"/>
-          </a:xfrm>
-          <a:prstGeom prst="rect">
-            <a:avLst/>
-          </a:prstGeom>
-          <a:noFill/>
-          <a:ln/>
-        </p:spPr>
-        <p:txBody>
-          <a:bodyPr wrap="square" lIns="635" tIns="635" rIns="635" bIns="635" rtlCol="0" anchor="ctr"/>
+          <p:cNvPr id="24" name="Text 22"/>
+          <p:cNvSpPr/>
+          <p:nvPr/>
+        </p:nvSpPr>
+        <p:spPr>
+          <a:xfrm>
+            <a:off x="8092440" y="3108960"/>
+            <a:ext cx="3337560" cy="566928"/>
+          </a:xfrm>
+          <a:prstGeom prst="rect">
+            <a:avLst/>
+          </a:prstGeom>
+          <a:noFill/>
+          <a:ln/>
+        </p:spPr>
+        <p:txBody>
+          <a:bodyPr wrap="square" lIns="508" tIns="508" rIns="508" bIns="508" rtlCol="0" anchor="ctr"/>
           <a:lstStyle/>
           <a:p>
             <a:pPr algn="ctr" indent="0" marL="0">
               <a:buNone/>
             </a:pPr>
             <a:r>
-              <a:rPr lang="en-US" sz="1050" b="1" dirty="0">
+              <a:rPr lang="en-US" sz="1000" b="1" dirty="0">
                 <a:solidFill>
                   <a:srgbClr val="0B3D3D"/>
                 </a:solidFill>
@@ -12435,111 +17115,193 @@
                 <a:ea typeface="Calibri" pitchFamily="34" charset="-122"/>
                 <a:cs typeface="Calibri" pitchFamily="34" charset="-120"/>
               </a:rPr>
-              <a:t>Iceberg Table, Registered</a:t>
-            </a:r>
-            <a:endParaRPr lang="en-US" sz="1050" dirty="0"/>
-          </a:p>
-          <a:p>
-            <a:pPr algn="ctr" indent="0" marL="0">
-              <a:buNone/>
-            </a:pPr>
-            <a:r>
-              <a:rPr lang="en-US" sz="1050" b="1" dirty="0">
-                <a:solidFill>
-                  <a:srgbClr val="0B3D3D"/>
-                </a:solidFill>
-                <a:latin typeface="Calibri" pitchFamily="34" charset="0"/>
-                <a:ea typeface="Calibri" pitchFamily="34" charset="-122"/>
-                <a:cs typeface="Calibri" pitchFamily="34" charset="-120"/>
-              </a:rPr>
-              <a:t>(Athena / Redshift / Spark / Snowflake)</a:t>
-            </a:r>
-            <a:endParaRPr lang="en-US" sz="1050" dirty="0"/>
-          </a:p>
-        </p:txBody>
-      </p:sp>
-      <p:sp>
-        <p:nvSpPr>
-          <p:cNvPr id="14" name="Shape 12"/>
-          <p:cNvSpPr/>
-          <p:nvPr/>
-        </p:nvSpPr>
-        <p:spPr>
-          <a:xfrm>
-            <a:off x="2743200" y="2715768"/>
-            <a:ext cx="320040" cy="0"/>
-          </a:xfrm>
-          <a:prstGeom prst="line">
-            <a:avLst/>
-          </a:prstGeom>
-          <a:noFill/>
-          <a:ln w="25400">
+              <a:t>Iceberg Table, Registered — TWO STEPS</a:t>
+            </a:r>
+            <a:endParaRPr lang="en-US" sz="1000" dirty="0"/>
+          </a:p>
+        </p:txBody>
+      </p:sp>
+      <p:sp>
+        <p:nvSpPr>
+          <p:cNvPr id="25" name="Text 23"/>
+          <p:cNvSpPr/>
+          <p:nvPr/>
+        </p:nvSpPr>
+        <p:spPr>
+          <a:xfrm>
+            <a:off x="548640" y="4251960"/>
+            <a:ext cx="11109960" cy="502920"/>
+          </a:xfrm>
+          <a:prstGeom prst="rect">
+            <a:avLst/>
+          </a:prstGeom>
+          <a:noFill/>
+          <a:ln/>
+        </p:spPr>
+        <p:txBody>
+          <a:bodyPr wrap="square" lIns="0" tIns="0" rIns="0" bIns="0" rtlCol="0" anchor="t"/>
+          <a:lstStyle/>
+          <a:p>
+            <a:pPr indent="0" marL="0">
+              <a:buNone/>
+            </a:pPr>
+            <a:r>
+              <a:rPr lang="en-US" sz="1150" i="1" dirty="0">
+                <a:solidFill>
+                  <a:srgbClr val="1A2E2E"/>
+                </a:solidFill>
+                <a:latin typeface="Calibri" pitchFamily="34" charset="0"/>
+                <a:ea typeface="Calibri" pitchFamily="34" charset="-122"/>
+                <a:cs typeface="Calibri" pitchFamily="34" charset="-120"/>
+              </a:rPr>
+              <a:t>Why the split is necessary for the framework variant: its cross-language write path carries an internal dependency-version conflict in the target-cloud SDK bundle, confirmed by testing — not a credential problem, and not fixable from pipeline configuration.</a:t>
+            </a:r>
+            <a:endParaRPr lang="en-US" sz="1150" dirty="0"/>
+          </a:p>
+        </p:txBody>
+      </p:sp>
+      <p:sp>
+        <p:nvSpPr>
+          <p:cNvPr id="26" name="Shape 24"/>
+          <p:cNvSpPr/>
+          <p:nvPr/>
+        </p:nvSpPr>
+        <p:spPr>
+          <a:xfrm>
+            <a:off x="548640" y="4892040"/>
+            <a:ext cx="5349240" cy="1417320"/>
+          </a:xfrm>
+          <a:prstGeom prst="roundRect">
+            <a:avLst>
+              <a:gd name="adj" fmla="val 3226"/>
+            </a:avLst>
+          </a:prstGeom>
+          <a:solidFill>
+            <a:srgbClr val="F4F4F3"/>
+          </a:solidFill>
+          <a:ln w="15875">
             <a:solidFill>
-              <a:srgbClr val="0F5C56"/>
+              <a:srgbClr val="D8D8D6"/>
             </a:solidFill>
             <a:prstDash val="solid"/>
-            <a:tailEnd type="triangle"/>
           </a:ln>
         </p:spPr>
       </p:sp>
       <p:sp>
         <p:nvSpPr>
-          <p:cNvPr id="15" name="Shape 13"/>
-          <p:cNvSpPr/>
-          <p:nvPr/>
-        </p:nvSpPr>
-        <p:spPr>
-          <a:xfrm>
-            <a:off x="5029200" y="2715768"/>
-            <a:ext cx="320040" cy="0"/>
-          </a:xfrm>
-          <a:prstGeom prst="line">
-            <a:avLst/>
-          </a:prstGeom>
-          <a:noFill/>
-          <a:ln w="25400">
+          <p:cNvPr id="27" name="Text 25"/>
+          <p:cNvSpPr/>
+          <p:nvPr/>
+        </p:nvSpPr>
+        <p:spPr>
+          <a:xfrm>
+            <a:off x="777240" y="5010912"/>
+            <a:ext cx="4892040" cy="320040"/>
+          </a:xfrm>
+          <a:prstGeom prst="rect">
+            <a:avLst/>
+          </a:prstGeom>
+          <a:noFill/>
+          <a:ln/>
+        </p:spPr>
+        <p:txBody>
+          <a:bodyPr wrap="square" lIns="0" tIns="0" rIns="0" bIns="0" rtlCol="0" anchor="ctr"/>
+          <a:lstStyle/>
+          <a:p>
+            <a:pPr indent="0" marL="0">
+              <a:buNone/>
+            </a:pPr>
+            <a:r>
+              <a:rPr lang="en-US" sz="1300" b="1" dirty="0">
+                <a:solidFill>
+                  <a:srgbClr val="0B3D3D"/>
+                </a:solidFill>
+                <a:latin typeface="Calibri" pitchFamily="34" charset="0"/>
+                <a:ea typeface="Calibri" pitchFamily="34" charset="-122"/>
+                <a:cs typeface="Calibri" pitchFamily="34" charset="-120"/>
+              </a:rPr>
+              <a:t>Best for</a:t>
+            </a:r>
+            <a:endParaRPr lang="en-US" sz="1300" dirty="0"/>
+          </a:p>
+        </p:txBody>
+      </p:sp>
+      <p:sp>
+        <p:nvSpPr>
+          <p:cNvPr id="28" name="Text 26"/>
+          <p:cNvSpPr/>
+          <p:nvPr/>
+        </p:nvSpPr>
+        <p:spPr>
+          <a:xfrm>
+            <a:off x="777240" y="5349240"/>
+            <a:ext cx="4892040" cy="868680"/>
+          </a:xfrm>
+          <a:prstGeom prst="rect">
+            <a:avLst/>
+          </a:prstGeom>
+          <a:noFill/>
+          <a:ln/>
+        </p:spPr>
+        <p:txBody>
+          <a:bodyPr wrap="square" lIns="0" tIns="0" rIns="0" bIns="0" rtlCol="0" anchor="t"/>
+          <a:lstStyle/>
+          <a:p>
+            <a:pPr indent="0" marL="0">
+              <a:buNone/>
+            </a:pPr>
+            <a:r>
+              <a:rPr lang="en-US" sz="1100" dirty="0">
+                <a:solidFill>
+                  <a:srgbClr val="1A2E2E"/>
+                </a:solidFill>
+                <a:latin typeface="Calibri" pitchFamily="34" charset="0"/>
+                <a:ea typeface="Calibri" pitchFamily="34" charset="-122"/>
+                <a:cs typeface="Calibri" pitchFamily="34" charset="-120"/>
+              </a:rPr>
+              <a:t>New pipelines whose consumers are known to be on the target cloud from day one — write once, in the right place, and skip replication entirely.</a:t>
+            </a:r>
+            <a:endParaRPr lang="en-US" sz="1100" dirty="0"/>
+          </a:p>
+        </p:txBody>
+      </p:sp>
+      <p:sp>
+        <p:nvSpPr>
+          <p:cNvPr id="29" name="Shape 27"/>
+          <p:cNvSpPr/>
+          <p:nvPr/>
+        </p:nvSpPr>
+        <p:spPr>
+          <a:xfrm>
+            <a:off x="6172200" y="4892040"/>
+            <a:ext cx="5349240" cy="1417320"/>
+          </a:xfrm>
+          <a:prstGeom prst="roundRect">
+            <a:avLst>
+              <a:gd name="adj" fmla="val 3226"/>
+            </a:avLst>
+          </a:prstGeom>
+          <a:solidFill>
+            <a:srgbClr val="F4F4F3"/>
+          </a:solidFill>
+          <a:ln w="15875">
             <a:solidFill>
-              <a:srgbClr val="0F5C56"/>
+              <a:srgbClr val="D8D8D6"/>
             </a:solidFill>
             <a:prstDash val="solid"/>
-            <a:tailEnd type="triangle"/>
           </a:ln>
         </p:spPr>
       </p:sp>
       <p:sp>
         <p:nvSpPr>
-          <p:cNvPr id="16" name="Shape 14"/>
-          <p:cNvSpPr/>
-          <p:nvPr/>
-        </p:nvSpPr>
-        <p:spPr>
-          <a:xfrm>
-            <a:off x="7315200" y="2715768"/>
-            <a:ext cx="320040" cy="0"/>
-          </a:xfrm>
-          <a:prstGeom prst="line">
-            <a:avLst/>
-          </a:prstGeom>
-          <a:noFill/>
-          <a:ln w="25400">
-            <a:solidFill>
-              <a:srgbClr val="0F5C56"/>
-            </a:solidFill>
-            <a:prstDash val="solid"/>
-            <a:tailEnd type="triangle"/>
-          </a:ln>
-        </p:spPr>
-      </p:sp>
-      <p:sp>
-        <p:nvSpPr>
-          <p:cNvPr id="17" name="Text 15"/>
-          <p:cNvSpPr/>
-          <p:nvPr/>
-        </p:nvSpPr>
-        <p:spPr>
-          <a:xfrm>
-            <a:off x="2743200" y="1947672"/>
-            <a:ext cx="2286000" cy="320040"/>
+          <p:cNvPr id="30" name="Text 28"/>
+          <p:cNvSpPr/>
+          <p:nvPr/>
+        </p:nvSpPr>
+        <p:spPr>
+          <a:xfrm>
+            <a:off x="6400800" y="5010912"/>
+            <a:ext cx="4892040" cy="320040"/>
           </a:xfrm>
           <a:prstGeom prst="rect">
             <a:avLst/>
@@ -12551,73 +17313,34 @@
           <a:bodyPr wrap="square" lIns="0" tIns="0" rIns="0" bIns="0" rtlCol="0" anchor="ctr"/>
           <a:lstStyle/>
           <a:p>
-            <a:pPr algn="ctr" indent="0" marL="0">
-              <a:buNone/>
-            </a:pPr>
-            <a:r>
-              <a:rPr lang="en-US" sz="900" i="1" dirty="0">
-                <a:solidFill>
-                  <a:srgbClr val="5B6B6B"/>
-                </a:solidFill>
-                <a:latin typeface="Calibri" pitchFamily="34" charset="0"/>
-                <a:ea typeface="Calibri" pitchFamily="34" charset="-122"/>
-                <a:cs typeface="Calibri" pitchFamily="34" charset="-120"/>
-              </a:rPr>
-              <a:t>static keys / plain object storage</a:t>
-            </a:r>
-            <a:endParaRPr lang="en-US" sz="900" dirty="0"/>
-          </a:p>
-        </p:txBody>
-      </p:sp>
-      <p:sp>
-        <p:nvSpPr>
-          <p:cNvPr id="18" name="Text 16"/>
-          <p:cNvSpPr/>
-          <p:nvPr/>
-        </p:nvSpPr>
-        <p:spPr>
-          <a:xfrm>
-            <a:off x="5029200" y="1947672"/>
-            <a:ext cx="2468880" cy="320040"/>
-          </a:xfrm>
-          <a:prstGeom prst="rect">
-            <a:avLst/>
-          </a:prstGeom>
-          <a:noFill/>
-          <a:ln/>
-        </p:spPr>
-        <p:txBody>
-          <a:bodyPr wrap="square" lIns="0" tIns="0" rIns="0" bIns="0" rtlCol="0" anchor="ctr"/>
-          <a:lstStyle/>
-          <a:p>
-            <a:pPr algn="ctr" indent="0" marL="0">
-              <a:buNone/>
-            </a:pPr>
-            <a:r>
-              <a:rPr lang="en-US" sz="900" i="1" dirty="0">
-                <a:solidFill>
-                  <a:srgbClr val="5B6B6B"/>
-                </a:solidFill>
-                <a:latin typeface="Calibri" pitchFamily="34" charset="0"/>
-                <a:ea typeface="Calibri" pitchFamily="34" charset="-122"/>
-                <a:cs typeface="Calibri" pitchFamily="34" charset="-120"/>
-              </a:rPr>
-              <a:t>native identity — no cross-cloud credential</a:t>
-            </a:r>
-            <a:endParaRPr lang="en-US" sz="900" dirty="0"/>
-          </a:p>
-        </p:txBody>
-      </p:sp>
-      <p:sp>
-        <p:nvSpPr>
-          <p:cNvPr id="19" name="Text 17"/>
-          <p:cNvSpPr/>
-          <p:nvPr/>
-        </p:nvSpPr>
-        <p:spPr>
-          <a:xfrm>
-            <a:off x="822960" y="1417320"/>
-            <a:ext cx="10378440" cy="777240"/>
+            <a:pPr indent="0" marL="0">
+              <a:buNone/>
+            </a:pPr>
+            <a:r>
+              <a:rPr lang="en-US" sz="1300" b="1" dirty="0">
+                <a:solidFill>
+                  <a:srgbClr val="0B3D3D"/>
+                </a:solidFill>
+                <a:latin typeface="Calibri" pitchFamily="34" charset="0"/>
+                <a:ea typeface="Calibri" pitchFamily="34" charset="-122"/>
+                <a:cs typeface="Calibri" pitchFamily="34" charset="-120"/>
+              </a:rPr>
+              <a:t>Trade-off</a:t>
+            </a:r>
+            <a:endParaRPr lang="en-US" sz="1300" dirty="0"/>
+          </a:p>
+        </p:txBody>
+      </p:sp>
+      <p:sp>
+        <p:nvSpPr>
+          <p:cNvPr id="31" name="Text 29"/>
+          <p:cNvSpPr/>
+          <p:nvPr/>
+        </p:nvSpPr>
+        <p:spPr>
+          <a:xfrm>
+            <a:off x="6400800" y="5349240"/>
+            <a:ext cx="4892040" cy="868680"/>
           </a:xfrm>
           <a:prstGeom prst="rect">
             <a:avLst/>
@@ -12633,7 +17356,7 @@
               <a:buNone/>
             </a:pPr>
             <a:r>
-              <a:rPr lang="en-US" sz="1200" i="1" dirty="0">
+              <a:rPr lang="en-US" sz="1100" dirty="0">
                 <a:solidFill>
                   <a:srgbClr val="1A2E2E"/>
                 </a:solidFill>
@@ -12641,165 +17364,9 @@
                 <a:ea typeface="Calibri" pitchFamily="34" charset="-122"/>
                 <a:cs typeface="Calibri" pitchFamily="34" charset="-120"/>
               </a:rPr>
-              <a:t>Key finding: the ingestion pipeline moves BYTES only — writing a filesystem object works fine with a simple credential. It is the CATALOG COMMIT that demands native identity; splitting the two steps at that seam is what makes cross-cloud writes work.</a:t>
-            </a:r>
-            <a:endParaRPr lang="en-US" sz="1200" dirty="0"/>
-          </a:p>
-        </p:txBody>
-      </p:sp>
-      <p:sp>
-        <p:nvSpPr>
-          <p:cNvPr id="20" name="Text 18"/>
-          <p:cNvSpPr/>
-          <p:nvPr/>
-        </p:nvSpPr>
-        <p:spPr>
-          <a:xfrm>
-            <a:off x="777240" y="4617720"/>
-            <a:ext cx="10607040" cy="320040"/>
-          </a:xfrm>
-          <a:prstGeom prst="rect">
-            <a:avLst/>
-          </a:prstGeom>
-          <a:noFill/>
-          <a:ln/>
-        </p:spPr>
-        <p:txBody>
-          <a:bodyPr wrap="square" lIns="0" tIns="0" rIns="0" bIns="0" rtlCol="0" anchor="ctr"/>
-          <a:lstStyle/>
-          <a:p>
-            <a:pPr indent="0" marL="0">
-              <a:buNone/>
-            </a:pPr>
-            <a:r>
-              <a:rPr lang="en-US" sz="1400" b="1" dirty="0">
-                <a:solidFill>
-                  <a:srgbClr val="0B3D3D"/>
-                </a:solidFill>
-                <a:latin typeface="Calibri" pitchFamily="34" charset="0"/>
-                <a:ea typeface="Calibri" pitchFamily="34" charset="-122"/>
-                <a:cs typeface="Calibri" pitchFamily="34" charset="-120"/>
-              </a:rPr>
-              <a:t>Best for</a:t>
-            </a:r>
-            <a:endParaRPr lang="en-US" sz="1400" dirty="0"/>
-          </a:p>
-        </p:txBody>
-      </p:sp>
-      <p:sp>
-        <p:nvSpPr>
-          <p:cNvPr id="21" name="Text 19"/>
-          <p:cNvSpPr/>
-          <p:nvPr/>
-        </p:nvSpPr>
-        <p:spPr>
-          <a:xfrm>
-            <a:off x="777240" y="4946904"/>
-            <a:ext cx="10607040" cy="777240"/>
-          </a:xfrm>
-          <a:prstGeom prst="rect">
-            <a:avLst/>
-          </a:prstGeom>
-          <a:noFill/>
-          <a:ln/>
-        </p:spPr>
-        <p:txBody>
-          <a:bodyPr wrap="square" lIns="0" tIns="0" rIns="0" bIns="0" rtlCol="0" anchor="t"/>
-          <a:lstStyle/>
-          <a:p>
-            <a:pPr indent="0" marL="0">
-              <a:buNone/>
-            </a:pPr>
-            <a:r>
-              <a:rPr lang="en-US" sz="1200" dirty="0">
-                <a:solidFill>
-                  <a:srgbClr val="1A2E2E"/>
-                </a:solidFill>
-                <a:latin typeface="Calibri" pitchFamily="34" charset="0"/>
-                <a:ea typeface="Calibri" pitchFamily="34" charset="-122"/>
-                <a:cs typeface="Calibri" pitchFamily="34" charset="-120"/>
-              </a:rPr>
-              <a:t>New pipelines whose consumers are known to be on the target cloud from day one — write once, in the right place, and skip replication entirely.</a:t>
-            </a:r>
-            <a:endParaRPr lang="en-US" sz="1200" dirty="0"/>
-          </a:p>
-        </p:txBody>
-      </p:sp>
-      <p:sp>
-        <p:nvSpPr>
-          <p:cNvPr id="22" name="Text 20"/>
-          <p:cNvSpPr/>
-          <p:nvPr/>
-        </p:nvSpPr>
-        <p:spPr>
-          <a:xfrm>
-            <a:off x="777240" y="5788152"/>
-            <a:ext cx="10607040" cy="320040"/>
-          </a:xfrm>
-          <a:prstGeom prst="rect">
-            <a:avLst/>
-          </a:prstGeom>
-          <a:noFill/>
-          <a:ln/>
-        </p:spPr>
-        <p:txBody>
-          <a:bodyPr wrap="square" lIns="0" tIns="0" rIns="0" bIns="0" rtlCol="0" anchor="ctr"/>
-          <a:lstStyle/>
-          <a:p>
-            <a:pPr indent="0" marL="0">
-              <a:buNone/>
-            </a:pPr>
-            <a:r>
-              <a:rPr lang="en-US" sz="1400" b="1" dirty="0">
-                <a:solidFill>
-                  <a:srgbClr val="0B3D3D"/>
-                </a:solidFill>
-                <a:latin typeface="Calibri" pitchFamily="34" charset="0"/>
-                <a:ea typeface="Calibri" pitchFamily="34" charset="-122"/>
-                <a:cs typeface="Calibri" pitchFamily="34" charset="-120"/>
-              </a:rPr>
-              <a:t>Trade-off</a:t>
-            </a:r>
-            <a:endParaRPr lang="en-US" sz="1400" dirty="0"/>
-          </a:p>
-        </p:txBody>
-      </p:sp>
-      <p:sp>
-        <p:nvSpPr>
-          <p:cNvPr id="23" name="Text 21"/>
-          <p:cNvSpPr/>
-          <p:nvPr/>
-        </p:nvSpPr>
-        <p:spPr>
-          <a:xfrm>
-            <a:off x="777240" y="6117336"/>
-            <a:ext cx="10607040" cy="777240"/>
-          </a:xfrm>
-          <a:prstGeom prst="rect">
-            <a:avLst/>
-          </a:prstGeom>
-          <a:noFill/>
-          <a:ln/>
-        </p:spPr>
-        <p:txBody>
-          <a:bodyPr wrap="square" lIns="0" tIns="0" rIns="0" bIns="0" rtlCol="0" anchor="t"/>
-          <a:lstStyle/>
-          <a:p>
-            <a:pPr indent="0" marL="0">
-              <a:buNone/>
-            </a:pPr>
-            <a:r>
-              <a:rPr lang="en-US" sz="1200" dirty="0">
-                <a:solidFill>
-                  <a:srgbClr val="1A2E2E"/>
-                </a:solidFill>
-                <a:latin typeface="Calibri" pitchFamily="34" charset="0"/>
-                <a:ea typeface="Calibri" pitchFamily="34" charset="-122"/>
-                <a:cs typeface="Calibri" pitchFamily="34" charset="-120"/>
-              </a:rPr>
-              <a:t>The pipeline now owns a scheduled promotion step and a raw-file retention policy, but gains a replayable archive of everything ever ingested.</a:t>
-            </a:r>
-            <a:endParaRPr lang="en-US" sz="1200" dirty="0"/>
+              <a:t>The framework variant owns a scheduled promotion step and a raw-file retention policy, but gains a replayable archive of everything ever ingested.</a:t>
+            </a:r>
+            <a:endParaRPr lang="en-US" sz="1100" dirty="0"/>
           </a:p>
         </p:txBody>
       </p:sp>
